--- a/report/edos_slide.pptx
+++ b/report/edos_slide.pptx
@@ -5571,15 +5571,7 @@
                   <a:srgbClr val="FFFFFF"/>
                 </a:solidFill>
               </a:rPr>
-              <a:t>Giả</a:t>
-            </a:r>
-            <a:r>
-              <a:rPr lang="en-US" sz="2200" b="1" dirty="0" err="1" smtClean="0">
-                <a:solidFill>
-                  <a:srgbClr val="FFFFFF"/>
-                </a:solidFill>
-              </a:rPr>
-              <a:t>i</a:t>
+              <a:t>Giải</a:t>
             </a:r>
             <a:r>
               <a:rPr lang="en-US" sz="2200" b="1" dirty="0" smtClean="0">
@@ -7233,7 +7225,15 @@
                   <a:srgbClr val="64748B"/>
                 </a:solidFill>
               </a:rPr>
-              <a:t>Intel Core i9-13900K</a:t>
+              <a:t>Intel Core </a:t>
+            </a:r>
+            <a:r>
+              <a:rPr lang="en-US" sz="1000" dirty="0" smtClean="0">
+                <a:solidFill>
+                  <a:srgbClr val="64748B"/>
+                </a:solidFill>
+              </a:rPr>
+              <a:t>i5-11G</a:t>
             </a:r>
             <a:endParaRPr lang="en-US" sz="1000" dirty="0"/>
           </a:p>
@@ -7247,7 +7247,47 @@
                   <a:srgbClr val="64748B"/>
                 </a:solidFill>
               </a:rPr>
-              <a:t>32 luồng, 64 GB RAM</a:t>
+              <a:t>8</a:t>
+            </a:r>
+            <a:r>
+              <a:rPr lang="en-US" sz="1000" dirty="0" smtClean="0">
+                <a:solidFill>
+                  <a:srgbClr val="64748B"/>
+                </a:solidFill>
+              </a:rPr>
+              <a:t> </a:t>
+            </a:r>
+            <a:r>
+              <a:rPr lang="en-US" sz="1000" dirty="0">
+                <a:solidFill>
+                  <a:srgbClr val="64748B"/>
+                </a:solidFill>
+              </a:rPr>
+              <a:t>luồng, </a:t>
+            </a:r>
+            <a:r>
+              <a:rPr lang="en-US" sz="1000" dirty="0" smtClean="0">
+                <a:solidFill>
+                  <a:srgbClr val="64748B"/>
+                </a:solidFill>
+              </a:rPr>
+              <a:t>16</a:t>
+            </a:r>
+            <a:r>
+              <a:rPr lang="en-US" sz="1000" dirty="0" smtClean="0">
+                <a:solidFill>
+                  <a:srgbClr val="64748B"/>
+                </a:solidFill>
+              </a:rPr>
+              <a:t> </a:t>
+            </a:r>
+            <a:r>
+              <a:rPr lang="en-US" sz="1000" dirty="0">
+                <a:solidFill>
+                  <a:srgbClr val="64748B"/>
+                </a:solidFill>
+              </a:rPr>
+              <a:t>GB RAM</a:t>
             </a:r>
             <a:endParaRPr lang="en-US" sz="1000" dirty="0"/>
           </a:p>
@@ -7314,63 +7354,184 @@
               <a:buNone/>
             </a:pPr>
             <a:r>
+              <a:rPr lang="en-US" sz="1000" dirty="0" err="1" smtClean="0">
+                <a:solidFill>
+                  <a:srgbClr val="64748B"/>
+                </a:solidFill>
+              </a:rPr>
+              <a:t>Sử</a:t>
+            </a:r>
+            <a:r>
+              <a:rPr lang="en-US" sz="1000" dirty="0" smtClean="0">
+                <a:solidFill>
+                  <a:srgbClr val="64748B"/>
+                </a:solidFill>
+              </a:rPr>
+              <a:t> </a:t>
+            </a:r>
+            <a:r>
+              <a:rPr lang="en-US" sz="1000" dirty="0" err="1" smtClean="0">
+                <a:solidFill>
+                  <a:srgbClr val="64748B"/>
+                </a:solidFill>
+              </a:rPr>
+              <a:t>dụng</a:t>
+            </a:r>
+            <a:r>
+              <a:rPr lang="en-US" sz="1000" dirty="0" smtClean="0">
+                <a:solidFill>
+                  <a:srgbClr val="64748B"/>
+                </a:solidFill>
+              </a:rPr>
+              <a:t> Kind </a:t>
+            </a:r>
+            <a:r>
+              <a:rPr lang="en-US" sz="1000" dirty="0" err="1" smtClean="0">
+                <a:solidFill>
+                  <a:srgbClr val="64748B"/>
+                </a:solidFill>
+              </a:rPr>
+              <a:t>để</a:t>
+            </a:r>
+            <a:r>
+              <a:rPr lang="en-US" sz="1000" dirty="0" smtClean="0">
+                <a:solidFill>
+                  <a:srgbClr val="64748B"/>
+                </a:solidFill>
+              </a:rPr>
+              <a:t> </a:t>
+            </a:r>
+            <a:r>
+              <a:rPr lang="en-US" sz="1000" dirty="0" err="1" smtClean="0">
+                <a:solidFill>
+                  <a:srgbClr val="64748B"/>
+                </a:solidFill>
+              </a:rPr>
+              <a:t>mô</a:t>
+            </a:r>
+            <a:r>
+              <a:rPr lang="en-US" sz="1000" dirty="0" smtClean="0">
+                <a:solidFill>
+                  <a:srgbClr val="64748B"/>
+                </a:solidFill>
+              </a:rPr>
+              <a:t> </a:t>
+            </a:r>
+            <a:r>
+              <a:rPr lang="en-US" sz="1000" dirty="0" err="1" smtClean="0">
+                <a:solidFill>
+                  <a:srgbClr val="64748B"/>
+                </a:solidFill>
+              </a:rPr>
+              <a:t>phỏng</a:t>
+            </a:r>
+            <a:r>
               <a:rPr lang="en-US" sz="1000" dirty="0">
                 <a:solidFill>
                   <a:srgbClr val="64748B"/>
                 </a:solidFill>
               </a:rPr>
-              <a:t>Kubernetes cluster trong container</a:t>
-            </a:r>
-            <a:endParaRPr lang="en-US" sz="1000" dirty="0"/>
-          </a:p>
-        </p:txBody>
-      </p:sp>
-      <p:sp>
-        <p:nvSpPr>
-          <p:cNvPr id="14" name="Text 12"/>
-          <p:cNvSpPr/>
-          <p:nvPr/>
-        </p:nvSpPr>
-        <p:spPr>
-          <a:xfrm>
-            <a:off x="457200" y="2578608"/>
-            <a:ext cx="3749040" cy="256032"/>
-          </a:xfrm>
-          <a:prstGeom prst="rect">
-            <a:avLst/>
-          </a:prstGeom>
-          <a:noFill/>
-          <a:ln/>
-        </p:spPr>
-        <p:txBody>
-          <a:bodyPr wrap="square" lIns="0" tIns="0" rIns="0" bIns="0" rtlCol="0" anchor="ctr"/>
-          <a:lstStyle/>
+              <a:t> </a:t>
+            </a:r>
+            <a:r>
+              <a:rPr lang="en-US" sz="1000" dirty="0" smtClean="0">
+                <a:solidFill>
+                  <a:srgbClr val="64748B"/>
+                </a:solidFill>
+              </a:rPr>
+              <a:t>cluster 1 control-plane + 3 worker</a:t>
+            </a:r>
+          </a:p>
           <a:p>
             <a:pPr marL="0" indent="0">
               <a:buNone/>
             </a:pPr>
             <a:r>
-              <a:rPr lang="en-US" sz="1050" b="1" dirty="0">
-                <a:solidFill>
-                  <a:srgbClr val="0096B7"/>
-                </a:solidFill>
-              </a:rPr>
-              <a:t>[ App ]  TeaStore [18]</a:t>
-            </a:r>
-            <a:endParaRPr lang="en-US" sz="1050" dirty="0"/>
-          </a:p>
-        </p:txBody>
-      </p:sp>
-      <p:sp>
-        <p:nvSpPr>
-          <p:cNvPr id="15" name="Text 13"/>
-          <p:cNvSpPr/>
-          <p:nvPr/>
-        </p:nvSpPr>
-        <p:spPr>
-          <a:xfrm>
-            <a:off x="621792" y="2834640"/>
-            <a:ext cx="3611880" cy="320040"/>
+              <a:rPr lang="en-US" sz="1000" dirty="0" smtClean="0">
+                <a:solidFill>
+                  <a:srgbClr val="64748B"/>
+                </a:solidFill>
+              </a:rPr>
+              <a:t>HPA min 1 pod -&gt; scale max 6 pod, </a:t>
+            </a:r>
+            <a:r>
+              <a:rPr lang="en-US" sz="1000" dirty="0" err="1" smtClean="0">
+                <a:solidFill>
+                  <a:srgbClr val="64748B"/>
+                </a:solidFill>
+              </a:rPr>
+              <a:t>ngưỡng</a:t>
+            </a:r>
+            <a:r>
+              <a:rPr lang="en-US" sz="1000" dirty="0" smtClean="0">
+                <a:solidFill>
+                  <a:srgbClr val="64748B"/>
+                </a:solidFill>
+              </a:rPr>
+              <a:t> </a:t>
+            </a:r>
+            <a:r>
+              <a:rPr lang="en-US" sz="1000" dirty="0" err="1" smtClean="0">
+                <a:solidFill>
+                  <a:srgbClr val="64748B"/>
+                </a:solidFill>
+              </a:rPr>
+              <a:t>thiết</a:t>
+            </a:r>
+            <a:r>
+              <a:rPr lang="en-US" sz="1000" dirty="0" smtClean="0">
+                <a:solidFill>
+                  <a:srgbClr val="64748B"/>
+                </a:solidFill>
+              </a:rPr>
+              <a:t> </a:t>
+            </a:r>
+            <a:r>
+              <a:rPr lang="en-US" sz="1000" dirty="0" err="1" smtClean="0">
+                <a:solidFill>
+                  <a:srgbClr val="64748B"/>
+                </a:solidFill>
+              </a:rPr>
+              <a:t>lập</a:t>
+            </a:r>
+            <a:r>
+              <a:rPr lang="en-US" sz="1000" dirty="0" smtClean="0">
+                <a:solidFill>
+                  <a:srgbClr val="64748B"/>
+                </a:solidFill>
+              </a:rPr>
+              <a:t> </a:t>
+            </a:r>
+            <a:r>
+              <a:rPr lang="en-US" sz="1000" dirty="0" err="1" smtClean="0">
+                <a:solidFill>
+                  <a:srgbClr val="64748B"/>
+                </a:solidFill>
+              </a:rPr>
+              <a:t>là</a:t>
+            </a:r>
+            <a:r>
+              <a:rPr lang="en-US" sz="1000" dirty="0" smtClean="0">
+                <a:solidFill>
+                  <a:srgbClr val="64748B"/>
+                </a:solidFill>
+              </a:rPr>
+              <a:t> 50% CPU</a:t>
+            </a:r>
+            <a:endParaRPr lang="en-US" sz="1000" dirty="0"/>
+          </a:p>
+        </p:txBody>
+      </p:sp>
+      <p:sp>
+        <p:nvSpPr>
+          <p:cNvPr id="14" name="Text 12"/>
+          <p:cNvSpPr/>
+          <p:nvPr/>
+        </p:nvSpPr>
+        <p:spPr>
+          <a:xfrm>
+            <a:off x="457200" y="2578608"/>
+            <a:ext cx="3749040" cy="256032"/>
           </a:xfrm>
           <a:prstGeom prst="rect">
             <a:avLst/>
@@ -7386,27 +7547,27 @@
               <a:buNone/>
             </a:pPr>
             <a:r>
-              <a:rPr lang="en-US" sz="1000" dirty="0">
-                <a:solidFill>
-                  <a:srgbClr val="64748B"/>
-                </a:solidFill>
-              </a:rPr>
-              <a:t>E-commerce microservices (6 thành phần)</a:t>
-            </a:r>
-            <a:endParaRPr lang="en-US" sz="1000" dirty="0"/>
-          </a:p>
-        </p:txBody>
-      </p:sp>
-      <p:sp>
-        <p:nvSpPr>
-          <p:cNvPr id="16" name="Text 14"/>
-          <p:cNvSpPr/>
-          <p:nvPr/>
-        </p:nvSpPr>
-        <p:spPr>
-          <a:xfrm>
-            <a:off x="457200" y="3218688"/>
-            <a:ext cx="3749040" cy="256032"/>
+              <a:rPr lang="en-US" sz="1050" b="1" dirty="0">
+                <a:solidFill>
+                  <a:srgbClr val="0096B7"/>
+                </a:solidFill>
+              </a:rPr>
+              <a:t>[ App ]  TeaStore [18]</a:t>
+            </a:r>
+            <a:endParaRPr lang="en-US" sz="1050" dirty="0"/>
+          </a:p>
+        </p:txBody>
+      </p:sp>
+      <p:sp>
+        <p:nvSpPr>
+          <p:cNvPr id="15" name="Text 13"/>
+          <p:cNvSpPr/>
+          <p:nvPr/>
+        </p:nvSpPr>
+        <p:spPr>
+          <a:xfrm>
+            <a:off x="621792" y="2834640"/>
+            <a:ext cx="3611880" cy="320040"/>
           </a:xfrm>
           <a:prstGeom prst="rect">
             <a:avLst/>
@@ -7422,27 +7583,43 @@
               <a:buNone/>
             </a:pPr>
             <a:r>
-              <a:rPr lang="en-US" sz="1050" b="1" dirty="0">
-                <a:solidFill>
-                  <a:srgbClr val="0096B7"/>
-                </a:solidFill>
-              </a:rPr>
-              <a:t>[Load]  Apache jMeter [19]</a:t>
-            </a:r>
-            <a:endParaRPr lang="en-US" sz="1050" dirty="0"/>
-          </a:p>
-        </p:txBody>
-      </p:sp>
-      <p:sp>
-        <p:nvSpPr>
-          <p:cNvPr id="17" name="Text 15"/>
-          <p:cNvSpPr/>
-          <p:nvPr/>
-        </p:nvSpPr>
-        <p:spPr>
-          <a:xfrm>
-            <a:off x="621792" y="3474720"/>
-            <a:ext cx="3611880" cy="320040"/>
+              <a:rPr lang="en-US" sz="1000" dirty="0" smtClean="0">
+                <a:solidFill>
+                  <a:srgbClr val="64748B"/>
+                </a:solidFill>
+              </a:rPr>
+              <a:t>Nginx/</a:t>
+            </a:r>
+            <a:r>
+              <a:rPr lang="en-US" sz="1000" dirty="0" err="1" smtClean="0">
+                <a:solidFill>
+                  <a:srgbClr val="64748B"/>
+                </a:solidFill>
+              </a:rPr>
+              <a:t>OpenRestry</a:t>
+            </a:r>
+            <a:r>
+              <a:rPr lang="en-US" sz="1000" dirty="0" smtClean="0">
+                <a:solidFill>
+                  <a:srgbClr val="64748B"/>
+                </a:solidFill>
+              </a:rPr>
+              <a:t> stress app (1 pod)</a:t>
+            </a:r>
+            <a:endParaRPr lang="en-US" sz="1000" dirty="0"/>
+          </a:p>
+        </p:txBody>
+      </p:sp>
+      <p:sp>
+        <p:nvSpPr>
+          <p:cNvPr id="16" name="Text 14"/>
+          <p:cNvSpPr/>
+          <p:nvPr/>
+        </p:nvSpPr>
+        <p:spPr>
+          <a:xfrm>
+            <a:off x="457200" y="3218688"/>
+            <a:ext cx="3749040" cy="256032"/>
           </a:xfrm>
           <a:prstGeom prst="rect">
             <a:avLst/>
@@ -7458,12 +7635,88 @@
               <a:buNone/>
             </a:pPr>
             <a:r>
+              <a:rPr lang="en-US" sz="1050" b="1" dirty="0">
+                <a:solidFill>
+                  <a:srgbClr val="0096B7"/>
+                </a:solidFill>
+              </a:rPr>
+              <a:t>[Load]  Apache jMeter [19]</a:t>
+            </a:r>
+            <a:endParaRPr lang="en-US" sz="1050" dirty="0"/>
+          </a:p>
+        </p:txBody>
+      </p:sp>
+      <p:sp>
+        <p:nvSpPr>
+          <p:cNvPr id="17" name="Text 15"/>
+          <p:cNvSpPr/>
+          <p:nvPr/>
+        </p:nvSpPr>
+        <p:spPr>
+          <a:xfrm>
+            <a:off x="621792" y="3474720"/>
+            <a:ext cx="3611880" cy="320040"/>
+          </a:xfrm>
+          <a:prstGeom prst="rect">
+            <a:avLst/>
+          </a:prstGeom>
+          <a:noFill/>
+          <a:ln/>
+        </p:spPr>
+        <p:txBody>
+          <a:bodyPr wrap="square" lIns="0" tIns="0" rIns="0" bIns="0" rtlCol="0" anchor="ctr"/>
+          <a:lstStyle/>
+          <a:p>
+            <a:pPr marL="0" indent="0">
+              <a:buNone/>
+            </a:pPr>
+            <a:r>
               <a:rPr lang="en-US" sz="1000" dirty="0">
                 <a:solidFill>
                   <a:srgbClr val="64748B"/>
                 </a:solidFill>
               </a:rPr>
-              <a:t>Tạo traffic hợp lệ 36 req/s</a:t>
+              <a:t>Tạo traffic </a:t>
+            </a:r>
+            <a:r>
+              <a:rPr lang="en-US" sz="1000" dirty="0" err="1">
+                <a:solidFill>
+                  <a:srgbClr val="64748B"/>
+                </a:solidFill>
+              </a:rPr>
+              <a:t>hợp</a:t>
+            </a:r>
+            <a:r>
+              <a:rPr lang="en-US" sz="1000" dirty="0">
+                <a:solidFill>
+                  <a:srgbClr val="64748B"/>
+                </a:solidFill>
+              </a:rPr>
+              <a:t> </a:t>
+            </a:r>
+            <a:r>
+              <a:rPr lang="en-US" sz="1000" dirty="0" err="1" smtClean="0">
+                <a:solidFill>
+                  <a:srgbClr val="64748B"/>
+                </a:solidFill>
+              </a:rPr>
+              <a:t>lệ</a:t>
+            </a:r>
+            <a:r>
+              <a:rPr lang="en-US" sz="1000" dirty="0" smtClean="0">
+                <a:solidFill>
+                  <a:srgbClr val="64748B"/>
+                </a:solidFill>
+              </a:rPr>
+              <a:t> </a:t>
+            </a:r>
+            <a:r>
+              <a:rPr lang="en-US" sz="1000" dirty="0">
+                <a:solidFill>
+                  <a:srgbClr val="64748B"/>
+                </a:solidFill>
+              </a:rPr>
+              <a:t>req/s</a:t>
             </a:r>
             <a:endParaRPr lang="en-US" sz="1000" dirty="0"/>
           </a:p>
@@ -7628,7 +7881,47 @@
                   <a:srgbClr val="0D1B2A"/>
                 </a:solidFill>
               </a:rPr>
-              <a:t>Kịch bản &amp; Tham số</a:t>
+              <a:t>Kịch </a:t>
+            </a:r>
+            <a:r>
+              <a:rPr lang="en-US" sz="1200" b="1" dirty="0" err="1">
+                <a:solidFill>
+                  <a:srgbClr val="0D1B2A"/>
+                </a:solidFill>
+              </a:rPr>
+              <a:t>bản</a:t>
+            </a:r>
+            <a:r>
+              <a:rPr lang="en-US" sz="1200" b="1" dirty="0">
+                <a:solidFill>
+                  <a:srgbClr val="0D1B2A"/>
+                </a:solidFill>
+              </a:rPr>
+              <a:t> </a:t>
+            </a:r>
+            <a:r>
+              <a:rPr lang="en-US" sz="1200" b="1" dirty="0" err="1" smtClean="0">
+                <a:solidFill>
+                  <a:srgbClr val="0D1B2A"/>
+                </a:solidFill>
+              </a:rPr>
+              <a:t>mô</a:t>
+            </a:r>
+            <a:r>
+              <a:rPr lang="en-US" sz="1200" b="1" dirty="0" smtClean="0">
+                <a:solidFill>
+                  <a:srgbClr val="0D1B2A"/>
+                </a:solidFill>
+              </a:rPr>
+              <a:t> </a:t>
+            </a:r>
+            <a:r>
+              <a:rPr lang="en-US" sz="1200" b="1" dirty="0" err="1" smtClean="0">
+                <a:solidFill>
+                  <a:srgbClr val="0D1B2A"/>
+                </a:solidFill>
+              </a:rPr>
+              <a:t>phỏng</a:t>
             </a:r>
             <a:endParaRPr lang="en-US" sz="1200" dirty="0"/>
           </a:p>
@@ -7643,7 +7936,7 @@
         <p:spPr>
           <a:xfrm>
             <a:off x="4773168" y="1261872"/>
-            <a:ext cx="3840480" cy="256032"/>
+            <a:ext cx="3840480" cy="1252728"/>
           </a:xfrm>
           <a:prstGeom prst="rect">
             <a:avLst/>
@@ -7655,16 +7948,532 @@
           <a:bodyPr wrap="square" lIns="0" tIns="0" rIns="0" bIns="0" rtlCol="0" anchor="ctr"/>
           <a:lstStyle/>
           <a:p>
-            <a:pPr marL="0" indent="0">
-              <a:buNone/>
+            <a:r>
+              <a:rPr lang="en-US" sz="1050" b="1" i="1" dirty="0" err="1" smtClean="0">
+                <a:solidFill>
+                  <a:srgbClr val="0D1B2A"/>
+                </a:solidFill>
+              </a:rPr>
+              <a:t>Giai</a:t>
+            </a:r>
+            <a:r>
+              <a:rPr lang="en-US" sz="1050" b="1" i="1" dirty="0" smtClean="0">
+                <a:solidFill>
+                  <a:srgbClr val="0D1B2A"/>
+                </a:solidFill>
+              </a:rPr>
+              <a:t> </a:t>
+            </a:r>
+            <a:r>
+              <a:rPr lang="en-US" sz="1050" b="1" i="1" dirty="0" err="1" smtClean="0">
+                <a:solidFill>
+                  <a:srgbClr val="0D1B2A"/>
+                </a:solidFill>
+              </a:rPr>
+              <a:t>đoạn</a:t>
+            </a:r>
+            <a:r>
+              <a:rPr lang="en-US" sz="1050" b="1" i="1" dirty="0" smtClean="0">
+                <a:solidFill>
+                  <a:srgbClr val="0D1B2A"/>
+                </a:solidFill>
+              </a:rPr>
+              <a:t> 1 – </a:t>
+            </a:r>
+            <a:r>
+              <a:rPr lang="en-US" sz="1050" b="1" i="1" dirty="0" err="1" smtClean="0">
+                <a:solidFill>
+                  <a:srgbClr val="0D1B2A"/>
+                </a:solidFill>
+              </a:rPr>
+              <a:t>Thiết</a:t>
+            </a:r>
+            <a:r>
+              <a:rPr lang="en-US" sz="1050" b="1" i="1" dirty="0" smtClean="0">
+                <a:solidFill>
+                  <a:srgbClr val="0D1B2A"/>
+                </a:solidFill>
+              </a:rPr>
+              <a:t> </a:t>
+            </a:r>
+            <a:r>
+              <a:rPr lang="en-US" sz="1050" b="1" i="1" dirty="0" err="1" smtClean="0">
+                <a:solidFill>
+                  <a:srgbClr val="0D1B2A"/>
+                </a:solidFill>
+              </a:rPr>
+              <a:t>lập</a:t>
+            </a:r>
+            <a:r>
+              <a:rPr lang="en-US" sz="1050" b="1" i="1" dirty="0" smtClean="0">
+                <a:solidFill>
+                  <a:srgbClr val="0D1B2A"/>
+                </a:solidFill>
+              </a:rPr>
+              <a:t> baseline</a:t>
+            </a:r>
+          </a:p>
+          <a:p>
+            <a:pPr marL="171450" indent="-171450">
+              <a:buFontTx/>
+              <a:buChar char="-"/>
             </a:pPr>
             <a:r>
-              <a:rPr lang="en-US" sz="1050" b="1" dirty="0">
-                <a:solidFill>
-                  <a:srgbClr val="0D1B2A"/>
-                </a:solidFill>
-              </a:rPr>
-              <a:t>Mẫu lưu lượng khách hàng:</a:t>
+              <a:rPr lang="en-US" sz="1050" dirty="0" smtClean="0">
+                <a:solidFill>
+                  <a:srgbClr val="0D1B2A"/>
+                </a:solidFill>
+              </a:rPr>
+              <a:t>H</a:t>
+            </a:r>
+            <a:r>
+              <a:rPr lang="vi-VN" sz="1050" dirty="0" smtClean="0">
+                <a:solidFill>
+                  <a:srgbClr val="0D1B2A"/>
+                </a:solidFill>
+              </a:rPr>
+              <a:t>ệ </a:t>
+            </a:r>
+            <a:r>
+              <a:rPr lang="vi-VN" sz="1050" dirty="0">
+                <a:solidFill>
+                  <a:srgbClr val="0D1B2A"/>
+                </a:solidFill>
+              </a:rPr>
+              <a:t>thống được đưa về trạng thái sạch với </a:t>
+            </a:r>
+            <a:r>
+              <a:rPr lang="vi-VN" sz="1050" dirty="0" smtClean="0">
+                <a:solidFill>
+                  <a:srgbClr val="0D1B2A"/>
+                </a:solidFill>
+              </a:rPr>
+              <a:t>một</a:t>
+            </a:r>
+            <a:r>
+              <a:rPr lang="en-US" sz="1050" dirty="0" smtClean="0">
+                <a:solidFill>
+                  <a:srgbClr val="0D1B2A"/>
+                </a:solidFill>
+              </a:rPr>
+              <a:t> </a:t>
+            </a:r>
+            <a:r>
+              <a:rPr lang="vi-VN" sz="1050" dirty="0" smtClean="0">
+                <a:solidFill>
+                  <a:srgbClr val="0D1B2A"/>
+                </a:solidFill>
+              </a:rPr>
+              <a:t>replica </a:t>
+            </a:r>
+            <a:r>
+              <a:rPr lang="vi-VN" sz="1050" dirty="0">
+                <a:solidFill>
+                  <a:srgbClr val="0D1B2A"/>
+                </a:solidFill>
+              </a:rPr>
+              <a:t>duy nhất của dịch vụ </a:t>
+            </a:r>
+            <a:r>
+              <a:rPr lang="vi-VN" sz="1050" dirty="0" smtClean="0">
+                <a:solidFill>
+                  <a:srgbClr val="0D1B2A"/>
+                </a:solidFill>
+              </a:rPr>
+              <a:t>web</a:t>
+            </a:r>
+            <a:r>
+              <a:rPr lang="en-US" sz="1050" dirty="0" smtClean="0">
+                <a:solidFill>
+                  <a:srgbClr val="0D1B2A"/>
+                </a:solidFill>
+              </a:rPr>
+              <a:t>.</a:t>
+            </a:r>
+          </a:p>
+          <a:p>
+            <a:pPr marL="171450" indent="-171450">
+              <a:buFontTx/>
+              <a:buChar char="-"/>
+            </a:pPr>
+            <a:r>
+              <a:rPr lang="en-US" sz="1050" dirty="0" err="1" smtClean="0">
+                <a:solidFill>
+                  <a:srgbClr val="0D1B2A"/>
+                </a:solidFill>
+              </a:rPr>
+              <a:t>Lượng</a:t>
+            </a:r>
+            <a:r>
+              <a:rPr lang="en-US" sz="1050" dirty="0" smtClean="0">
+                <a:solidFill>
+                  <a:srgbClr val="0D1B2A"/>
+                </a:solidFill>
+              </a:rPr>
+              <a:t> </a:t>
+            </a:r>
+            <a:r>
+              <a:rPr lang="en-US" sz="1050" dirty="0" err="1" smtClean="0">
+                <a:solidFill>
+                  <a:srgbClr val="0D1B2A"/>
+                </a:solidFill>
+              </a:rPr>
+              <a:t>tải</a:t>
+            </a:r>
+            <a:r>
+              <a:rPr lang="en-US" sz="1050" dirty="0" smtClean="0">
+                <a:solidFill>
+                  <a:srgbClr val="0D1B2A"/>
+                </a:solidFill>
+              </a:rPr>
+              <a:t> </a:t>
+            </a:r>
+            <a:r>
+              <a:rPr lang="en-US" sz="1050" dirty="0" err="1" smtClean="0">
+                <a:solidFill>
+                  <a:srgbClr val="0D1B2A"/>
+                </a:solidFill>
+              </a:rPr>
+              <a:t>mô</a:t>
+            </a:r>
+            <a:r>
+              <a:rPr lang="en-US" sz="1050" dirty="0" smtClean="0">
+                <a:solidFill>
+                  <a:srgbClr val="0D1B2A"/>
+                </a:solidFill>
+              </a:rPr>
+              <a:t> </a:t>
+            </a:r>
+            <a:r>
+              <a:rPr lang="en-US" sz="1050" dirty="0" err="1" smtClean="0">
+                <a:solidFill>
+                  <a:srgbClr val="0D1B2A"/>
+                </a:solidFill>
+              </a:rPr>
+              <a:t>phỏng</a:t>
+            </a:r>
+            <a:r>
+              <a:rPr lang="en-US" sz="1050" dirty="0" smtClean="0">
+                <a:solidFill>
+                  <a:srgbClr val="0D1B2A"/>
+                </a:solidFill>
+              </a:rPr>
+              <a:t> </a:t>
+            </a:r>
+            <a:r>
+              <a:rPr lang="en-US" sz="1050" dirty="0" err="1" smtClean="0">
+                <a:solidFill>
+                  <a:srgbClr val="0D1B2A"/>
+                </a:solidFill>
+              </a:rPr>
+              <a:t>như</a:t>
+            </a:r>
+            <a:r>
+              <a:rPr lang="en-US" sz="1050" dirty="0" smtClean="0">
+                <a:solidFill>
+                  <a:srgbClr val="0D1B2A"/>
+                </a:solidFill>
+              </a:rPr>
+              <a:t> </a:t>
+            </a:r>
+            <a:r>
+              <a:rPr lang="en-US" sz="1050" dirty="0" err="1" smtClean="0">
+                <a:solidFill>
+                  <a:srgbClr val="0D1B2A"/>
+                </a:solidFill>
+              </a:rPr>
+              <a:t>người</a:t>
+            </a:r>
+            <a:r>
+              <a:rPr lang="en-US" sz="1050" dirty="0" smtClean="0">
+                <a:solidFill>
+                  <a:srgbClr val="0D1B2A"/>
+                </a:solidFill>
+              </a:rPr>
+              <a:t> </a:t>
+            </a:r>
+            <a:r>
+              <a:rPr lang="en-US" sz="1050" dirty="0" err="1" smtClean="0">
+                <a:solidFill>
+                  <a:srgbClr val="0D1B2A"/>
+                </a:solidFill>
+              </a:rPr>
+              <a:t>dùng</a:t>
+            </a:r>
+            <a:r>
+              <a:rPr lang="en-US" sz="1050" dirty="0" smtClean="0">
+                <a:solidFill>
+                  <a:srgbClr val="0D1B2A"/>
+                </a:solidFill>
+              </a:rPr>
+              <a:t> </a:t>
+            </a:r>
+            <a:r>
+              <a:rPr lang="en-US" sz="1050" dirty="0" err="1" smtClean="0">
+                <a:solidFill>
+                  <a:srgbClr val="0D1B2A"/>
+                </a:solidFill>
+              </a:rPr>
+              <a:t>bình</a:t>
+            </a:r>
+            <a:r>
+              <a:rPr lang="en-US" sz="1050" dirty="0" smtClean="0">
+                <a:solidFill>
+                  <a:srgbClr val="0D1B2A"/>
+                </a:solidFill>
+              </a:rPr>
+              <a:t> </a:t>
+            </a:r>
+            <a:r>
+              <a:rPr lang="en-US" sz="1050" dirty="0" err="1" smtClean="0">
+                <a:solidFill>
+                  <a:srgbClr val="0D1B2A"/>
+                </a:solidFill>
+              </a:rPr>
+              <a:t>thường</a:t>
+            </a:r>
+            <a:r>
+              <a:rPr lang="en-US" sz="1050" dirty="0">
+                <a:solidFill>
+                  <a:srgbClr val="0D1B2A"/>
+                </a:solidFill>
+              </a:rPr>
+              <a:t> </a:t>
+            </a:r>
+            <a:r>
+              <a:rPr lang="en-US" sz="1050" dirty="0" smtClean="0">
+                <a:solidFill>
+                  <a:srgbClr val="0D1B2A"/>
+                </a:solidFill>
+              </a:rPr>
+              <a:t>– </a:t>
+            </a:r>
+            <a:r>
+              <a:rPr lang="en-US" sz="1050" dirty="0" err="1" smtClean="0">
+                <a:solidFill>
+                  <a:srgbClr val="0D1B2A"/>
+                </a:solidFill>
+              </a:rPr>
+              <a:t>khoảng</a:t>
+            </a:r>
+            <a:r>
+              <a:rPr lang="en-US" sz="1050" dirty="0" smtClean="0">
+                <a:solidFill>
+                  <a:srgbClr val="0D1B2A"/>
+                </a:solidFill>
+              </a:rPr>
+              <a:t> 10 </a:t>
+            </a:r>
+            <a:r>
+              <a:rPr lang="en-US" sz="1050" dirty="0" err="1" smtClean="0">
+                <a:solidFill>
+                  <a:srgbClr val="0D1B2A"/>
+                </a:solidFill>
+              </a:rPr>
+              <a:t>luồng</a:t>
+            </a:r>
+            <a:r>
+              <a:rPr lang="en-US" sz="1050" dirty="0" smtClean="0">
+                <a:solidFill>
+                  <a:srgbClr val="0D1B2A"/>
+                </a:solidFill>
+              </a:rPr>
+              <a:t> song </a:t>
+            </a:r>
+            <a:r>
+              <a:rPr lang="en-US" sz="1050" dirty="0" err="1" smtClean="0">
+                <a:solidFill>
+                  <a:srgbClr val="0D1B2A"/>
+                </a:solidFill>
+              </a:rPr>
+              <a:t>song</a:t>
+            </a:r>
+            <a:r>
+              <a:rPr lang="en-US" sz="1050" dirty="0" smtClean="0">
+                <a:solidFill>
+                  <a:srgbClr val="0D1B2A"/>
+                </a:solidFill>
+              </a:rPr>
+              <a:t>, 2 </a:t>
+            </a:r>
+            <a:r>
+              <a:rPr lang="en-US" sz="1050" dirty="0" err="1" smtClean="0">
+                <a:solidFill>
+                  <a:srgbClr val="0D1B2A"/>
+                </a:solidFill>
+              </a:rPr>
+              <a:t>req</a:t>
+            </a:r>
+            <a:r>
+              <a:rPr lang="en-US" sz="1050" dirty="0" smtClean="0">
+                <a:solidFill>
+                  <a:srgbClr val="0D1B2A"/>
+                </a:solidFill>
+              </a:rPr>
+              <a:t>/s </a:t>
+            </a:r>
+            <a:r>
+              <a:rPr lang="en-US" sz="1050" dirty="0" err="1" smtClean="0">
+                <a:solidFill>
+                  <a:srgbClr val="0D1B2A"/>
+                </a:solidFill>
+              </a:rPr>
+              <a:t>với</a:t>
+            </a:r>
+            <a:r>
+              <a:rPr lang="en-US" sz="1050" dirty="0" smtClean="0">
+                <a:solidFill>
+                  <a:srgbClr val="0D1B2A"/>
+                </a:solidFill>
+              </a:rPr>
+              <a:t> </a:t>
+            </a:r>
+            <a:r>
+              <a:rPr lang="en-US" sz="1050" dirty="0" err="1" smtClean="0">
+                <a:solidFill>
+                  <a:srgbClr val="0D1B2A"/>
+                </a:solidFill>
+              </a:rPr>
+              <a:t>muỗi</a:t>
+            </a:r>
+            <a:r>
+              <a:rPr lang="en-US" sz="1050" dirty="0" smtClean="0">
+                <a:solidFill>
+                  <a:srgbClr val="0D1B2A"/>
+                </a:solidFill>
+              </a:rPr>
+              <a:t> </a:t>
+            </a:r>
+            <a:r>
+              <a:rPr lang="en-US" sz="1050" dirty="0" err="1" smtClean="0">
+                <a:solidFill>
+                  <a:srgbClr val="0D1B2A"/>
+                </a:solidFill>
+              </a:rPr>
+              <a:t>luồng</a:t>
+            </a:r>
+            <a:endParaRPr lang="en-US" sz="1050" dirty="0" smtClean="0">
+              <a:solidFill>
+                <a:srgbClr val="0D1B2A"/>
+              </a:solidFill>
+            </a:endParaRPr>
+          </a:p>
+          <a:p>
+            <a:pPr marL="171450" indent="-171450">
+              <a:buFontTx/>
+              <a:buChar char="-"/>
+            </a:pPr>
+            <a:r>
+              <a:rPr lang="en-US" sz="1050" dirty="0" err="1" smtClean="0"/>
+              <a:t>Hệ</a:t>
+            </a:r>
+            <a:r>
+              <a:rPr lang="en-US" sz="1050" dirty="0" smtClean="0"/>
+              <a:t> </a:t>
+            </a:r>
+            <a:r>
+              <a:rPr lang="en-US" sz="1050" dirty="0" err="1" smtClean="0"/>
+              <a:t>thống</a:t>
+            </a:r>
+            <a:r>
+              <a:rPr lang="en-US" sz="1050" dirty="0" smtClean="0"/>
+              <a:t> </a:t>
+            </a:r>
+            <a:r>
+              <a:rPr lang="en-US" sz="1050" dirty="0" err="1" smtClean="0"/>
+              <a:t>ổn</a:t>
+            </a:r>
+            <a:r>
+              <a:rPr lang="en-US" sz="1050" dirty="0" smtClean="0"/>
+              <a:t> </a:t>
+            </a:r>
+            <a:r>
+              <a:rPr lang="en-US" sz="1050" dirty="0" err="1" smtClean="0"/>
+              <a:t>định</a:t>
+            </a:r>
+            <a:r>
+              <a:rPr lang="en-US" sz="1050" dirty="0" smtClean="0"/>
+              <a:t> ở </a:t>
+            </a:r>
+            <a:r>
+              <a:rPr lang="en-US" sz="1050" dirty="0" err="1"/>
+              <a:t>mức</a:t>
+            </a:r>
+            <a:r>
+              <a:rPr lang="en-US" sz="1050" dirty="0"/>
+              <a:t> </a:t>
+            </a:r>
+            <a:r>
+              <a:rPr lang="en-US" sz="1050" dirty="0" err="1"/>
+              <a:t>sử</a:t>
+            </a:r>
+            <a:r>
+              <a:rPr lang="en-US" sz="1050" dirty="0"/>
+              <a:t> </a:t>
+            </a:r>
+            <a:r>
+              <a:rPr lang="en-US" sz="1050" dirty="0" err="1"/>
+              <a:t>dụng</a:t>
+            </a:r>
+            <a:r>
+              <a:rPr lang="en-US" sz="1050" dirty="0"/>
+              <a:t> CPU </a:t>
+            </a:r>
+            <a:r>
+              <a:rPr lang="en-US" sz="1050" dirty="0" err="1"/>
+              <a:t>dao</a:t>
+            </a:r>
+            <a:r>
+              <a:rPr lang="en-US" sz="1050" dirty="0"/>
+              <a:t> </a:t>
+            </a:r>
+            <a:r>
+              <a:rPr lang="en-US" sz="1050" dirty="0" err="1"/>
+              <a:t>động</a:t>
+            </a:r>
+            <a:r>
+              <a:rPr lang="en-US" sz="1050" dirty="0"/>
+              <a:t> </a:t>
+            </a:r>
+            <a:r>
+              <a:rPr lang="en-US" sz="1050" dirty="0" err="1"/>
+              <a:t>khoảng</a:t>
+            </a:r>
+            <a:r>
+              <a:rPr lang="en-US" sz="1050" dirty="0"/>
+              <a:t> 30–50% </a:t>
+            </a:r>
+            <a:r>
+              <a:rPr lang="en-US" sz="1050" dirty="0" err="1"/>
+              <a:t>và</a:t>
+            </a:r>
+            <a:r>
+              <a:rPr lang="en-US" sz="1050" dirty="0"/>
+              <a:t> </a:t>
+            </a:r>
+            <a:r>
+              <a:rPr lang="en-US" sz="1050" dirty="0" err="1"/>
+              <a:t>cụm</a:t>
+            </a:r>
+            <a:r>
+              <a:rPr lang="en-US" sz="1050" dirty="0"/>
+              <a:t> </a:t>
+            </a:r>
+            <a:r>
+              <a:rPr lang="en-US" sz="1050" dirty="0" err="1"/>
+              <a:t>duy</a:t>
+            </a:r>
+            <a:r>
+              <a:rPr lang="en-US" sz="1050" dirty="0"/>
+              <a:t> </a:t>
+            </a:r>
+            <a:r>
+              <a:rPr lang="en-US" sz="1050" dirty="0" err="1"/>
+              <a:t>trì</a:t>
+            </a:r>
+            <a:r>
+              <a:rPr lang="en-US" sz="1050" dirty="0"/>
+              <a:t> 1–2 pod.</a:t>
             </a:r>
             <a:endParaRPr lang="en-US" sz="1050" dirty="0"/>
           </a:p>
@@ -7672,39 +8481,14 @@
       </p:sp>
       <p:sp>
         <p:nvSpPr>
-          <p:cNvPr id="24" name="Shape 22"/>
+          <p:cNvPr id="25" name="Text 23"/>
           <p:cNvSpPr/>
           <p:nvPr/>
         </p:nvSpPr>
         <p:spPr>
           <a:xfrm>
             <a:off x="4773168" y="1581912"/>
-            <a:ext cx="347472" cy="347472"/>
-          </a:xfrm>
-          <a:prstGeom prst="ellipse">
-            <a:avLst/>
-          </a:prstGeom>
-          <a:solidFill>
-            <a:srgbClr val="F47B20"/>
-          </a:solidFill>
-          <a:ln w="12700">
-            <a:solidFill>
-              <a:srgbClr val="F47B20"/>
-            </a:solidFill>
-            <a:prstDash val="solid"/>
-          </a:ln>
-        </p:spPr>
-      </p:sp>
-      <p:sp>
-        <p:nvSpPr>
-          <p:cNvPr id="25" name="Text 23"/>
-          <p:cNvSpPr/>
-          <p:nvPr/>
-        </p:nvSpPr>
-        <p:spPr>
-          <a:xfrm>
-            <a:off x="4773168" y="1581912"/>
-            <a:ext cx="347472" cy="347472"/>
+            <a:ext cx="3739896" cy="347472"/>
           </a:xfrm>
           <a:prstGeom prst="rect">
             <a:avLst/>
@@ -7733,103 +8517,6 @@
       </p:sp>
       <p:sp>
         <p:nvSpPr>
-          <p:cNvPr id="26" name="Text 24"/>
-          <p:cNvSpPr/>
-          <p:nvPr/>
-        </p:nvSpPr>
-        <p:spPr>
-          <a:xfrm>
-            <a:off x="5212080" y="1581912"/>
-            <a:ext cx="1188720" cy="320040"/>
-          </a:xfrm>
-          <a:prstGeom prst="rect">
-            <a:avLst/>
-          </a:prstGeom>
-          <a:noFill/>
-          <a:ln/>
-        </p:spPr>
-        <p:txBody>
-          <a:bodyPr wrap="square" lIns="0" tIns="0" rIns="0" bIns="0" rtlCol="0" anchor="ctr"/>
-          <a:lstStyle/>
-          <a:p>
-            <a:pPr marL="0" indent="0">
-              <a:buNone/>
-            </a:pPr>
-            <a:r>
-              <a:rPr lang="en-US" sz="1050" b="1" dirty="0">
-                <a:solidFill>
-                  <a:srgbClr val="0D1B2A"/>
-                </a:solidFill>
-              </a:rPr>
-              <a:t>On/Off: </a:t>
-            </a:r>
-            <a:endParaRPr lang="en-US" sz="1050" dirty="0"/>
-          </a:p>
-        </p:txBody>
-      </p:sp>
-      <p:sp>
-        <p:nvSpPr>
-          <p:cNvPr id="27" name="Text 25"/>
-          <p:cNvSpPr/>
-          <p:nvPr/>
-        </p:nvSpPr>
-        <p:spPr>
-          <a:xfrm>
-            <a:off x="6446520" y="1581912"/>
-            <a:ext cx="2331720" cy="320040"/>
-          </a:xfrm>
-          <a:prstGeom prst="rect">
-            <a:avLst/>
-          </a:prstGeom>
-          <a:noFill/>
-          <a:ln/>
-        </p:spPr>
-        <p:txBody>
-          <a:bodyPr wrap="square" lIns="0" tIns="0" rIns="0" bIns="0" rtlCol="0" anchor="ctr"/>
-          <a:lstStyle/>
-          <a:p>
-            <a:pPr marL="0" indent="0">
-              <a:buNone/>
-            </a:pPr>
-            <a:r>
-              <a:rPr lang="en-US" sz="1000" dirty="0">
-                <a:solidFill>
-                  <a:srgbClr val="64748B"/>
-                </a:solidFill>
-              </a:rPr>
-              <a:t>8 phút hoạt động xen kẽ 2 phút nghỉ</a:t>
-            </a:r>
-            <a:endParaRPr lang="en-US" sz="1000" dirty="0"/>
-          </a:p>
-        </p:txBody>
-      </p:sp>
-      <p:sp>
-        <p:nvSpPr>
-          <p:cNvPr id="28" name="Shape 26"/>
-          <p:cNvSpPr/>
-          <p:nvPr/>
-        </p:nvSpPr>
-        <p:spPr>
-          <a:xfrm>
-            <a:off x="4773168" y="2176272"/>
-            <a:ext cx="347472" cy="347472"/>
-          </a:xfrm>
-          <a:prstGeom prst="ellipse">
-            <a:avLst/>
-          </a:prstGeom>
-          <a:solidFill>
-            <a:srgbClr val="F47B20"/>
-          </a:solidFill>
-          <a:ln w="12700">
-            <a:solidFill>
-              <a:srgbClr val="F47B20"/>
-            </a:solidFill>
-            <a:prstDash val="solid"/>
-          </a:ln>
-        </p:spPr>
-      </p:sp>
-      <p:sp>
-        <p:nvSpPr>
           <p:cNvPr id="29" name="Text 27"/>
           <p:cNvSpPr/>
           <p:nvPr/>
@@ -7866,103 +8553,6 @@
       </p:sp>
       <p:sp>
         <p:nvSpPr>
-          <p:cNvPr id="30" name="Text 28"/>
-          <p:cNvSpPr/>
-          <p:nvPr/>
-        </p:nvSpPr>
-        <p:spPr>
-          <a:xfrm>
-            <a:off x="5212080" y="2176272"/>
-            <a:ext cx="1188720" cy="320040"/>
-          </a:xfrm>
-          <a:prstGeom prst="rect">
-            <a:avLst/>
-          </a:prstGeom>
-          <a:noFill/>
-          <a:ln/>
-        </p:spPr>
-        <p:txBody>
-          <a:bodyPr wrap="square" lIns="0" tIns="0" rIns="0" bIns="0" rtlCol="0" anchor="ctr"/>
-          <a:lstStyle/>
-          <a:p>
-            <a:pPr marL="0" indent="0">
-              <a:buNone/>
-            </a:pPr>
-            <a:r>
-              <a:rPr lang="en-US" sz="1050" b="1" dirty="0">
-                <a:solidFill>
-                  <a:srgbClr val="0D1B2A"/>
-                </a:solidFill>
-              </a:rPr>
-              <a:t>Bursty: </a:t>
-            </a:r>
-            <a:endParaRPr lang="en-US" sz="1050" dirty="0"/>
-          </a:p>
-        </p:txBody>
-      </p:sp>
-      <p:sp>
-        <p:nvSpPr>
-          <p:cNvPr id="31" name="Text 29"/>
-          <p:cNvSpPr/>
-          <p:nvPr/>
-        </p:nvSpPr>
-        <p:spPr>
-          <a:xfrm>
-            <a:off x="6446520" y="2176272"/>
-            <a:ext cx="2331720" cy="320040"/>
-          </a:xfrm>
-          <a:prstGeom prst="rect">
-            <a:avLst/>
-          </a:prstGeom>
-          <a:noFill/>
-          <a:ln/>
-        </p:spPr>
-        <p:txBody>
-          <a:bodyPr wrap="square" lIns="0" tIns="0" rIns="0" bIns="0" rtlCol="0" anchor="ctr"/>
-          <a:lstStyle/>
-          <a:p>
-            <a:pPr marL="0" indent="0">
-              <a:buNone/>
-            </a:pPr>
-            <a:r>
-              <a:rPr lang="en-US" sz="1000" dirty="0">
-                <a:solidFill>
-                  <a:srgbClr val="64748B"/>
-                </a:solidFill>
-              </a:rPr>
-              <a:t>Burst 50 luồng, độ trễ 500ms giữa các nhóm</a:t>
-            </a:r>
-            <a:endParaRPr lang="en-US" sz="1000" dirty="0"/>
-          </a:p>
-        </p:txBody>
-      </p:sp>
-      <p:sp>
-        <p:nvSpPr>
-          <p:cNvPr id="32" name="Shape 30"/>
-          <p:cNvSpPr/>
-          <p:nvPr/>
-        </p:nvSpPr>
-        <p:spPr>
-          <a:xfrm>
-            <a:off x="4773168" y="2770632"/>
-            <a:ext cx="347472" cy="347472"/>
-          </a:xfrm>
-          <a:prstGeom prst="ellipse">
-            <a:avLst/>
-          </a:prstGeom>
-          <a:solidFill>
-            <a:srgbClr val="F47B20"/>
-          </a:solidFill>
-          <a:ln w="12700">
-            <a:solidFill>
-              <a:srgbClr val="F47B20"/>
-            </a:solidFill>
-            <a:prstDash val="solid"/>
-          </a:ln>
-        </p:spPr>
-      </p:sp>
-      <p:sp>
-        <p:nvSpPr>
           <p:cNvPr id="33" name="Text 31"/>
           <p:cNvSpPr/>
           <p:nvPr/>
@@ -7999,141 +8589,6 @@
       </p:sp>
       <p:sp>
         <p:nvSpPr>
-          <p:cNvPr id="34" name="Text 32"/>
-          <p:cNvSpPr/>
-          <p:nvPr/>
-        </p:nvSpPr>
-        <p:spPr>
-          <a:xfrm>
-            <a:off x="5212080" y="2770632"/>
-            <a:ext cx="1188720" cy="320040"/>
-          </a:xfrm>
-          <a:prstGeom prst="rect">
-            <a:avLst/>
-          </a:prstGeom>
-          <a:noFill/>
-          <a:ln/>
-        </p:spPr>
-        <p:txBody>
-          <a:bodyPr wrap="square" lIns="0" tIns="0" rIns="0" bIns="0" rtlCol="0" anchor="ctr"/>
-          <a:lstStyle/>
-          <a:p>
-            <a:pPr marL="0" indent="0">
-              <a:buNone/>
-            </a:pPr>
-            <a:r>
-              <a:rPr lang="en-US" sz="1050" b="1" dirty="0">
-                <a:solidFill>
-                  <a:srgbClr val="0D1B2A"/>
-                </a:solidFill>
-              </a:rPr>
-              <a:t>Random: </a:t>
-            </a:r>
-            <a:endParaRPr lang="en-US" sz="1050" dirty="0"/>
-          </a:p>
-        </p:txBody>
-      </p:sp>
-      <p:sp>
-        <p:nvSpPr>
-          <p:cNvPr id="35" name="Text 33"/>
-          <p:cNvSpPr/>
-          <p:nvPr/>
-        </p:nvSpPr>
-        <p:spPr>
-          <a:xfrm>
-            <a:off x="6446520" y="2770632"/>
-            <a:ext cx="2331720" cy="320040"/>
-          </a:xfrm>
-          <a:prstGeom prst="rect">
-            <a:avLst/>
-          </a:prstGeom>
-          <a:noFill/>
-          <a:ln/>
-        </p:spPr>
-        <p:txBody>
-          <a:bodyPr wrap="square" lIns="0" tIns="0" rIns="0" bIns="0" rtlCol="0" anchor="ctr"/>
-          <a:lstStyle/>
-          <a:p>
-            <a:pPr marL="0" indent="0">
-              <a:buNone/>
-            </a:pPr>
-            <a:r>
-              <a:rPr lang="en-US" sz="1000" dirty="0">
-                <a:solidFill>
-                  <a:srgbClr val="64748B"/>
-                </a:solidFill>
-              </a:rPr>
-              <a:t>Phân phối Poisson ngẫu nhiên liên tục</a:t>
-            </a:r>
-            <a:endParaRPr lang="en-US" sz="1000" dirty="0"/>
-          </a:p>
-        </p:txBody>
-      </p:sp>
-      <p:sp>
-        <p:nvSpPr>
-          <p:cNvPr id="36" name="Text 34"/>
-          <p:cNvSpPr/>
-          <p:nvPr/>
-        </p:nvSpPr>
-        <p:spPr>
-          <a:xfrm>
-            <a:off x="4773168" y="3429000"/>
-            <a:ext cx="3840480" cy="256032"/>
-          </a:xfrm>
-          <a:prstGeom prst="rect">
-            <a:avLst/>
-          </a:prstGeom>
-          <a:noFill/>
-          <a:ln/>
-        </p:spPr>
-        <p:txBody>
-          <a:bodyPr wrap="square" lIns="0" tIns="0" rIns="0" bIns="0" rtlCol="0" anchor="ctr"/>
-          <a:lstStyle/>
-          <a:p>
-            <a:pPr marL="0" indent="0">
-              <a:buNone/>
-            </a:pPr>
-            <a:r>
-              <a:rPr lang="en-US" sz="1050" b="1" dirty="0">
-                <a:solidFill>
-                  <a:srgbClr val="0D1B2A"/>
-                </a:solidFill>
-              </a:rPr>
-              <a:t>Tham số tấn công:</a:t>
-            </a:r>
-            <a:endParaRPr lang="en-US" sz="1050" dirty="0"/>
-          </a:p>
-        </p:txBody>
-      </p:sp>
-      <p:sp>
-        <p:nvSpPr>
-          <p:cNvPr id="37" name="Shape 35"/>
-          <p:cNvSpPr/>
-          <p:nvPr/>
-        </p:nvSpPr>
-        <p:spPr>
-          <a:xfrm>
-            <a:off x="4773168" y="3730752"/>
-            <a:ext cx="1143000" cy="502920"/>
-          </a:xfrm>
-          <a:prstGeom prst="rect">
-            <a:avLst/>
-          </a:prstGeom>
-          <a:solidFill>
-            <a:srgbClr val="0096B7">
-              <a:alpha val="85000"/>
-            </a:srgbClr>
-          </a:solidFill>
-          <a:ln w="12700">
-            <a:solidFill>
-              <a:srgbClr val="0096B7"/>
-            </a:solidFill>
-            <a:prstDash val="solid"/>
-          </a:ln>
-        </p:spPr>
-      </p:sp>
-      <p:sp>
-        <p:nvSpPr>
           <p:cNvPr id="38" name="Text 36"/>
           <p:cNvSpPr/>
           <p:nvPr/>
@@ -8170,33 +8625,6 @@
       </p:sp>
       <p:sp>
         <p:nvSpPr>
-          <p:cNvPr id="39" name="Shape 37"/>
-          <p:cNvSpPr/>
-          <p:nvPr/>
-        </p:nvSpPr>
-        <p:spPr>
-          <a:xfrm>
-            <a:off x="6071616" y="3730752"/>
-            <a:ext cx="1143000" cy="502920"/>
-          </a:xfrm>
-          <a:prstGeom prst="rect">
-            <a:avLst/>
-          </a:prstGeom>
-          <a:solidFill>
-            <a:srgbClr val="F47B20">
-              <a:alpha val="85000"/>
-            </a:srgbClr>
-          </a:solidFill>
-          <a:ln w="12700">
-            <a:solidFill>
-              <a:srgbClr val="F47B20"/>
-            </a:solidFill>
-            <a:prstDash val="solid"/>
-          </a:ln>
-        </p:spPr>
-      </p:sp>
-      <p:sp>
-        <p:nvSpPr>
           <p:cNvPr id="40" name="Text 38"/>
           <p:cNvSpPr/>
           <p:nvPr/>
@@ -8233,33 +8661,6 @@
       </p:sp>
       <p:sp>
         <p:nvSpPr>
-          <p:cNvPr id="41" name="Shape 39"/>
-          <p:cNvSpPr/>
-          <p:nvPr/>
-        </p:nvSpPr>
-        <p:spPr>
-          <a:xfrm>
-            <a:off x="7370064" y="3730752"/>
-            <a:ext cx="1143000" cy="502920"/>
-          </a:xfrm>
-          <a:prstGeom prst="rect">
-            <a:avLst/>
-          </a:prstGeom>
-          <a:solidFill>
-            <a:srgbClr val="D62828">
-              <a:alpha val="85000"/>
-            </a:srgbClr>
-          </a:solidFill>
-          <a:ln w="12700">
-            <a:solidFill>
-              <a:srgbClr val="D62828"/>
-            </a:solidFill>
-            <a:prstDash val="solid"/>
-          </a:ln>
-        </p:spPr>
-      </p:sp>
-      <p:sp>
-        <p:nvSpPr>
           <p:cNvPr id="42" name="Text 40"/>
           <p:cNvSpPr/>
           <p:nvPr/>
@@ -8296,14 +8697,14 @@
       </p:sp>
       <p:sp>
         <p:nvSpPr>
-          <p:cNvPr id="43" name="Text 41"/>
-          <p:cNvSpPr/>
-          <p:nvPr/>
-        </p:nvSpPr>
-        <p:spPr>
-          <a:xfrm>
-            <a:off x="4773168" y="4315968"/>
-            <a:ext cx="3840480" cy="411480"/>
+          <p:cNvPr id="44" name="Text 21"/>
+          <p:cNvSpPr/>
+          <p:nvPr/>
+        </p:nvSpPr>
+        <p:spPr>
+          <a:xfrm>
+            <a:off x="4773168" y="2606040"/>
+            <a:ext cx="3840480" cy="1828800"/>
           </a:xfrm>
           <a:prstGeom prst="rect">
             <a:avLst/>
@@ -8315,32 +8716,1247 @@
           <a:bodyPr wrap="square" lIns="0" tIns="0" rIns="0" bIns="0" rtlCol="0" anchor="ctr"/>
           <a:lstStyle/>
           <a:p>
-            <a:pPr marL="0" indent="0">
-              <a:buNone/>
+            <a:r>
+              <a:rPr lang="en-US" sz="1050" b="1" i="1" dirty="0" err="1" smtClean="0">
+                <a:solidFill>
+                  <a:srgbClr val="0D1B2A"/>
+                </a:solidFill>
+                <a:latin typeface="Calibri (Body)"/>
+              </a:rPr>
+              <a:t>Giai</a:t>
+            </a:r>
+            <a:r>
+              <a:rPr lang="en-US" sz="1050" b="1" i="1" dirty="0" smtClean="0">
+                <a:solidFill>
+                  <a:srgbClr val="0D1B2A"/>
+                </a:solidFill>
+                <a:latin typeface="Calibri (Body)"/>
+              </a:rPr>
+              <a:t> </a:t>
+            </a:r>
+            <a:r>
+              <a:rPr lang="en-US" sz="1050" b="1" i="1" dirty="0" err="1" smtClean="0">
+                <a:solidFill>
+                  <a:srgbClr val="0D1B2A"/>
+                </a:solidFill>
+                <a:latin typeface="Calibri (Body)"/>
+              </a:rPr>
+              <a:t>đoạn</a:t>
+            </a:r>
+            <a:r>
+              <a:rPr lang="en-US" sz="1050" b="1" i="1" dirty="0" smtClean="0">
+                <a:solidFill>
+                  <a:srgbClr val="0D1B2A"/>
+                </a:solidFill>
+                <a:latin typeface="Calibri (Body)"/>
+              </a:rPr>
+              <a:t> 2 – </a:t>
+            </a:r>
+            <a:r>
+              <a:rPr lang="en-US" sz="1050" b="1" i="1" dirty="0" err="1" smtClean="0">
+                <a:solidFill>
+                  <a:srgbClr val="0D1B2A"/>
+                </a:solidFill>
+                <a:latin typeface="Calibri (Body)"/>
+              </a:rPr>
+              <a:t>Mô</a:t>
+            </a:r>
+            <a:r>
+              <a:rPr lang="en-US" sz="1050" b="1" i="1" dirty="0" smtClean="0">
+                <a:solidFill>
+                  <a:srgbClr val="0D1B2A"/>
+                </a:solidFill>
+                <a:latin typeface="Calibri (Body)"/>
+              </a:rPr>
+              <a:t> </a:t>
+            </a:r>
+            <a:r>
+              <a:rPr lang="en-US" sz="1050" b="1" i="1" dirty="0" err="1" smtClean="0">
+                <a:solidFill>
+                  <a:srgbClr val="0D1B2A"/>
+                </a:solidFill>
+                <a:latin typeface="Calibri (Body)"/>
+              </a:rPr>
+              <a:t>phỏng</a:t>
+            </a:r>
+            <a:r>
+              <a:rPr lang="en-US" sz="1050" b="1" i="1" dirty="0" smtClean="0">
+                <a:solidFill>
+                  <a:srgbClr val="0D1B2A"/>
+                </a:solidFill>
+                <a:latin typeface="Calibri (Body)"/>
+              </a:rPr>
+              <a:t> </a:t>
+            </a:r>
+            <a:r>
+              <a:rPr lang="en-US" sz="1050" b="1" i="1" dirty="0" err="1" smtClean="0">
+                <a:solidFill>
+                  <a:srgbClr val="0D1B2A"/>
+                </a:solidFill>
+                <a:latin typeface="Calibri (Body)"/>
+              </a:rPr>
+              <a:t>lưu</a:t>
+            </a:r>
+            <a:r>
+              <a:rPr lang="en-US" sz="1050" b="1" i="1" dirty="0" smtClean="0">
+                <a:solidFill>
+                  <a:srgbClr val="0D1B2A"/>
+                </a:solidFill>
+                <a:latin typeface="Calibri (Body)"/>
+              </a:rPr>
+              <a:t> </a:t>
+            </a:r>
+            <a:r>
+              <a:rPr lang="en-US" sz="1050" b="1" i="1" dirty="0" err="1" smtClean="0">
+                <a:solidFill>
+                  <a:srgbClr val="0D1B2A"/>
+                </a:solidFill>
+                <a:latin typeface="Calibri (Body)"/>
+              </a:rPr>
+              <a:t>lượng</a:t>
+            </a:r>
+            <a:r>
+              <a:rPr lang="en-US" sz="1050" b="1" i="1" dirty="0" smtClean="0">
+                <a:solidFill>
+                  <a:srgbClr val="0D1B2A"/>
+                </a:solidFill>
+                <a:latin typeface="Calibri (Body)"/>
+              </a:rPr>
+              <a:t> </a:t>
+            </a:r>
+            <a:r>
+              <a:rPr lang="en-US" sz="1050" b="1" i="1" dirty="0" err="1" smtClean="0">
+                <a:solidFill>
+                  <a:srgbClr val="0D1B2A"/>
+                </a:solidFill>
+                <a:latin typeface="Calibri (Body)"/>
+              </a:rPr>
+              <a:t>tấn</a:t>
+            </a:r>
+            <a:r>
+              <a:rPr lang="en-US" sz="1050" b="1" i="1" dirty="0" smtClean="0">
+                <a:solidFill>
+                  <a:srgbClr val="0D1B2A"/>
+                </a:solidFill>
+                <a:latin typeface="Calibri (Body)"/>
+              </a:rPr>
+              <a:t> </a:t>
+            </a:r>
+            <a:r>
+              <a:rPr lang="en-US" sz="1050" b="1" i="1" dirty="0" err="1" smtClean="0">
+                <a:solidFill>
+                  <a:srgbClr val="0D1B2A"/>
+                </a:solidFill>
+                <a:latin typeface="Calibri (Body)"/>
+              </a:rPr>
+              <a:t>công</a:t>
+            </a:r>
+            <a:endParaRPr lang="en-US" sz="1050" b="1" i="1" dirty="0" smtClean="0">
+              <a:solidFill>
+                <a:srgbClr val="0D1B2A"/>
+              </a:solidFill>
+              <a:latin typeface="Calibri (Body)"/>
+            </a:endParaRPr>
+          </a:p>
+          <a:p>
+            <a:r>
+              <a:rPr lang="en-US" sz="1050" dirty="0" err="1" smtClean="0">
+                <a:solidFill>
+                  <a:srgbClr val="0D1B2A"/>
+                </a:solidFill>
+                <a:latin typeface="Calibri (Body)"/>
+              </a:rPr>
+              <a:t>Kẻ</a:t>
+            </a:r>
+            <a:r>
+              <a:rPr lang="en-US" sz="1050" dirty="0" smtClean="0">
+                <a:solidFill>
+                  <a:srgbClr val="0D1B2A"/>
+                </a:solidFill>
+                <a:latin typeface="Calibri (Body)"/>
+              </a:rPr>
+              <a:t> </a:t>
+            </a:r>
+            <a:r>
+              <a:rPr lang="en-US" sz="1050" dirty="0" err="1" smtClean="0">
+                <a:solidFill>
+                  <a:srgbClr val="0D1B2A"/>
+                </a:solidFill>
+                <a:latin typeface="Calibri (Body)"/>
+              </a:rPr>
+              <a:t>tấn</a:t>
+            </a:r>
+            <a:r>
+              <a:rPr lang="en-US" sz="1050" dirty="0" smtClean="0">
+                <a:solidFill>
+                  <a:srgbClr val="0D1B2A"/>
+                </a:solidFill>
+                <a:latin typeface="Calibri (Body)"/>
+              </a:rPr>
+              <a:t> </a:t>
+            </a:r>
+            <a:r>
+              <a:rPr lang="en-US" sz="1050" dirty="0" err="1" smtClean="0">
+                <a:solidFill>
+                  <a:srgbClr val="0D1B2A"/>
+                </a:solidFill>
+                <a:latin typeface="Calibri (Body)"/>
+              </a:rPr>
+              <a:t>công</a:t>
+            </a:r>
+            <a:r>
+              <a:rPr lang="en-US" sz="1050" dirty="0" smtClean="0">
+                <a:solidFill>
+                  <a:srgbClr val="0D1B2A"/>
+                </a:solidFill>
+                <a:latin typeface="Calibri (Body)"/>
+              </a:rPr>
+              <a:t> </a:t>
+            </a:r>
+            <a:r>
+              <a:rPr lang="en-US" sz="1050" dirty="0" err="1" smtClean="0">
+                <a:solidFill>
+                  <a:srgbClr val="0D1B2A"/>
+                </a:solidFill>
+                <a:latin typeface="Calibri (Body)"/>
+              </a:rPr>
+              <a:t>vận</a:t>
+            </a:r>
+            <a:r>
+              <a:rPr lang="en-US" sz="1050" dirty="0" smtClean="0">
+                <a:solidFill>
+                  <a:srgbClr val="0D1B2A"/>
+                </a:solidFill>
+                <a:latin typeface="Calibri (Body)"/>
+              </a:rPr>
+              <a:t> </a:t>
+            </a:r>
+            <a:r>
+              <a:rPr lang="en-US" sz="1050" dirty="0" err="1" smtClean="0">
+                <a:solidFill>
+                  <a:srgbClr val="0D1B2A"/>
+                </a:solidFill>
+                <a:latin typeface="Calibri (Body)"/>
+              </a:rPr>
+              <a:t>hành</a:t>
+            </a:r>
+            <a:r>
+              <a:rPr lang="en-US" sz="1050" dirty="0" smtClean="0">
+                <a:solidFill>
+                  <a:srgbClr val="0D1B2A"/>
+                </a:solidFill>
+                <a:latin typeface="Calibri (Body)"/>
+              </a:rPr>
+              <a:t> </a:t>
+            </a:r>
+            <a:r>
+              <a:rPr lang="en-US" sz="1050" dirty="0" err="1" smtClean="0">
+                <a:solidFill>
+                  <a:srgbClr val="0D1B2A"/>
+                </a:solidFill>
+                <a:latin typeface="Calibri (Body)"/>
+              </a:rPr>
+              <a:t>theo</a:t>
+            </a:r>
+            <a:r>
+              <a:rPr lang="en-US" sz="1050" dirty="0" smtClean="0">
+                <a:solidFill>
+                  <a:srgbClr val="0D1B2A"/>
+                </a:solidFill>
+                <a:latin typeface="Calibri (Body)"/>
+              </a:rPr>
+              <a:t> </a:t>
+            </a:r>
+            <a:r>
+              <a:rPr lang="en-US" sz="1050" dirty="0" err="1" smtClean="0">
+                <a:solidFill>
+                  <a:srgbClr val="0D1B2A"/>
+                </a:solidFill>
+                <a:latin typeface="Calibri (Body)"/>
+              </a:rPr>
+              <a:t>vòng</a:t>
+            </a:r>
+            <a:r>
+              <a:rPr lang="en-US" sz="1050" dirty="0" smtClean="0">
+                <a:solidFill>
+                  <a:srgbClr val="0D1B2A"/>
+                </a:solidFill>
+                <a:latin typeface="Calibri (Body)"/>
+              </a:rPr>
+              <a:t> </a:t>
+            </a:r>
+            <a:r>
+              <a:rPr lang="en-US" sz="1050" dirty="0" err="1" smtClean="0">
+                <a:solidFill>
+                  <a:srgbClr val="0D1B2A"/>
+                </a:solidFill>
+                <a:latin typeface="Calibri (Body)"/>
+              </a:rPr>
+              <a:t>lặp</a:t>
+            </a:r>
+            <a:r>
+              <a:rPr lang="en-US" sz="1050" dirty="0" smtClean="0">
+                <a:solidFill>
+                  <a:srgbClr val="0D1B2A"/>
+                </a:solidFill>
+                <a:latin typeface="Calibri (Body)"/>
+              </a:rPr>
+              <a:t> </a:t>
+            </a:r>
+            <a:r>
+              <a:rPr lang="en-US" sz="1050" dirty="0" err="1" smtClean="0">
+                <a:solidFill>
+                  <a:srgbClr val="0D1B2A"/>
+                </a:solidFill>
+                <a:latin typeface="Calibri (Body)"/>
+              </a:rPr>
+              <a:t>quan</a:t>
+            </a:r>
+            <a:r>
+              <a:rPr lang="en-US" sz="1050" dirty="0" smtClean="0">
+                <a:solidFill>
+                  <a:srgbClr val="0D1B2A"/>
+                </a:solidFill>
+                <a:latin typeface="Calibri (Body)"/>
+              </a:rPr>
+              <a:t> </a:t>
+            </a:r>
+            <a:r>
+              <a:rPr lang="en-US" sz="1050" dirty="0" err="1" smtClean="0">
+                <a:solidFill>
+                  <a:srgbClr val="0D1B2A"/>
+                </a:solidFill>
+                <a:latin typeface="Calibri (Body)"/>
+              </a:rPr>
+              <a:t>sát</a:t>
+            </a:r>
+            <a:r>
+              <a:rPr lang="en-US" sz="1050" dirty="0" smtClean="0">
+                <a:solidFill>
+                  <a:srgbClr val="0D1B2A"/>
+                </a:solidFill>
+                <a:latin typeface="Calibri (Body)"/>
+              </a:rPr>
+              <a:t> – </a:t>
+            </a:r>
+            <a:r>
+              <a:rPr lang="en-US" sz="1050" dirty="0" err="1" smtClean="0">
+                <a:solidFill>
+                  <a:srgbClr val="0D1B2A"/>
+                </a:solidFill>
+                <a:latin typeface="Calibri (Body)"/>
+              </a:rPr>
+              <a:t>quyết</a:t>
+            </a:r>
+            <a:r>
+              <a:rPr lang="en-US" sz="1050" dirty="0" smtClean="0">
+                <a:solidFill>
+                  <a:srgbClr val="0D1B2A"/>
+                </a:solidFill>
+                <a:latin typeface="Calibri (Body)"/>
+              </a:rPr>
+              <a:t> </a:t>
+            </a:r>
+            <a:r>
+              <a:rPr lang="en-US" sz="1050" dirty="0" err="1" smtClean="0">
+                <a:solidFill>
+                  <a:srgbClr val="0D1B2A"/>
+                </a:solidFill>
+                <a:latin typeface="Calibri (Body)"/>
+              </a:rPr>
+              <a:t>định</a:t>
+            </a:r>
+            <a:r>
+              <a:rPr lang="en-US" sz="1050" dirty="0" smtClean="0">
+                <a:solidFill>
+                  <a:srgbClr val="0D1B2A"/>
+                </a:solidFill>
+                <a:latin typeface="Calibri (Body)"/>
+              </a:rPr>
+              <a:t> – </a:t>
+            </a:r>
+            <a:r>
+              <a:rPr lang="en-US" sz="1050" dirty="0" err="1" smtClean="0">
+                <a:solidFill>
+                  <a:srgbClr val="0D1B2A"/>
+                </a:solidFill>
+                <a:latin typeface="Calibri (Body)"/>
+              </a:rPr>
+              <a:t>hành</a:t>
+            </a:r>
+            <a:r>
+              <a:rPr lang="en-US" sz="1050" dirty="0" smtClean="0">
+                <a:solidFill>
+                  <a:srgbClr val="0D1B2A"/>
+                </a:solidFill>
+                <a:latin typeface="Calibri (Body)"/>
+              </a:rPr>
+              <a:t> </a:t>
+            </a:r>
+            <a:r>
+              <a:rPr lang="en-US" sz="1050" dirty="0" err="1" smtClean="0">
+                <a:solidFill>
+                  <a:srgbClr val="0D1B2A"/>
+                </a:solidFill>
+                <a:latin typeface="Calibri (Body)"/>
+              </a:rPr>
+              <a:t>động</a:t>
+            </a:r>
+            <a:r>
+              <a:rPr lang="en-US" sz="1050" dirty="0" smtClean="0">
+                <a:solidFill>
+                  <a:srgbClr val="0D1B2A"/>
+                </a:solidFill>
+                <a:latin typeface="Calibri (Body)"/>
+              </a:rPr>
+              <a:t> </a:t>
+            </a:r>
+            <a:r>
+              <a:rPr lang="en-US" sz="1050" dirty="0" err="1" smtClean="0">
+                <a:solidFill>
+                  <a:srgbClr val="0D1B2A"/>
+                </a:solidFill>
+                <a:latin typeface="Calibri (Body)"/>
+              </a:rPr>
+              <a:t>theo</a:t>
+            </a:r>
+            <a:r>
+              <a:rPr lang="en-US" sz="1050" dirty="0" smtClean="0">
+                <a:solidFill>
+                  <a:srgbClr val="0D1B2A"/>
+                </a:solidFill>
+                <a:latin typeface="Calibri (Body)"/>
+              </a:rPr>
+              <a:t> </a:t>
+            </a:r>
+            <a:r>
+              <a:rPr lang="en-US" sz="1050" dirty="0" err="1" smtClean="0">
+                <a:solidFill>
+                  <a:srgbClr val="0D1B2A"/>
+                </a:solidFill>
+                <a:latin typeface="Calibri (Body)"/>
+              </a:rPr>
+              <a:t>từng</a:t>
+            </a:r>
+            <a:r>
+              <a:rPr lang="en-US" sz="1050" dirty="0" smtClean="0">
+                <a:solidFill>
+                  <a:srgbClr val="0D1B2A"/>
+                </a:solidFill>
+                <a:latin typeface="Calibri (Body)"/>
+              </a:rPr>
+              <a:t> </a:t>
+            </a:r>
+            <a:r>
+              <a:rPr lang="en-US" sz="1050" dirty="0" err="1" smtClean="0">
+                <a:solidFill>
+                  <a:srgbClr val="0D1B2A"/>
+                </a:solidFill>
+                <a:latin typeface="Calibri (Body)"/>
+              </a:rPr>
+              <a:t>chu</a:t>
+            </a:r>
+            <a:r>
+              <a:rPr lang="en-US" sz="1050" dirty="0" smtClean="0">
+                <a:solidFill>
+                  <a:srgbClr val="0D1B2A"/>
+                </a:solidFill>
+                <a:latin typeface="Calibri (Body)"/>
+              </a:rPr>
+              <a:t> </a:t>
+            </a:r>
+            <a:r>
+              <a:rPr lang="en-US" sz="1050" dirty="0" err="1" smtClean="0">
+                <a:solidFill>
+                  <a:srgbClr val="0D1B2A"/>
+                </a:solidFill>
+                <a:latin typeface="Calibri (Body)"/>
+              </a:rPr>
+              <a:t>kỳ</a:t>
+            </a:r>
+            <a:r>
+              <a:rPr lang="en-US" sz="1050" dirty="0" smtClean="0">
+                <a:solidFill>
+                  <a:srgbClr val="0D1B2A"/>
+                </a:solidFill>
+                <a:latin typeface="Calibri (Body)"/>
+              </a:rPr>
+              <a:t>:</a:t>
+            </a:r>
+          </a:p>
+          <a:p>
+            <a:pPr marL="171450" indent="-171450">
+              <a:buFontTx/>
+              <a:buChar char="-"/>
             </a:pPr>
             <a:r>
-              <a:rPr lang="en-US" sz="950" dirty="0">
-                <a:solidFill>
-                  <a:srgbClr val="64748B"/>
-                </a:solidFill>
-              </a:rPr>
-              <a:t>Thời gian: 2h (1h baseline + 1h tấn công)</a:t>
-            </a:r>
-            <a:endParaRPr lang="en-US" sz="950" dirty="0"/>
-          </a:p>
-          <a:p>
-            <a:pPr marL="0" indent="0">
-              <a:buNone/>
+              <a:rPr lang="en-US" sz="1050" dirty="0" err="1" smtClean="0">
+                <a:solidFill>
+                  <a:srgbClr val="0D1B2A"/>
+                </a:solidFill>
+                <a:latin typeface="Calibri (Body)"/>
+              </a:rPr>
+              <a:t>Quan</a:t>
+            </a:r>
+            <a:r>
+              <a:rPr lang="en-US" sz="1050" dirty="0" smtClean="0">
+                <a:solidFill>
+                  <a:srgbClr val="0D1B2A"/>
+                </a:solidFill>
+                <a:latin typeface="Calibri (Body)"/>
+              </a:rPr>
+              <a:t> </a:t>
+            </a:r>
+            <a:r>
+              <a:rPr lang="en-US" sz="1050" dirty="0" err="1" smtClean="0">
+                <a:solidFill>
+                  <a:srgbClr val="0D1B2A"/>
+                </a:solidFill>
+                <a:latin typeface="Calibri (Body)"/>
+              </a:rPr>
+              <a:t>sát</a:t>
+            </a:r>
+            <a:r>
+              <a:rPr lang="en-US" sz="1050" dirty="0" smtClean="0">
+                <a:solidFill>
+                  <a:srgbClr val="0D1B2A"/>
+                </a:solidFill>
+                <a:latin typeface="Calibri (Body)"/>
+              </a:rPr>
+              <a:t>: </a:t>
+            </a:r>
+            <a:r>
+              <a:rPr lang="en-US" sz="1050" dirty="0" err="1" smtClean="0">
+                <a:solidFill>
+                  <a:srgbClr val="0D1B2A"/>
+                </a:solidFill>
+                <a:latin typeface="Calibri (Body)"/>
+              </a:rPr>
+              <a:t>truy</a:t>
+            </a:r>
+            <a:r>
+              <a:rPr lang="en-US" sz="1050" dirty="0" smtClean="0">
+                <a:solidFill>
+                  <a:srgbClr val="0D1B2A"/>
+                </a:solidFill>
+                <a:latin typeface="Calibri (Body)"/>
+              </a:rPr>
+              <a:t> </a:t>
+            </a:r>
+            <a:r>
+              <a:rPr lang="en-US" sz="1050" dirty="0" err="1" smtClean="0">
+                <a:solidFill>
+                  <a:srgbClr val="0D1B2A"/>
+                </a:solidFill>
+                <a:latin typeface="Calibri (Body)"/>
+              </a:rPr>
+              <a:t>vấn</a:t>
+            </a:r>
+            <a:r>
+              <a:rPr lang="en-US" sz="1050" dirty="0" smtClean="0">
+                <a:solidFill>
+                  <a:srgbClr val="0D1B2A"/>
+                </a:solidFill>
+                <a:latin typeface="Calibri (Body)"/>
+              </a:rPr>
+              <a:t> </a:t>
+            </a:r>
+            <a:r>
+              <a:rPr lang="en-US" sz="1050" dirty="0" err="1" smtClean="0">
+                <a:solidFill>
+                  <a:srgbClr val="0D1B2A"/>
+                </a:solidFill>
+                <a:latin typeface="Calibri (Body)"/>
+              </a:rPr>
+              <a:t>số</a:t>
+            </a:r>
+            <a:r>
+              <a:rPr lang="en-US" sz="1050" dirty="0" smtClean="0">
+                <a:solidFill>
+                  <a:srgbClr val="0D1B2A"/>
+                </a:solidFill>
+                <a:latin typeface="Calibri (Body)"/>
+              </a:rPr>
+              <a:t> </a:t>
+            </a:r>
+            <a:r>
+              <a:rPr lang="en-US" sz="1050" dirty="0" err="1" smtClean="0">
+                <a:solidFill>
+                  <a:srgbClr val="0D1B2A"/>
+                </a:solidFill>
+                <a:latin typeface="Calibri (Body)"/>
+              </a:rPr>
+              <a:t>lượng</a:t>
+            </a:r>
+            <a:r>
+              <a:rPr lang="en-US" sz="1050" dirty="0" smtClean="0">
+                <a:solidFill>
+                  <a:srgbClr val="0D1B2A"/>
+                </a:solidFill>
+                <a:latin typeface="Calibri (Body)"/>
+              </a:rPr>
+              <a:t> replica </a:t>
+            </a:r>
+            <a:r>
+              <a:rPr lang="en-US" sz="1050" dirty="0" err="1" smtClean="0">
+                <a:solidFill>
+                  <a:srgbClr val="0D1B2A"/>
+                </a:solidFill>
+                <a:latin typeface="Calibri (Body)"/>
+              </a:rPr>
+              <a:t>hiên</a:t>
+            </a:r>
+            <a:r>
+              <a:rPr lang="en-US" sz="1050" dirty="0" smtClean="0">
+                <a:solidFill>
+                  <a:srgbClr val="0D1B2A"/>
+                </a:solidFill>
+                <a:latin typeface="Calibri (Body)"/>
+              </a:rPr>
+              <a:t> </a:t>
+            </a:r>
+            <a:r>
+              <a:rPr lang="en-US" sz="1050" dirty="0" err="1" smtClean="0">
+                <a:solidFill>
+                  <a:srgbClr val="0D1B2A"/>
+                </a:solidFill>
+                <a:latin typeface="Calibri (Body)"/>
+              </a:rPr>
+              <a:t>tại</a:t>
+            </a:r>
+            <a:r>
+              <a:rPr lang="en-US" sz="1050" dirty="0" smtClean="0">
+                <a:solidFill>
+                  <a:srgbClr val="0D1B2A"/>
+                </a:solidFill>
+                <a:latin typeface="Calibri (Body)"/>
+              </a:rPr>
+              <a:t> </a:t>
+            </a:r>
+            <a:r>
+              <a:rPr lang="en-US" sz="1050" dirty="0" err="1" smtClean="0">
+                <a:solidFill>
+                  <a:srgbClr val="0D1B2A"/>
+                </a:solidFill>
+                <a:latin typeface="Calibri (Body)"/>
+              </a:rPr>
+              <a:t>thông</a:t>
+            </a:r>
+            <a:r>
+              <a:rPr lang="en-US" sz="1050" dirty="0" smtClean="0">
+                <a:solidFill>
+                  <a:srgbClr val="0D1B2A"/>
+                </a:solidFill>
+                <a:latin typeface="Calibri (Body)"/>
+              </a:rPr>
+              <a:t> qua </a:t>
+            </a:r>
+            <a:r>
+              <a:rPr lang="en-US" sz="1050" dirty="0" err="1" smtClean="0">
+                <a:solidFill>
+                  <a:srgbClr val="0D1B2A"/>
+                </a:solidFill>
+                <a:latin typeface="Calibri (Body)"/>
+              </a:rPr>
+              <a:t>thăm</a:t>
+            </a:r>
+            <a:r>
+              <a:rPr lang="en-US" sz="1050" dirty="0" smtClean="0">
+                <a:solidFill>
+                  <a:srgbClr val="0D1B2A"/>
+                </a:solidFill>
+                <a:latin typeface="Calibri (Body)"/>
+              </a:rPr>
+              <a:t> </a:t>
+            </a:r>
+            <a:r>
+              <a:rPr lang="en-US" sz="1050" dirty="0" err="1" smtClean="0">
+                <a:solidFill>
+                  <a:srgbClr val="0D1B2A"/>
+                </a:solidFill>
+                <a:latin typeface="Calibri (Body)"/>
+              </a:rPr>
+              <a:t>dò</a:t>
+            </a:r>
+            <a:r>
+              <a:rPr lang="en-US" sz="1050" dirty="0" smtClean="0">
+                <a:solidFill>
+                  <a:srgbClr val="0D1B2A"/>
+                </a:solidFill>
+                <a:latin typeface="Calibri (Body)"/>
+              </a:rPr>
+              <a:t> </a:t>
+            </a:r>
+            <a:r>
+              <a:rPr lang="en-US" sz="1050" dirty="0" err="1" smtClean="0">
+                <a:solidFill>
+                  <a:srgbClr val="0D1B2A"/>
+                </a:solidFill>
+                <a:latin typeface="Calibri (Body)"/>
+              </a:rPr>
+              <a:t>hệ</a:t>
+            </a:r>
+            <a:r>
+              <a:rPr lang="en-US" sz="1050" dirty="0" smtClean="0">
+                <a:solidFill>
+                  <a:srgbClr val="0D1B2A"/>
+                </a:solidFill>
+                <a:latin typeface="Calibri (Body)"/>
+              </a:rPr>
+              <a:t> </a:t>
+            </a:r>
+            <a:r>
+              <a:rPr lang="en-US" sz="1050" dirty="0" err="1" smtClean="0">
+                <a:solidFill>
+                  <a:srgbClr val="0D1B2A"/>
+                </a:solidFill>
+                <a:latin typeface="Calibri (Body)"/>
+              </a:rPr>
+              <a:t>thống</a:t>
+            </a:r>
+            <a:endParaRPr lang="en-US" sz="1050" dirty="0" smtClean="0">
+              <a:solidFill>
+                <a:srgbClr val="0D1B2A"/>
+              </a:solidFill>
+              <a:latin typeface="Calibri (Body)"/>
+            </a:endParaRPr>
+          </a:p>
+          <a:p>
+            <a:pPr marL="171450" indent="-171450">
+              <a:buFontTx/>
+              <a:buChar char="-"/>
             </a:pPr>
             <a:r>
-              <a:rPr lang="en-US" sz="950" dirty="0">
-                <a:solidFill>
-                  <a:srgbClr val="64748B"/>
-                </a:solidFill>
-              </a:rPr>
-              <a:t>HPA ngưỡng: 80% CPU sử dụng</a:t>
-            </a:r>
-            <a:endParaRPr lang="en-US" sz="950" dirty="0"/>
+              <a:rPr lang="en-US" sz="1050" dirty="0" err="1" smtClean="0">
+                <a:solidFill>
+                  <a:srgbClr val="0D1B2A"/>
+                </a:solidFill>
+                <a:latin typeface="Calibri (Body)"/>
+              </a:rPr>
+              <a:t>Quyết</a:t>
+            </a:r>
+            <a:r>
+              <a:rPr lang="en-US" sz="1050" dirty="0" smtClean="0">
+                <a:solidFill>
+                  <a:srgbClr val="0D1B2A"/>
+                </a:solidFill>
+                <a:latin typeface="Calibri (Body)"/>
+              </a:rPr>
+              <a:t> </a:t>
+            </a:r>
+            <a:r>
+              <a:rPr lang="en-US" sz="1050" dirty="0" err="1" smtClean="0">
+                <a:solidFill>
+                  <a:srgbClr val="0D1B2A"/>
+                </a:solidFill>
+                <a:latin typeface="Calibri (Body)"/>
+              </a:rPr>
+              <a:t>định</a:t>
+            </a:r>
+            <a:r>
+              <a:rPr lang="en-US" sz="1050" dirty="0" smtClean="0">
+                <a:solidFill>
+                  <a:srgbClr val="0D1B2A"/>
+                </a:solidFill>
+                <a:latin typeface="Calibri (Body)"/>
+              </a:rPr>
+              <a:t>: </a:t>
+            </a:r>
+            <a:r>
+              <a:rPr lang="en-US" sz="1050" dirty="0" err="1" smtClean="0">
+                <a:solidFill>
+                  <a:srgbClr val="0D1B2A"/>
+                </a:solidFill>
+                <a:latin typeface="Calibri (Body)"/>
+              </a:rPr>
+              <a:t>tấn</a:t>
+            </a:r>
+            <a:r>
+              <a:rPr lang="en-US" sz="1050" dirty="0" smtClean="0">
+                <a:solidFill>
+                  <a:srgbClr val="0D1B2A"/>
+                </a:solidFill>
+                <a:latin typeface="Calibri (Body)"/>
+              </a:rPr>
+              <a:t> </a:t>
+            </a:r>
+            <a:r>
+              <a:rPr lang="en-US" sz="1050" dirty="0" err="1" smtClean="0">
+                <a:solidFill>
+                  <a:srgbClr val="0D1B2A"/>
+                </a:solidFill>
+                <a:latin typeface="Calibri (Body)"/>
+              </a:rPr>
+              <a:t>công</a:t>
+            </a:r>
+            <a:r>
+              <a:rPr lang="en-US" sz="1050" dirty="0" smtClean="0">
+                <a:solidFill>
+                  <a:srgbClr val="0D1B2A"/>
+                </a:solidFill>
+                <a:latin typeface="Calibri (Body)"/>
+              </a:rPr>
+              <a:t> burst </a:t>
+            </a:r>
+            <a:r>
+              <a:rPr lang="en-US" sz="1050" dirty="0" err="1" smtClean="0">
+                <a:solidFill>
+                  <a:srgbClr val="0D1B2A"/>
+                </a:solidFill>
+                <a:latin typeface="Calibri (Body)"/>
+              </a:rPr>
+              <a:t>tải</a:t>
+            </a:r>
+            <a:r>
+              <a:rPr lang="en-US" sz="1050" dirty="0" smtClean="0">
+                <a:solidFill>
+                  <a:srgbClr val="0D1B2A"/>
+                </a:solidFill>
+                <a:latin typeface="Calibri (Body)"/>
+              </a:rPr>
+              <a:t> </a:t>
+            </a:r>
+            <a:r>
+              <a:rPr lang="en-US" sz="1050" dirty="0" err="1" smtClean="0">
+                <a:solidFill>
+                  <a:srgbClr val="0D1B2A"/>
+                </a:solidFill>
+                <a:latin typeface="Calibri (Body)"/>
+              </a:rPr>
+              <a:t>khi</a:t>
+            </a:r>
+            <a:r>
+              <a:rPr lang="en-US" sz="1050" dirty="0" smtClean="0">
+                <a:solidFill>
+                  <a:srgbClr val="0D1B2A"/>
+                </a:solidFill>
+                <a:latin typeface="Calibri (Body)"/>
+              </a:rPr>
+              <a:t> </a:t>
+            </a:r>
+            <a:r>
+              <a:rPr lang="en-US" sz="1050" dirty="0" err="1" smtClean="0">
+                <a:solidFill>
+                  <a:srgbClr val="0D1B2A"/>
+                </a:solidFill>
+                <a:latin typeface="Calibri (Body)"/>
+              </a:rPr>
+              <a:t>phát</a:t>
+            </a:r>
+            <a:r>
+              <a:rPr lang="en-US" sz="1050" dirty="0" smtClean="0">
+                <a:solidFill>
+                  <a:srgbClr val="0D1B2A"/>
+                </a:solidFill>
+                <a:latin typeface="Calibri (Body)"/>
+              </a:rPr>
+              <a:t> </a:t>
+            </a:r>
+            <a:r>
+              <a:rPr lang="en-US" sz="1050" dirty="0" err="1" smtClean="0">
+                <a:solidFill>
+                  <a:srgbClr val="0D1B2A"/>
+                </a:solidFill>
+                <a:latin typeface="Calibri (Body)"/>
+              </a:rPr>
+              <a:t>hiện</a:t>
+            </a:r>
+            <a:r>
+              <a:rPr lang="en-US" sz="1050" dirty="0" smtClean="0">
+                <a:solidFill>
+                  <a:srgbClr val="0D1B2A"/>
+                </a:solidFill>
+                <a:latin typeface="Calibri (Body)"/>
+              </a:rPr>
+              <a:t> </a:t>
+            </a:r>
+            <a:r>
+              <a:rPr lang="en-US" sz="1050" dirty="0" err="1" smtClean="0">
+                <a:solidFill>
+                  <a:srgbClr val="0D1B2A"/>
+                </a:solidFill>
+                <a:latin typeface="Calibri (Body)"/>
+              </a:rPr>
+              <a:t>cụm</a:t>
+            </a:r>
+            <a:r>
+              <a:rPr lang="en-US" sz="1050" dirty="0" smtClean="0">
+                <a:solidFill>
+                  <a:srgbClr val="0D1B2A"/>
+                </a:solidFill>
+                <a:latin typeface="Calibri (Body)"/>
+              </a:rPr>
+              <a:t> </a:t>
+            </a:r>
+            <a:r>
+              <a:rPr lang="en-US" sz="1050" dirty="0" err="1" smtClean="0">
+                <a:solidFill>
+                  <a:srgbClr val="0D1B2A"/>
+                </a:solidFill>
+                <a:latin typeface="Calibri (Body)"/>
+              </a:rPr>
+              <a:t>đang</a:t>
+            </a:r>
+            <a:r>
+              <a:rPr lang="en-US" sz="1050" dirty="0" smtClean="0">
+                <a:solidFill>
+                  <a:srgbClr val="0D1B2A"/>
+                </a:solidFill>
+                <a:latin typeface="Calibri (Body)"/>
+              </a:rPr>
+              <a:t> </a:t>
+            </a:r>
+            <a:r>
+              <a:rPr lang="en-US" sz="1050" dirty="0" err="1" smtClean="0">
+                <a:solidFill>
+                  <a:srgbClr val="0D1B2A"/>
+                </a:solidFill>
+                <a:latin typeface="Calibri (Body)"/>
+              </a:rPr>
+              <a:t>thu</a:t>
+            </a:r>
+            <a:r>
+              <a:rPr lang="en-US" sz="1050" dirty="0" smtClean="0">
+                <a:solidFill>
+                  <a:srgbClr val="0D1B2A"/>
+                </a:solidFill>
+                <a:latin typeface="Calibri (Body)"/>
+              </a:rPr>
+              <a:t> </a:t>
+            </a:r>
+            <a:r>
+              <a:rPr lang="en-US" sz="1050" dirty="0" err="1" smtClean="0">
+                <a:solidFill>
+                  <a:srgbClr val="0D1B2A"/>
+                </a:solidFill>
+                <a:latin typeface="Calibri (Body)"/>
+              </a:rPr>
+              <a:t>hẹp</a:t>
+            </a:r>
+            <a:r>
+              <a:rPr lang="en-US" sz="1050" dirty="0" smtClean="0">
+                <a:solidFill>
+                  <a:srgbClr val="0D1B2A"/>
+                </a:solidFill>
+                <a:latin typeface="Calibri (Body)"/>
+              </a:rPr>
+              <a:t> </a:t>
+            </a:r>
+            <a:r>
+              <a:rPr lang="en-US" sz="1050" dirty="0" err="1" smtClean="0">
+                <a:solidFill>
+                  <a:srgbClr val="0D1B2A"/>
+                </a:solidFill>
+                <a:latin typeface="Calibri (Body)"/>
+              </a:rPr>
+              <a:t>quy</a:t>
+            </a:r>
+            <a:r>
+              <a:rPr lang="en-US" sz="1050" dirty="0" smtClean="0">
+                <a:solidFill>
+                  <a:srgbClr val="0D1B2A"/>
+                </a:solidFill>
+                <a:latin typeface="Calibri (Body)"/>
+              </a:rPr>
+              <a:t> </a:t>
+            </a:r>
+            <a:r>
+              <a:rPr lang="en-US" sz="1050" dirty="0" err="1" smtClean="0">
+                <a:solidFill>
+                  <a:srgbClr val="0D1B2A"/>
+                </a:solidFill>
+                <a:latin typeface="Calibri (Body)"/>
+              </a:rPr>
+              <a:t>mô</a:t>
+            </a:r>
+            <a:r>
+              <a:rPr lang="en-US" sz="1050" dirty="0" smtClean="0">
+                <a:solidFill>
+                  <a:srgbClr val="0D1B2A"/>
+                </a:solidFill>
+                <a:latin typeface="Calibri (Body)"/>
+              </a:rPr>
+              <a:t> replica </a:t>
+            </a:r>
+            <a:r>
+              <a:rPr lang="en-US" sz="1050" dirty="0" err="1" smtClean="0">
+                <a:solidFill>
+                  <a:srgbClr val="0D1B2A"/>
+                </a:solidFill>
+                <a:latin typeface="Calibri (Body)"/>
+              </a:rPr>
+              <a:t>hoặc</a:t>
+            </a:r>
+            <a:r>
+              <a:rPr lang="en-US" sz="1050" dirty="0" smtClean="0">
+                <a:solidFill>
+                  <a:srgbClr val="0D1B2A"/>
+                </a:solidFill>
+                <a:latin typeface="Calibri (Body)"/>
+              </a:rPr>
+              <a:t> </a:t>
+            </a:r>
+            <a:r>
+              <a:rPr lang="en-US" sz="1050" dirty="0" err="1" smtClean="0">
+                <a:solidFill>
+                  <a:srgbClr val="0D1B2A"/>
+                </a:solidFill>
+                <a:latin typeface="Calibri (Body)"/>
+              </a:rPr>
+              <a:t>lượng</a:t>
+            </a:r>
+            <a:r>
+              <a:rPr lang="en-US" sz="1050" dirty="0" smtClean="0">
+                <a:solidFill>
+                  <a:srgbClr val="0D1B2A"/>
+                </a:solidFill>
+                <a:latin typeface="Calibri (Body)"/>
+              </a:rPr>
+              <a:t> CPU </a:t>
+            </a:r>
+            <a:r>
+              <a:rPr lang="en-US" sz="1050" dirty="0" err="1" smtClean="0">
+                <a:solidFill>
+                  <a:srgbClr val="0D1B2A"/>
+                </a:solidFill>
+                <a:latin typeface="Calibri (Body)"/>
+              </a:rPr>
+              <a:t>gần</a:t>
+            </a:r>
+            <a:r>
+              <a:rPr lang="en-US" sz="1050" dirty="0" smtClean="0">
+                <a:solidFill>
+                  <a:srgbClr val="0D1B2A"/>
+                </a:solidFill>
+                <a:latin typeface="Calibri (Body)"/>
+              </a:rPr>
+              <a:t> </a:t>
+            </a:r>
+            <a:r>
+              <a:rPr lang="en-US" sz="1050" dirty="0" err="1" smtClean="0">
+                <a:solidFill>
+                  <a:srgbClr val="0D1B2A"/>
+                </a:solidFill>
+                <a:latin typeface="Calibri (Body)"/>
+              </a:rPr>
+              <a:t>chạm</a:t>
+            </a:r>
+            <a:r>
+              <a:rPr lang="en-US" sz="1050" dirty="0" smtClean="0">
+                <a:solidFill>
+                  <a:srgbClr val="0D1B2A"/>
+                </a:solidFill>
+                <a:latin typeface="Calibri (Body)"/>
+              </a:rPr>
+              <a:t> </a:t>
+            </a:r>
+            <a:r>
+              <a:rPr lang="en-US" sz="1050" dirty="0" err="1" smtClean="0">
+                <a:solidFill>
+                  <a:srgbClr val="0D1B2A"/>
+                </a:solidFill>
+                <a:latin typeface="Calibri (Body)"/>
+              </a:rPr>
+              <a:t>mức</a:t>
+            </a:r>
+            <a:r>
+              <a:rPr lang="en-US" sz="1050" dirty="0" smtClean="0">
+                <a:solidFill>
+                  <a:srgbClr val="0D1B2A"/>
+                </a:solidFill>
+                <a:latin typeface="Calibri (Body)"/>
+              </a:rPr>
+              <a:t> </a:t>
+            </a:r>
+            <a:r>
+              <a:rPr lang="en-US" sz="1050" dirty="0" err="1" smtClean="0">
+                <a:solidFill>
+                  <a:srgbClr val="0D1B2A"/>
+                </a:solidFill>
+                <a:latin typeface="Calibri (Body)"/>
+              </a:rPr>
+              <a:t>ngưỡng</a:t>
+            </a:r>
+            <a:r>
+              <a:rPr lang="en-US" sz="1050" dirty="0" smtClean="0">
+                <a:solidFill>
+                  <a:srgbClr val="0D1B2A"/>
+                </a:solidFill>
+                <a:latin typeface="Calibri (Body)"/>
+              </a:rPr>
+              <a:t> </a:t>
+            </a:r>
+            <a:r>
+              <a:rPr lang="en-US" sz="1050" dirty="0" err="1" smtClean="0">
+                <a:solidFill>
+                  <a:srgbClr val="0D1B2A"/>
+                </a:solidFill>
+                <a:latin typeface="Calibri (Body)"/>
+              </a:rPr>
+              <a:t>để</a:t>
+            </a:r>
+            <a:r>
+              <a:rPr lang="en-US" sz="1050" dirty="0" smtClean="0">
+                <a:solidFill>
+                  <a:srgbClr val="0D1B2A"/>
+                </a:solidFill>
+                <a:latin typeface="Calibri (Body)"/>
+              </a:rPr>
+              <a:t> </a:t>
+            </a:r>
+            <a:r>
+              <a:rPr lang="en-US" sz="1050" dirty="0" err="1" smtClean="0">
+                <a:solidFill>
+                  <a:srgbClr val="0D1B2A"/>
+                </a:solidFill>
+                <a:latin typeface="Calibri (Body)"/>
+              </a:rPr>
+              <a:t>hệ</a:t>
+            </a:r>
+            <a:r>
+              <a:rPr lang="en-US" sz="1050" dirty="0" smtClean="0">
+                <a:solidFill>
+                  <a:srgbClr val="0D1B2A"/>
+                </a:solidFill>
+                <a:latin typeface="Calibri (Body)"/>
+              </a:rPr>
+              <a:t> </a:t>
+            </a:r>
+            <a:r>
+              <a:rPr lang="en-US" sz="1050" dirty="0" err="1" smtClean="0">
+                <a:solidFill>
+                  <a:srgbClr val="0D1B2A"/>
+                </a:solidFill>
+                <a:latin typeface="Calibri (Body)"/>
+              </a:rPr>
+              <a:t>thống</a:t>
+            </a:r>
+            <a:r>
+              <a:rPr lang="en-US" sz="1050" dirty="0" smtClean="0">
+                <a:solidFill>
+                  <a:srgbClr val="0D1B2A"/>
+                </a:solidFill>
+                <a:latin typeface="Calibri (Body)"/>
+              </a:rPr>
+              <a:t> scale them pod.</a:t>
+            </a:r>
+          </a:p>
+          <a:p>
+            <a:pPr marL="171450" indent="-171450">
+              <a:buFontTx/>
+              <a:buChar char="-"/>
+            </a:pPr>
+            <a:r>
+              <a:rPr lang="en-US" sz="1050" dirty="0" err="1" smtClean="0">
+                <a:latin typeface="Calibri (Body)"/>
+              </a:rPr>
+              <a:t>Hành</a:t>
+            </a:r>
+            <a:r>
+              <a:rPr lang="en-US" sz="1050" dirty="0" smtClean="0">
+                <a:latin typeface="Calibri (Body)"/>
+              </a:rPr>
+              <a:t> </a:t>
+            </a:r>
+            <a:r>
+              <a:rPr lang="en-US" sz="1050" dirty="0" err="1" smtClean="0">
+                <a:latin typeface="Calibri (Body)"/>
+              </a:rPr>
+              <a:t>động</a:t>
+            </a:r>
+            <a:r>
+              <a:rPr lang="en-US" sz="1050" dirty="0" smtClean="0">
+                <a:latin typeface="Calibri (Body)"/>
+              </a:rPr>
+              <a:t>: </a:t>
+            </a:r>
+            <a:r>
+              <a:rPr lang="en-US" sz="1050" dirty="0" err="1" smtClean="0">
+                <a:latin typeface="Calibri (Body)"/>
+              </a:rPr>
+              <a:t>Tấn</a:t>
+            </a:r>
+            <a:r>
+              <a:rPr lang="en-US" sz="1050" dirty="0" smtClean="0">
+                <a:latin typeface="Calibri (Body)"/>
+              </a:rPr>
+              <a:t> </a:t>
+            </a:r>
+            <a:r>
+              <a:rPr lang="en-US" sz="1050" dirty="0" err="1" smtClean="0">
+                <a:latin typeface="Calibri (Body)"/>
+              </a:rPr>
+              <a:t>công</a:t>
+            </a:r>
+            <a:r>
+              <a:rPr lang="en-US" sz="1050" dirty="0" smtClean="0">
+                <a:latin typeface="Calibri (Body)"/>
+              </a:rPr>
+              <a:t> </a:t>
+            </a:r>
+            <a:r>
+              <a:rPr lang="en-US" sz="1050" dirty="0" err="1" smtClean="0">
+                <a:latin typeface="Calibri (Body)"/>
+              </a:rPr>
+              <a:t>dồn</a:t>
+            </a:r>
+            <a:r>
+              <a:rPr lang="en-US" sz="1050" dirty="0" smtClean="0">
+                <a:latin typeface="Calibri (Body)"/>
+              </a:rPr>
+              <a:t> </a:t>
+            </a:r>
+            <a:r>
+              <a:rPr lang="en-US" sz="1050" dirty="0" err="1" smtClean="0">
+                <a:latin typeface="Calibri (Body)"/>
+              </a:rPr>
+              <a:t>dập</a:t>
+            </a:r>
+            <a:r>
+              <a:rPr lang="en-US" sz="1050" dirty="0" smtClean="0">
+                <a:latin typeface="Calibri (Body)"/>
+              </a:rPr>
+              <a:t> </a:t>
+            </a:r>
+            <a:r>
+              <a:rPr lang="en-US" sz="1050" dirty="0" err="1" smtClean="0">
+                <a:latin typeface="Calibri (Body)"/>
+              </a:rPr>
+              <a:t>vào</a:t>
+            </a:r>
+            <a:r>
+              <a:rPr lang="en-US" sz="1050" dirty="0" smtClean="0">
+                <a:latin typeface="Calibri (Body)"/>
+              </a:rPr>
+              <a:t> endpoint </a:t>
+            </a:r>
+            <a:r>
+              <a:rPr lang="en-US" sz="1050" dirty="0" err="1" smtClean="0">
+                <a:latin typeface="Calibri (Body)"/>
+              </a:rPr>
+              <a:t>tốn</a:t>
+            </a:r>
+            <a:r>
+              <a:rPr lang="en-US" sz="1050" dirty="0" smtClean="0">
+                <a:latin typeface="Calibri (Body)"/>
+              </a:rPr>
+              <a:t> CPU </a:t>
+            </a:r>
+            <a:r>
+              <a:rPr lang="en-US" sz="1050" dirty="0" err="1" smtClean="0">
+                <a:latin typeface="Calibri (Body)"/>
+              </a:rPr>
+              <a:t>nhất</a:t>
+            </a:r>
+            <a:r>
+              <a:rPr lang="en-US" sz="1050" dirty="0" smtClean="0">
+                <a:latin typeface="Calibri (Body)"/>
+              </a:rPr>
+              <a:t> </a:t>
+            </a:r>
+            <a:endParaRPr lang="en-US" sz="1050" dirty="0">
+              <a:latin typeface="Calibri (Body)"/>
+            </a:endParaRPr>
           </a:p>
         </p:txBody>
       </p:sp>
@@ -22650,13 +24266,7 @@
               <a:rPr lang="en-US" sz="1000" dirty="0" err="1" smtClean="0">
                 <a:latin typeface="Arial (Body)"/>
               </a:rPr>
-              <a:t>bà</a:t>
-            </a:r>
-            <a:r>
-              <a:rPr lang="en-US" sz="1000" dirty="0" err="1" smtClean="0">
-                <a:latin typeface="Arial (Body)"/>
-              </a:rPr>
-              <a:t>i</a:t>
+              <a:t>bài</a:t>
             </a:r>
             <a:r>
               <a:rPr lang="en-US" sz="1000" dirty="0" smtClean="0">

--- a/report/edos_slide.pptx
+++ b/report/edos_slide.pptx
@@ -5,7 +5,7 @@
     <p:sldMasterId id="2147483648" r:id="rId1"/>
   </p:sldMasterIdLst>
   <p:notesMasterIdLst>
-    <p:notesMasterId r:id="rId25"/>
+    <p:notesMasterId r:id="rId24"/>
   </p:notesMasterIdLst>
   <p:sldIdLst>
     <p:sldId id="256" r:id="rId2"/>
@@ -27,10 +27,9 @@
     <p:sldId id="274" r:id="rId18"/>
     <p:sldId id="270" r:id="rId19"/>
     <p:sldId id="275" r:id="rId20"/>
-    <p:sldId id="276" r:id="rId21"/>
-    <p:sldId id="277" r:id="rId22"/>
-    <p:sldId id="278" r:id="rId23"/>
-    <p:sldId id="267" r:id="rId24"/>
+    <p:sldId id="277" r:id="rId21"/>
+    <p:sldId id="278" r:id="rId22"/>
+    <p:sldId id="267" r:id="rId23"/>
   </p:sldIdLst>
   <p:sldSz cx="9144000" cy="5143500" type="screen16x9"/>
   <p:notesSz cx="5143500" cy="9144000"/>
@@ -1341,7 +1340,7 @@
     </p:spTree>
     <p:extLst>
       <p:ext uri="{BB962C8B-B14F-4D97-AF65-F5344CB8AC3E}">
-        <p14:creationId xmlns:p14="http://schemas.microsoft.com/office/powerpoint/2010/main" val="4047849052"/>
+        <p14:creationId xmlns:p14="http://schemas.microsoft.com/office/powerpoint/2010/main" val="1487940177"/>
       </p:ext>
     </p:extLst>
   </p:cSld>
@@ -1425,7 +1424,7 @@
     </p:spTree>
     <p:extLst>
       <p:ext uri="{BB962C8B-B14F-4D97-AF65-F5344CB8AC3E}">
-        <p14:creationId xmlns:p14="http://schemas.microsoft.com/office/powerpoint/2010/main" val="1487940177"/>
+        <p14:creationId xmlns:p14="http://schemas.microsoft.com/office/powerpoint/2010/main" val="2774375871"/>
       </p:ext>
     </p:extLst>
   </p:cSld>
@@ -1501,90 +1500,6 @@
             <a:fld id="{F7021451-1387-4CA6-816F-3879F97B5CBC}" type="slidenum">
               <a:rPr lang="en-US"/>
               <a:t>22</a:t>
-            </a:fld>
-            <a:endParaRPr lang="en-US"/>
-          </a:p>
-        </p:txBody>
-      </p:sp>
-    </p:spTree>
-    <p:extLst>
-      <p:ext uri="{BB962C8B-B14F-4D97-AF65-F5344CB8AC3E}">
-        <p14:creationId xmlns:p14="http://schemas.microsoft.com/office/powerpoint/2010/main" val="2774375871"/>
-      </p:ext>
-    </p:extLst>
-  </p:cSld>
-  <p:clrMapOvr>
-    <a:masterClrMapping/>
-  </p:clrMapOvr>
-</p:notes>
-</file>
-
-<file path=ppt/notesSlides/notesSlide23.xml><?xml version="1.0" encoding="utf-8"?>
-<p:notes xmlns:a="http://schemas.openxmlformats.org/drawingml/2006/main" xmlns:r="http://schemas.openxmlformats.org/officeDocument/2006/relationships" xmlns:p="http://schemas.openxmlformats.org/presentationml/2006/main">
-  <p:cSld>
-    <p:spTree>
-      <p:nvGrpSpPr>
-        <p:cNvPr id="1" name=""/>
-        <p:cNvGrpSpPr/>
-        <p:nvPr/>
-      </p:nvGrpSpPr>
-      <p:grpSpPr>
-        <a:xfrm>
-          <a:off x="0" y="0"/>
-          <a:ext cx="0" cy="0"/>
-          <a:chOff x="0" y="0"/>
-          <a:chExt cx="0" cy="0"/>
-        </a:xfrm>
-      </p:grpSpPr>
-      <p:sp>
-        <p:nvSpPr>
-          <p:cNvPr id="2" name="Slide Image Placeholder 1"/>
-          <p:cNvSpPr>
-            <a:spLocks noGrp="1" noRot="1" noChangeAspect="1"/>
-          </p:cNvSpPr>
-          <p:nvPr>
-            <p:ph type="sldImg"/>
-          </p:nvPr>
-        </p:nvSpPr>
-        <p:spPr/>
-      </p:sp>
-      <p:sp>
-        <p:nvSpPr>
-          <p:cNvPr id="3" name="Notes Placeholder 2"/>
-          <p:cNvSpPr>
-            <a:spLocks noGrp="1"/>
-          </p:cNvSpPr>
-          <p:nvPr>
-            <p:ph type="body" idx="1"/>
-          </p:nvPr>
-        </p:nvSpPr>
-        <p:spPr/>
-        <p:txBody>
-          <a:bodyPr/>
-          <a:lstStyle/>
-          <a:p>
-            <a:endParaRPr lang="en-US" dirty="0"/>
-          </a:p>
-        </p:txBody>
-      </p:sp>
-      <p:sp>
-        <p:nvSpPr>
-          <p:cNvPr id="4" name="Slide Number Placeholder 3"/>
-          <p:cNvSpPr>
-            <a:spLocks noGrp="1"/>
-          </p:cNvSpPr>
-          <p:nvPr>
-            <p:ph type="sldNum" sz="quarter" idx="10"/>
-          </p:nvPr>
-        </p:nvSpPr>
-        <p:spPr/>
-        <p:txBody>
-          <a:bodyPr/>
-          <a:lstStyle/>
-          <a:p>
-            <a:fld id="{F7021451-1387-4CA6-816F-3879F97B5CBC}" type="slidenum">
-              <a:rPr lang="en-US"/>
-              <a:t>23</a:t>
             </a:fld>
             <a:endParaRPr lang="en-US"/>
           </a:p>
@@ -7271,15 +7186,7 @@
                   <a:srgbClr val="64748B"/>
                 </a:solidFill>
               </a:rPr>
-              <a:t>16</a:t>
-            </a:r>
-            <a:r>
-              <a:rPr lang="en-US" sz="1000" dirty="0" smtClean="0">
-                <a:solidFill>
-                  <a:srgbClr val="64748B"/>
-                </a:solidFill>
-              </a:rPr>
-              <a:t> </a:t>
+              <a:t>16 </a:t>
             </a:r>
             <a:r>
               <a:rPr lang="en-US" sz="1000" dirty="0">
@@ -8475,7 +8382,6 @@
               <a:rPr lang="en-US" sz="1050" dirty="0"/>
               <a:t> 1–2 pod.</a:t>
             </a:r>
-            <a:endParaRPr lang="en-US" sz="1050" dirty="0"/>
           </a:p>
         </p:txBody>
       </p:sp>
@@ -11737,14 +11643,6 @@
             <a:pPr marL="0" indent="0">
               <a:buNone/>
             </a:pPr>
-            <a:r>
-              <a:rPr lang="en-US" sz="900" dirty="0">
-                <a:solidFill>
-                  <a:srgbClr val="8BA0B4"/>
-                </a:solidFill>
-              </a:rPr>
-              <a:t>Nguyen Tien Lam | HUST | 2026</a:t>
-            </a:r>
             <a:endParaRPr lang="en-US" sz="900" dirty="0"/>
           </a:p>
         </p:txBody>
@@ -11806,480 +11704,28 @@
           </a:ln>
         </p:spPr>
       </p:sp>
-      <p:sp>
-        <p:nvSpPr>
-          <p:cNvPr id="42" name="TextBox 41"/>
-          <p:cNvSpPr txBox="1"/>
-          <p:nvPr/>
-        </p:nvSpPr>
-        <p:spPr>
-          <a:xfrm>
-            <a:off x="709673" y="2380558"/>
-            <a:ext cx="3438880" cy="261610"/>
-          </a:xfrm>
-          <a:prstGeom prst="rect">
-            <a:avLst/>
-          </a:prstGeom>
-          <a:noFill/>
-        </p:spPr>
-        <p:txBody>
-          <a:bodyPr wrap="square" rtlCol="0">
-            <a:spAutoFit/>
-          </a:bodyPr>
-          <a:lstStyle/>
-          <a:p>
-            <a:r>
-              <a:rPr lang="en-US" sz="1100" dirty="0" err="1" smtClean="0"/>
-              <a:t>Số</a:t>
-            </a:r>
-            <a:r>
-              <a:rPr lang="en-US" sz="1100" dirty="0" smtClean="0"/>
-              <a:t> </a:t>
-            </a:r>
-            <a:r>
-              <a:rPr lang="en-US" sz="1100" dirty="0" err="1" smtClean="0"/>
-              <a:t>lượng</a:t>
-            </a:r>
-            <a:r>
-              <a:rPr lang="en-US" sz="1100" dirty="0" smtClean="0"/>
-              <a:t> pod </a:t>
-            </a:r>
-            <a:r>
-              <a:rPr lang="en-US" sz="1100" dirty="0" err="1" smtClean="0"/>
-              <a:t>đang</a:t>
-            </a:r>
-            <a:r>
-              <a:rPr lang="en-US" sz="1100" dirty="0" smtClean="0"/>
-              <a:t> </a:t>
-            </a:r>
-            <a:r>
-              <a:rPr lang="en-US" sz="1100" dirty="0" err="1" smtClean="0"/>
-              <a:t>chạy</a:t>
-            </a:r>
-            <a:endParaRPr lang="en-US" sz="1100" dirty="0"/>
-          </a:p>
-        </p:txBody>
-      </p:sp>
       <p:pic>
         <p:nvPicPr>
-          <p:cNvPr id="41" name="Picture 40"/>
-          <p:cNvPicPr>
-            <a:picLocks noChangeAspect="1"/>
-          </p:cNvPicPr>
+          <p:cNvPr id="17" name="image13.png"/>
+          <p:cNvPicPr/>
           <p:nvPr/>
         </p:nvPicPr>
         <p:blipFill>
           <a:blip r:embed="rId3"/>
+          <a:srcRect/>
           <a:stretch>
             <a:fillRect/>
           </a:stretch>
         </p:blipFill>
         <p:spPr>
           <a:xfrm>
-            <a:off x="709672" y="764928"/>
-            <a:ext cx="3438880" cy="1622028"/>
-          </a:xfrm>
-          <a:prstGeom prst="rect">
-            <a:avLst/>
-          </a:prstGeom>
-        </p:spPr>
-      </p:pic>
-      <p:sp>
-        <p:nvSpPr>
-          <p:cNvPr id="44" name="TextBox 43"/>
-          <p:cNvSpPr txBox="1"/>
-          <p:nvPr/>
-        </p:nvSpPr>
-        <p:spPr>
-          <a:xfrm>
-            <a:off x="4883176" y="4304146"/>
-            <a:ext cx="4162633" cy="430887"/>
-          </a:xfrm>
-          <a:prstGeom prst="rect">
-            <a:avLst/>
-          </a:prstGeom>
-          <a:noFill/>
-        </p:spPr>
-        <p:txBody>
-          <a:bodyPr wrap="square" rtlCol="0">
-            <a:spAutoFit/>
-          </a:bodyPr>
-          <a:lstStyle/>
-          <a:p>
-            <a:r>
-              <a:rPr lang="en-US" sz="1100" dirty="0" err="1"/>
-              <a:t>S</a:t>
-            </a:r>
-            <a:r>
-              <a:rPr lang="en-US" sz="1100" dirty="0" err="1" smtClean="0"/>
-              <a:t>ố</a:t>
-            </a:r>
-            <a:r>
-              <a:rPr lang="en-US" sz="1100" dirty="0" smtClean="0"/>
-              <a:t> </a:t>
-            </a:r>
-            <a:r>
-              <a:rPr lang="en-US" sz="1100" dirty="0"/>
-              <a:t>pods HPA </a:t>
-            </a:r>
-            <a:r>
-              <a:rPr lang="en-US" sz="1100" dirty="0" err="1"/>
-              <a:t>muốn</a:t>
-            </a:r>
-            <a:r>
-              <a:rPr lang="en-US" sz="1100" dirty="0"/>
-              <a:t> </a:t>
-            </a:r>
-            <a:r>
-              <a:rPr lang="en-US" sz="1100" dirty="0" err="1" smtClean="0"/>
-              <a:t>có</a:t>
-            </a:r>
-            <a:r>
-              <a:rPr lang="en-US" sz="1100" dirty="0" smtClean="0"/>
-              <a:t> (</a:t>
-            </a:r>
-            <a:r>
-              <a:rPr lang="en-US" sz="1100" dirty="0" err="1" smtClean="0"/>
-              <a:t>vàng</a:t>
-            </a:r>
-            <a:r>
-              <a:rPr lang="en-US" sz="1100" dirty="0" smtClean="0"/>
-              <a:t>) </a:t>
-            </a:r>
-            <a:r>
-              <a:rPr lang="en-US" sz="1100" dirty="0" err="1"/>
-              <a:t>và</a:t>
-            </a:r>
-            <a:r>
-              <a:rPr lang="en-US" sz="1100" dirty="0"/>
-              <a:t> </a:t>
-            </a:r>
-            <a:r>
-              <a:rPr lang="en-US" sz="1100" dirty="0" err="1"/>
-              <a:t>số</a:t>
-            </a:r>
-            <a:r>
-              <a:rPr lang="en-US" sz="1100" dirty="0"/>
-              <a:t> pods </a:t>
-            </a:r>
-            <a:r>
-              <a:rPr lang="en-US" sz="1100" dirty="0" err="1"/>
-              <a:t>thực</a:t>
-            </a:r>
-            <a:r>
-              <a:rPr lang="en-US" sz="1100" dirty="0"/>
-              <a:t> </a:t>
-            </a:r>
-            <a:r>
-              <a:rPr lang="en-US" sz="1100" dirty="0" err="1"/>
-              <a:t>tế</a:t>
-            </a:r>
-            <a:r>
-              <a:rPr lang="en-US" sz="1100" dirty="0"/>
-              <a:t> </a:t>
-            </a:r>
-            <a:r>
-              <a:rPr lang="en-US" sz="1100" dirty="0" err="1"/>
-              <a:t>đang</a:t>
-            </a:r>
-            <a:r>
-              <a:rPr lang="en-US" sz="1100" dirty="0"/>
-              <a:t> </a:t>
-            </a:r>
-            <a:r>
-              <a:rPr lang="en-US" sz="1100" dirty="0" err="1" smtClean="0"/>
-              <a:t>chạy</a:t>
-            </a:r>
-            <a:r>
-              <a:rPr lang="en-US" sz="1100" dirty="0" smtClean="0"/>
-              <a:t> (</a:t>
-            </a:r>
-            <a:r>
-              <a:rPr lang="en-US" sz="1100" dirty="0" err="1" smtClean="0"/>
-              <a:t>xanh</a:t>
-            </a:r>
-            <a:r>
-              <a:rPr lang="en-US" sz="1100" dirty="0" smtClean="0"/>
-              <a:t> </a:t>
-            </a:r>
-            <a:r>
-              <a:rPr lang="en-US" sz="1100" dirty="0" err="1" smtClean="0"/>
-              <a:t>lá</a:t>
-            </a:r>
-            <a:r>
-              <a:rPr lang="en-US" sz="1100" dirty="0" smtClean="0"/>
-              <a:t> </a:t>
-            </a:r>
-            <a:r>
-              <a:rPr lang="en-US" sz="1100" dirty="0" err="1" smtClean="0"/>
-              <a:t>cây</a:t>
-            </a:r>
-            <a:r>
-              <a:rPr lang="en-US" sz="1100" dirty="0" smtClean="0"/>
-              <a:t>). Do </a:t>
-            </a:r>
-            <a:r>
-              <a:rPr lang="en-US" sz="1100" dirty="0" err="1" smtClean="0"/>
-              <a:t>hiện</a:t>
-            </a:r>
-            <a:r>
-              <a:rPr lang="en-US" sz="1100" dirty="0" smtClean="0"/>
-              <a:t> </a:t>
-            </a:r>
-            <a:r>
-              <a:rPr lang="en-US" sz="1100" dirty="0" err="1" smtClean="0"/>
-              <a:t>tại</a:t>
-            </a:r>
-            <a:r>
-              <a:rPr lang="en-US" sz="1100" dirty="0" smtClean="0"/>
-              <a:t> </a:t>
-            </a:r>
-            <a:r>
-              <a:rPr lang="en-US" sz="1100" dirty="0" err="1" smtClean="0"/>
-              <a:t>hệ</a:t>
-            </a:r>
-            <a:r>
-              <a:rPr lang="en-US" sz="1100" dirty="0" smtClean="0"/>
-              <a:t> </a:t>
-            </a:r>
-            <a:r>
-              <a:rPr lang="en-US" sz="1100" dirty="0" err="1" smtClean="0"/>
-              <a:t>thống</a:t>
-            </a:r>
-            <a:r>
-              <a:rPr lang="en-US" sz="1100" dirty="0" smtClean="0"/>
-              <a:t> </a:t>
-            </a:r>
-            <a:r>
-              <a:rPr lang="en-US" sz="1100" dirty="0" err="1" smtClean="0"/>
-              <a:t>ổn</a:t>
-            </a:r>
-            <a:r>
-              <a:rPr lang="en-US" sz="1100" dirty="0" smtClean="0"/>
-              <a:t> </a:t>
-            </a:r>
-            <a:r>
-              <a:rPr lang="en-US" sz="1100" dirty="0" err="1" smtClean="0"/>
-              <a:t>định</a:t>
-            </a:r>
-            <a:r>
-              <a:rPr lang="en-US" sz="1100" dirty="0" smtClean="0"/>
-              <a:t> </a:t>
-            </a:r>
-            <a:r>
-              <a:rPr lang="en-US" sz="1100" dirty="0" err="1" smtClean="0"/>
-              <a:t>nên</a:t>
-            </a:r>
-            <a:r>
-              <a:rPr lang="en-US" sz="1100" dirty="0" smtClean="0"/>
-              <a:t> </a:t>
-            </a:r>
-            <a:r>
-              <a:rPr lang="en-US" sz="1100" dirty="0" err="1" smtClean="0"/>
-              <a:t>hai</a:t>
-            </a:r>
-            <a:r>
-              <a:rPr lang="en-US" sz="1100" dirty="0" smtClean="0"/>
-              <a:t> </a:t>
-            </a:r>
-            <a:r>
-              <a:rPr lang="en-US" sz="1100" dirty="0" err="1" smtClean="0"/>
-              <a:t>đường</a:t>
-            </a:r>
-            <a:r>
-              <a:rPr lang="en-US" sz="1100" dirty="0" smtClean="0"/>
-              <a:t> </a:t>
-            </a:r>
-            <a:r>
-              <a:rPr lang="en-US" sz="1100" dirty="0" err="1" smtClean="0"/>
-              <a:t>này</a:t>
-            </a:r>
-            <a:r>
-              <a:rPr lang="en-US" sz="1100" dirty="0" smtClean="0"/>
-              <a:t> </a:t>
-            </a:r>
-            <a:r>
-              <a:rPr lang="en-US" sz="1100" dirty="0" err="1" smtClean="0"/>
-              <a:t>trùng</a:t>
-            </a:r>
-            <a:r>
-              <a:rPr lang="en-US" sz="1100" dirty="0" smtClean="0"/>
-              <a:t> </a:t>
-            </a:r>
-            <a:r>
-              <a:rPr lang="en-US" sz="1100" dirty="0" err="1" smtClean="0"/>
-              <a:t>nhau</a:t>
-            </a:r>
-            <a:endParaRPr lang="en-US" sz="1100" dirty="0"/>
-          </a:p>
-        </p:txBody>
-      </p:sp>
-      <p:sp>
-        <p:nvSpPr>
-          <p:cNvPr id="46" name="TextBox 45"/>
-          <p:cNvSpPr txBox="1"/>
-          <p:nvPr/>
-        </p:nvSpPr>
-        <p:spPr>
-          <a:xfrm>
-            <a:off x="709672" y="4325543"/>
-            <a:ext cx="3438880" cy="261610"/>
-          </a:xfrm>
-          <a:prstGeom prst="rect">
-            <a:avLst/>
-          </a:prstGeom>
-          <a:noFill/>
-        </p:spPr>
-        <p:txBody>
-          <a:bodyPr wrap="square" rtlCol="0">
-            <a:spAutoFit/>
-          </a:bodyPr>
-          <a:lstStyle/>
-          <a:p>
-            <a:r>
-              <a:rPr lang="en-US" sz="1100" dirty="0" err="1" smtClean="0"/>
-              <a:t>Số</a:t>
-            </a:r>
-            <a:r>
-              <a:rPr lang="en-US" sz="1100" dirty="0" smtClean="0"/>
-              <a:t> replica </a:t>
-            </a:r>
-            <a:r>
-              <a:rPr lang="en-US" sz="1100" dirty="0" err="1" smtClean="0"/>
-              <a:t>đang</a:t>
-            </a:r>
-            <a:r>
-              <a:rPr lang="en-US" sz="1100" dirty="0" smtClean="0"/>
-              <a:t> active</a:t>
-            </a:r>
-            <a:endParaRPr lang="en-US" sz="1100" dirty="0"/>
-          </a:p>
-        </p:txBody>
-      </p:sp>
-      <p:sp>
-        <p:nvSpPr>
-          <p:cNvPr id="48" name="TextBox 47"/>
-          <p:cNvSpPr txBox="1"/>
-          <p:nvPr/>
-        </p:nvSpPr>
-        <p:spPr>
-          <a:xfrm>
-            <a:off x="4883176" y="2377106"/>
-            <a:ext cx="3392025" cy="261610"/>
-          </a:xfrm>
-          <a:prstGeom prst="rect">
-            <a:avLst/>
-          </a:prstGeom>
-          <a:noFill/>
-        </p:spPr>
-        <p:txBody>
-          <a:bodyPr wrap="square" rtlCol="0">
-            <a:spAutoFit/>
-          </a:bodyPr>
-          <a:lstStyle/>
-          <a:p>
-            <a:r>
-              <a:rPr lang="en-US" sz="1100" dirty="0" err="1" smtClean="0"/>
-              <a:t>Lượng</a:t>
-            </a:r>
-            <a:r>
-              <a:rPr lang="en-US" sz="1100" dirty="0" smtClean="0"/>
-              <a:t> CPU </a:t>
-            </a:r>
-            <a:r>
-              <a:rPr lang="en-US" sz="1100" dirty="0" err="1" smtClean="0"/>
-              <a:t>mỗi</a:t>
-            </a:r>
-            <a:r>
-              <a:rPr lang="en-US" sz="1100" dirty="0" smtClean="0"/>
-              <a:t> pod </a:t>
-            </a:r>
-            <a:r>
-              <a:rPr lang="en-US" sz="1100" dirty="0" err="1" smtClean="0"/>
-              <a:t>sử</a:t>
-            </a:r>
-            <a:r>
-              <a:rPr lang="en-US" sz="1100" dirty="0" smtClean="0"/>
-              <a:t> </a:t>
-            </a:r>
-            <a:r>
-              <a:rPr lang="en-US" sz="1100" dirty="0" err="1" smtClean="0"/>
-              <a:t>dụng</a:t>
-            </a:r>
-            <a:endParaRPr lang="en-US" sz="1100" dirty="0"/>
-          </a:p>
-        </p:txBody>
-      </p:sp>
-      <p:pic>
-        <p:nvPicPr>
-          <p:cNvPr id="9" name="Picture 8"/>
-          <p:cNvPicPr>
-            <a:picLocks noChangeAspect="1"/>
-          </p:cNvPicPr>
-          <p:nvPr/>
-        </p:nvPicPr>
-        <p:blipFill>
-          <a:blip r:embed="rId4"/>
-          <a:stretch>
-            <a:fillRect/>
-          </a:stretch>
-        </p:blipFill>
-        <p:spPr>
-          <a:xfrm>
-            <a:off x="4954589" y="749808"/>
-            <a:ext cx="3428055" cy="1621194"/>
-          </a:xfrm>
-          <a:prstGeom prst="rect">
-            <a:avLst/>
-          </a:prstGeom>
-        </p:spPr>
-      </p:pic>
-      <p:pic>
-        <p:nvPicPr>
-          <p:cNvPr id="10" name="Picture 9"/>
-          <p:cNvPicPr>
-            <a:picLocks noChangeAspect="1"/>
-          </p:cNvPicPr>
-          <p:nvPr/>
-        </p:nvPicPr>
-        <p:blipFill>
-          <a:blip r:embed="rId5"/>
-          <a:stretch>
-            <a:fillRect/>
-          </a:stretch>
-        </p:blipFill>
-        <p:spPr>
-          <a:xfrm>
-            <a:off x="709673" y="2675923"/>
-            <a:ext cx="3438879" cy="1628223"/>
-          </a:xfrm>
-          <a:prstGeom prst="rect">
-            <a:avLst/>
-          </a:prstGeom>
-        </p:spPr>
-      </p:pic>
-      <p:pic>
-        <p:nvPicPr>
-          <p:cNvPr id="11" name="Picture 10"/>
-          <p:cNvPicPr>
-            <a:picLocks noChangeAspect="1"/>
-          </p:cNvPicPr>
-          <p:nvPr/>
-        </p:nvPicPr>
-        <p:blipFill>
-          <a:blip r:embed="rId6"/>
-          <a:stretch>
-            <a:fillRect/>
-          </a:stretch>
-        </p:blipFill>
-        <p:spPr>
-          <a:xfrm>
-            <a:off x="4954589" y="2642168"/>
-            <a:ext cx="3428055" cy="1605200"/>
-          </a:xfrm>
-          <a:prstGeom prst="rect">
-            <a:avLst/>
-          </a:prstGeom>
+            <a:off x="1036849" y="722376"/>
+            <a:ext cx="7319971" cy="4032504"/>
+          </a:xfrm>
+          <a:prstGeom prst="rect">
+            <a:avLst/>
+          </a:prstGeom>
+          <a:ln/>
         </p:spPr>
       </p:pic>
     </p:spTree>
@@ -12546,8 +11992,8 @@
         </p:nvSpPr>
         <p:spPr>
           <a:xfrm>
-            <a:off x="274320" y="804672"/>
-            <a:ext cx="3757632" cy="3950208"/>
+            <a:off x="274319" y="804672"/>
+            <a:ext cx="4829439" cy="3950208"/>
           </a:xfrm>
           <a:prstGeom prst="rect">
             <a:avLst/>
@@ -12836,12 +12282,28 @@
               <a:buNone/>
             </a:pPr>
             <a:r>
+              <a:rPr lang="en-US" sz="1000" dirty="0" smtClean="0">
+                <a:solidFill>
+                  <a:srgbClr val="0D1B2A"/>
+                </a:solidFill>
+              </a:rPr>
+              <a:t>~</a:t>
+            </a:r>
+            <a:r>
               <a:rPr lang="en-US" sz="1000" dirty="0">
                 <a:solidFill>
                   <a:srgbClr val="0D1B2A"/>
                 </a:solidFill>
               </a:rPr>
-              <a:t>~5–10 </a:t>
+              <a:t>2</a:t>
+            </a:r>
+            <a:r>
+              <a:rPr lang="en-US" sz="1000" dirty="0" smtClean="0">
+                <a:solidFill>
+                  <a:srgbClr val="0D1B2A"/>
+                </a:solidFill>
+              </a:rPr>
+              <a:t> </a:t>
             </a:r>
             <a:r>
               <a:rPr lang="en-US" sz="1000" dirty="0" err="1">
@@ -13315,8 +12777,8 @@
         </p:nvSpPr>
         <p:spPr>
           <a:xfrm>
-            <a:off x="4617720" y="804672"/>
-            <a:ext cx="4160520" cy="3950208"/>
+            <a:off x="5124550" y="804672"/>
+            <a:ext cx="3653690" cy="3950208"/>
           </a:xfrm>
           <a:prstGeom prst="rect">
             <a:avLst/>
@@ -13347,8 +12809,8 @@
         </p:nvSpPr>
         <p:spPr>
           <a:xfrm>
-            <a:off x="4159968" y="804672"/>
-            <a:ext cx="4618272" cy="3950208"/>
+            <a:off x="5124550" y="804672"/>
+            <a:ext cx="3653689" cy="3950208"/>
           </a:xfrm>
           <a:prstGeom prst="rect">
             <a:avLst/>
@@ -13400,9 +12862,37 @@
           </a:p>
         </p:txBody>
       </p:sp>
+      <p:sp>
+        <p:nvSpPr>
+          <p:cNvPr id="33" name="Text 9"/>
+          <p:cNvSpPr/>
+          <p:nvPr/>
+        </p:nvSpPr>
+        <p:spPr>
+          <a:xfrm>
+            <a:off x="4206240" y="4160520"/>
+            <a:ext cx="4551208" cy="594360"/>
+          </a:xfrm>
+          <a:prstGeom prst="rect">
+            <a:avLst/>
+          </a:prstGeom>
+          <a:noFill/>
+          <a:ln/>
+        </p:spPr>
+        <p:txBody>
+          <a:bodyPr wrap="square" lIns="0" tIns="0" rIns="0" bIns="0" rtlCol="0" anchor="ctr"/>
+          <a:lstStyle/>
+          <a:p>
+            <a:pPr marL="0" indent="0">
+              <a:buNone/>
+            </a:pPr>
+            <a:endParaRPr lang="en-US" sz="1000" dirty="0"/>
+          </a:p>
+        </p:txBody>
+      </p:sp>
       <p:pic>
         <p:nvPicPr>
-          <p:cNvPr id="30" name="Picture 29"/>
+          <p:cNvPr id="25" name="Picture 24"/>
           <p:cNvPicPr>
             <a:picLocks noChangeAspect="1"/>
           </p:cNvPicPr>
@@ -13416,8 +12906,8 @@
         </p:blipFill>
         <p:spPr>
           <a:xfrm>
-            <a:off x="4159968" y="804672"/>
-            <a:ext cx="4597480" cy="2112264"/>
+            <a:off x="5124551" y="804672"/>
+            <a:ext cx="3632897" cy="3950208"/>
           </a:xfrm>
           <a:prstGeom prst="rect">
             <a:avLst/>
@@ -13426,7 +12916,7 @@
       </p:pic>
       <p:pic>
         <p:nvPicPr>
-          <p:cNvPr id="32" name="Picture 31"/>
+          <p:cNvPr id="35" name="Picture 34"/>
           <p:cNvPicPr>
             <a:picLocks noChangeAspect="1"/>
           </p:cNvPicPr>
@@ -13440,432 +12930,7 @@
         </p:blipFill>
         <p:spPr>
           <a:xfrm>
-            <a:off x="4159968" y="2908182"/>
-            <a:ext cx="4597480" cy="1214364"/>
-          </a:xfrm>
-          <a:prstGeom prst="rect">
-            <a:avLst/>
-          </a:prstGeom>
-        </p:spPr>
-      </p:pic>
-      <p:sp>
-        <p:nvSpPr>
-          <p:cNvPr id="33" name="Text 9"/>
-          <p:cNvSpPr/>
-          <p:nvPr/>
-        </p:nvSpPr>
-        <p:spPr>
-          <a:xfrm>
-            <a:off x="4206240" y="4160520"/>
-            <a:ext cx="4551208" cy="594360"/>
-          </a:xfrm>
-          <a:prstGeom prst="rect">
-            <a:avLst/>
-          </a:prstGeom>
-          <a:noFill/>
-          <a:ln/>
-        </p:spPr>
-        <p:txBody>
-          <a:bodyPr wrap="square" lIns="0" tIns="0" rIns="0" bIns="0" rtlCol="0" anchor="ctr"/>
-          <a:lstStyle/>
-          <a:p>
-            <a:pPr marL="0" indent="0">
-              <a:buNone/>
-            </a:pPr>
-            <a:r>
-              <a:rPr lang="en-US" sz="1000" dirty="0" err="1" smtClean="0">
-                <a:solidFill>
-                  <a:srgbClr val="0D1B2A"/>
-                </a:solidFill>
-              </a:rPr>
-              <a:t>Từ</a:t>
-            </a:r>
-            <a:r>
-              <a:rPr lang="en-US" sz="1000" dirty="0" smtClean="0">
-                <a:solidFill>
-                  <a:srgbClr val="0D1B2A"/>
-                </a:solidFill>
-              </a:rPr>
-              <a:t> </a:t>
-            </a:r>
-            <a:r>
-              <a:rPr lang="en-US" sz="1000" dirty="0" err="1" smtClean="0">
-                <a:solidFill>
-                  <a:srgbClr val="0D1B2A"/>
-                </a:solidFill>
-              </a:rPr>
-              <a:t>trên</a:t>
-            </a:r>
-            <a:r>
-              <a:rPr lang="en-US" sz="1000" dirty="0" smtClean="0">
-                <a:solidFill>
-                  <a:srgbClr val="0D1B2A"/>
-                </a:solidFill>
-              </a:rPr>
-              <a:t> </a:t>
-            </a:r>
-            <a:r>
-              <a:rPr lang="en-US" sz="1000" dirty="0" err="1" smtClean="0">
-                <a:solidFill>
-                  <a:srgbClr val="0D1B2A"/>
-                </a:solidFill>
-              </a:rPr>
-              <a:t>xuống</a:t>
-            </a:r>
-            <a:r>
-              <a:rPr lang="en-US" sz="1000" dirty="0" smtClean="0">
-                <a:solidFill>
-                  <a:srgbClr val="0D1B2A"/>
-                </a:solidFill>
-              </a:rPr>
-              <a:t> </a:t>
-            </a:r>
-            <a:r>
-              <a:rPr lang="en-US" sz="1000" dirty="0" err="1" smtClean="0">
-                <a:solidFill>
-                  <a:srgbClr val="0D1B2A"/>
-                </a:solidFill>
-              </a:rPr>
-              <a:t>dưới</a:t>
-            </a:r>
-            <a:r>
-              <a:rPr lang="en-US" sz="1000" dirty="0" smtClean="0">
-                <a:solidFill>
-                  <a:srgbClr val="0D1B2A"/>
-                </a:solidFill>
-              </a:rPr>
-              <a:t>: </a:t>
-            </a:r>
-            <a:r>
-              <a:rPr lang="en-US" sz="1000" dirty="0" err="1" smtClean="0">
-                <a:solidFill>
-                  <a:srgbClr val="0D1B2A"/>
-                </a:solidFill>
-              </a:rPr>
-              <a:t>Số</a:t>
-            </a:r>
-            <a:r>
-              <a:rPr lang="en-US" sz="1000" dirty="0" smtClean="0">
-                <a:solidFill>
-                  <a:srgbClr val="0D1B2A"/>
-                </a:solidFill>
-              </a:rPr>
-              <a:t> </a:t>
-            </a:r>
-            <a:r>
-              <a:rPr lang="en-US" sz="1000" dirty="0" err="1" smtClean="0">
-                <a:solidFill>
-                  <a:srgbClr val="0D1B2A"/>
-                </a:solidFill>
-              </a:rPr>
-              <a:t>lượng</a:t>
-            </a:r>
-            <a:r>
-              <a:rPr lang="en-US" sz="1000" dirty="0" smtClean="0">
-                <a:solidFill>
-                  <a:srgbClr val="0D1B2A"/>
-                </a:solidFill>
-              </a:rPr>
-              <a:t> pod </a:t>
-            </a:r>
-            <a:r>
-              <a:rPr lang="en-US" sz="1000" dirty="0" err="1" smtClean="0">
-                <a:solidFill>
-                  <a:srgbClr val="0D1B2A"/>
-                </a:solidFill>
-              </a:rPr>
-              <a:t>đang</a:t>
-            </a:r>
-            <a:r>
-              <a:rPr lang="en-US" sz="1000" dirty="0" smtClean="0">
-                <a:solidFill>
-                  <a:srgbClr val="0D1B2A"/>
-                </a:solidFill>
-              </a:rPr>
-              <a:t> active, HPA status, </a:t>
-            </a:r>
-            <a:r>
-              <a:rPr lang="en-US" sz="1000" dirty="0" err="1" smtClean="0">
-                <a:solidFill>
-                  <a:srgbClr val="0D1B2A"/>
-                </a:solidFill>
-              </a:rPr>
-              <a:t>Lượng</a:t>
-            </a:r>
-            <a:r>
-              <a:rPr lang="en-US" sz="1000" dirty="0" smtClean="0">
-                <a:solidFill>
-                  <a:srgbClr val="0D1B2A"/>
-                </a:solidFill>
-              </a:rPr>
-              <a:t> CPU </a:t>
-            </a:r>
-            <a:r>
-              <a:rPr lang="en-US" sz="1000" dirty="0" err="1" smtClean="0">
-                <a:solidFill>
-                  <a:srgbClr val="0D1B2A"/>
-                </a:solidFill>
-              </a:rPr>
-              <a:t>đang</a:t>
-            </a:r>
-            <a:r>
-              <a:rPr lang="en-US" sz="1000" dirty="0" smtClean="0">
-                <a:solidFill>
-                  <a:srgbClr val="0D1B2A"/>
-                </a:solidFill>
-              </a:rPr>
-              <a:t> </a:t>
-            </a:r>
-            <a:r>
-              <a:rPr lang="en-US" sz="1000" dirty="0" err="1" smtClean="0">
-                <a:solidFill>
-                  <a:srgbClr val="0D1B2A"/>
-                </a:solidFill>
-              </a:rPr>
-              <a:t>sử</a:t>
-            </a:r>
-            <a:r>
-              <a:rPr lang="en-US" sz="1000" dirty="0" smtClean="0">
-                <a:solidFill>
-                  <a:srgbClr val="0D1B2A"/>
-                </a:solidFill>
-              </a:rPr>
-              <a:t> </a:t>
-            </a:r>
-            <a:r>
-              <a:rPr lang="en-US" sz="1000" dirty="0" err="1" smtClean="0">
-                <a:solidFill>
-                  <a:srgbClr val="0D1B2A"/>
-                </a:solidFill>
-              </a:rPr>
-              <a:t>dụng</a:t>
-            </a:r>
-            <a:r>
-              <a:rPr lang="en-US" sz="1000" dirty="0" smtClean="0">
-                <a:solidFill>
-                  <a:srgbClr val="0D1B2A"/>
-                </a:solidFill>
-              </a:rPr>
-              <a:t> </a:t>
-            </a:r>
-            <a:r>
-              <a:rPr lang="en-US" sz="1000" dirty="0" err="1" smtClean="0">
-                <a:solidFill>
-                  <a:srgbClr val="0D1B2A"/>
-                </a:solidFill>
-              </a:rPr>
-              <a:t>mỗi</a:t>
-            </a:r>
-            <a:r>
-              <a:rPr lang="en-US" sz="1000" dirty="0" smtClean="0">
-                <a:solidFill>
-                  <a:srgbClr val="0D1B2A"/>
-                </a:solidFill>
-              </a:rPr>
-              <a:t> pod</a:t>
-            </a:r>
-          </a:p>
-          <a:p>
-            <a:pPr marL="0" indent="0">
-              <a:buNone/>
-            </a:pPr>
-            <a:r>
-              <a:rPr lang="en-US" sz="1000" dirty="0" smtClean="0">
-                <a:solidFill>
-                  <a:srgbClr val="0D1B2A"/>
-                </a:solidFill>
-              </a:rPr>
-              <a:t>=&gt; </a:t>
-            </a:r>
-            <a:r>
-              <a:rPr lang="en-US" sz="1000" dirty="0" err="1" smtClean="0">
-                <a:solidFill>
-                  <a:srgbClr val="0D1B2A"/>
-                </a:solidFill>
-              </a:rPr>
-              <a:t>Trong</a:t>
-            </a:r>
-            <a:r>
-              <a:rPr lang="en-US" sz="1000" dirty="0" smtClean="0">
-                <a:solidFill>
-                  <a:srgbClr val="0D1B2A"/>
-                </a:solidFill>
-              </a:rPr>
-              <a:t> </a:t>
-            </a:r>
-            <a:r>
-              <a:rPr lang="en-US" sz="1000" dirty="0" err="1" smtClean="0">
-                <a:solidFill>
-                  <a:srgbClr val="0D1B2A"/>
-                </a:solidFill>
-              </a:rPr>
-              <a:t>trường</a:t>
-            </a:r>
-            <a:r>
-              <a:rPr lang="en-US" sz="1000" dirty="0" smtClean="0">
-                <a:solidFill>
-                  <a:srgbClr val="0D1B2A"/>
-                </a:solidFill>
-              </a:rPr>
-              <a:t> </a:t>
-            </a:r>
-            <a:r>
-              <a:rPr lang="en-US" sz="1000" dirty="0" err="1" smtClean="0">
-                <a:solidFill>
-                  <a:srgbClr val="0D1B2A"/>
-                </a:solidFill>
-              </a:rPr>
-              <a:t>hợp</a:t>
-            </a:r>
-            <a:r>
-              <a:rPr lang="en-US" sz="1000" dirty="0" smtClean="0">
-                <a:solidFill>
-                  <a:srgbClr val="0D1B2A"/>
-                </a:solidFill>
-              </a:rPr>
-              <a:t> </a:t>
-            </a:r>
-            <a:r>
-              <a:rPr lang="en-US" sz="1000" dirty="0" err="1" smtClean="0">
-                <a:solidFill>
-                  <a:srgbClr val="0D1B2A"/>
-                </a:solidFill>
-              </a:rPr>
-              <a:t>chỉ</a:t>
-            </a:r>
-            <a:r>
-              <a:rPr lang="en-US" sz="1000" dirty="0" smtClean="0">
-                <a:solidFill>
-                  <a:srgbClr val="0D1B2A"/>
-                </a:solidFill>
-              </a:rPr>
-              <a:t> </a:t>
-            </a:r>
-            <a:r>
-              <a:rPr lang="en-US" sz="1000" dirty="0" err="1" smtClean="0">
-                <a:solidFill>
-                  <a:srgbClr val="0D1B2A"/>
-                </a:solidFill>
-              </a:rPr>
-              <a:t>có</a:t>
-            </a:r>
-            <a:r>
-              <a:rPr lang="en-US" sz="1000" dirty="0" smtClean="0">
-                <a:solidFill>
-                  <a:srgbClr val="0D1B2A"/>
-                </a:solidFill>
-              </a:rPr>
-              <a:t> Legit traffic, </a:t>
-            </a:r>
-            <a:r>
-              <a:rPr lang="en-US" sz="1000" dirty="0" err="1" smtClean="0">
-                <a:solidFill>
-                  <a:srgbClr val="0D1B2A"/>
-                </a:solidFill>
-              </a:rPr>
-              <a:t>hệ</a:t>
-            </a:r>
-            <a:r>
-              <a:rPr lang="en-US" sz="1000" dirty="0" smtClean="0">
-                <a:solidFill>
-                  <a:srgbClr val="0D1B2A"/>
-                </a:solidFill>
-              </a:rPr>
-              <a:t> </a:t>
-            </a:r>
-            <a:r>
-              <a:rPr lang="en-US" sz="1000" dirty="0" err="1" smtClean="0">
-                <a:solidFill>
-                  <a:srgbClr val="0D1B2A"/>
-                </a:solidFill>
-              </a:rPr>
-              <a:t>thống</a:t>
-            </a:r>
-            <a:r>
-              <a:rPr lang="en-US" sz="1000" dirty="0" smtClean="0">
-                <a:solidFill>
-                  <a:srgbClr val="0D1B2A"/>
-                </a:solidFill>
-              </a:rPr>
-              <a:t> </a:t>
-            </a:r>
-            <a:r>
-              <a:rPr lang="en-US" sz="1000" dirty="0" err="1" smtClean="0">
-                <a:solidFill>
-                  <a:srgbClr val="0D1B2A"/>
-                </a:solidFill>
-              </a:rPr>
-              <a:t>hoàn</a:t>
-            </a:r>
-            <a:r>
-              <a:rPr lang="en-US" sz="1000" dirty="0" smtClean="0">
-                <a:solidFill>
-                  <a:srgbClr val="0D1B2A"/>
-                </a:solidFill>
-              </a:rPr>
-              <a:t> </a:t>
-            </a:r>
-            <a:r>
-              <a:rPr lang="en-US" sz="1000" dirty="0" err="1" smtClean="0">
-                <a:solidFill>
-                  <a:srgbClr val="0D1B2A"/>
-                </a:solidFill>
-              </a:rPr>
-              <a:t>toàn</a:t>
-            </a:r>
-            <a:r>
-              <a:rPr lang="en-US" sz="1000" dirty="0" smtClean="0">
-                <a:solidFill>
-                  <a:srgbClr val="0D1B2A"/>
-                </a:solidFill>
-              </a:rPr>
-              <a:t> </a:t>
-            </a:r>
-            <a:r>
-              <a:rPr lang="en-US" sz="1000" dirty="0" err="1" smtClean="0">
-                <a:solidFill>
-                  <a:srgbClr val="0D1B2A"/>
-                </a:solidFill>
-              </a:rPr>
-              <a:t>ổn</a:t>
-            </a:r>
-            <a:r>
-              <a:rPr lang="en-US" sz="1000" dirty="0" smtClean="0">
-                <a:solidFill>
-                  <a:srgbClr val="0D1B2A"/>
-                </a:solidFill>
-              </a:rPr>
-              <a:t> </a:t>
-            </a:r>
-            <a:r>
-              <a:rPr lang="en-US" sz="1000" dirty="0" err="1" smtClean="0">
-                <a:solidFill>
-                  <a:srgbClr val="0D1B2A"/>
-                </a:solidFill>
-              </a:rPr>
-              <a:t>định</a:t>
-            </a:r>
-            <a:endParaRPr lang="en-US" sz="1000" dirty="0"/>
-          </a:p>
-        </p:txBody>
-      </p:sp>
-      <p:pic>
-        <p:nvPicPr>
-          <p:cNvPr id="35" name="Picture 34"/>
-          <p:cNvPicPr>
-            <a:picLocks noChangeAspect="1"/>
-          </p:cNvPicPr>
-          <p:nvPr/>
-        </p:nvPicPr>
-        <p:blipFill>
-          <a:blip r:embed="rId5"/>
-          <a:stretch>
-            <a:fillRect/>
-          </a:stretch>
-        </p:blipFill>
-        <p:spPr>
-          <a:xfrm>
-            <a:off x="8027082" y="804672"/>
+            <a:off x="8046720" y="804672"/>
             <a:ext cx="710728" cy="213715"/>
           </a:xfrm>
           <a:prstGeom prst="rect">
@@ -15969,7 +15034,7 @@
         </p:nvSpPr>
         <p:spPr>
           <a:xfrm>
-            <a:off x="4550704" y="2928957"/>
+            <a:off x="4550704" y="3022033"/>
             <a:ext cx="4197489" cy="1323439"/>
           </a:xfrm>
           <a:prstGeom prst="rect">
@@ -16144,7 +15209,7 @@
       </p:sp>
       <p:pic>
         <p:nvPicPr>
-          <p:cNvPr id="22" name="Picture 21"/>
+          <p:cNvPr id="23" name="Picture 22"/>
           <p:cNvPicPr>
             <a:picLocks noChangeAspect="1"/>
           </p:cNvPicPr>
@@ -16158,8 +15223,8 @@
         </p:blipFill>
         <p:spPr>
           <a:xfrm>
-            <a:off x="4562854" y="815799"/>
-            <a:ext cx="4233673" cy="2017894"/>
+            <a:off x="4575802" y="810809"/>
+            <a:ext cx="4172391" cy="2151327"/>
           </a:xfrm>
           <a:prstGeom prst="rect">
             <a:avLst/>
@@ -16414,7 +15479,7 @@
         <p:spPr>
           <a:xfrm>
             <a:off x="274320" y="804672"/>
-            <a:ext cx="4389672" cy="3950208"/>
+            <a:ext cx="4878124" cy="3950208"/>
           </a:xfrm>
           <a:prstGeom prst="rect">
             <a:avLst/>
@@ -16624,57 +15689,40 @@
           <a:lstStyle/>
           <a:p>
             <a:r>
-              <a:rPr lang="vi-VN" sz="1000" b="1" i="1" dirty="0">
+              <a:rPr lang="en-US" sz="1000" dirty="0" smtClean="0">
                 <a:solidFill>
                   <a:srgbClr val="0D1B2A"/>
                 </a:solidFill>
                 <a:latin typeface="Calibri (Body)"/>
               </a:rPr>
-              <a:t>Biểu đồ CPU Utilization per Pod: </a:t>
-            </a:r>
-            <a:r>
-              <a:rPr lang="en-US" sz="1000" dirty="0" smtClean="0">
+              <a:t>- </a:t>
+            </a:r>
+            <a:r>
+              <a:rPr lang="en-US" sz="1000" dirty="0" err="1" smtClean="0">
                 <a:solidFill>
                   <a:srgbClr val="0D1B2A"/>
                 </a:solidFill>
                 <a:latin typeface="Calibri (Body)"/>
               </a:rPr>
-              <a:t/>
-            </a:r>
-            <a:br>
-              <a:rPr lang="en-US" sz="1000" dirty="0" smtClean="0">
+              <a:t>Khi</a:t>
+            </a:r>
+            <a:r>
+              <a:rPr lang="vi-VN" sz="1000" dirty="0" smtClean="0">
                 <a:solidFill>
                   <a:srgbClr val="0D1B2A"/>
                 </a:solidFill>
                 <a:latin typeface="Calibri (Body)"/>
               </a:rPr>
-            </a:br>
-            <a:r>
-              <a:rPr lang="vi-VN" sz="1000" dirty="0" smtClean="0">
+              <a:t> </a:t>
+            </a:r>
+            <a:r>
+              <a:rPr lang="vi-VN" sz="1000" dirty="0">
                 <a:solidFill>
                   <a:srgbClr val="0D1B2A"/>
                 </a:solidFill>
                 <a:latin typeface="Calibri (Body)"/>
               </a:rPr>
-              <a:t>Trước </a:t>
-            </a:r>
-            <a:r>
-              <a:rPr lang="vi-VN" sz="1000" dirty="0">
-                <a:solidFill>
-                  <a:srgbClr val="0D1B2A"/>
-                </a:solidFill>
-                <a:latin typeface="Calibri (Body)"/>
-              </a:rPr>
-              <a:t>21:27, hệ thống chỉ có 1-2 pods với CPU thấp (~0-50%). Khi attack burst bắt đầu, CPU nhảy vọt lên 150% rồi ổn định quanh 100% cho tất cả pods. Việc CPU duy trì ở mức ~100% liên tục cho thấy attack traffic đang đẩy mọi pod đến giới hạn resource limits — đúng mục tiêu của </a:t>
-            </a:r>
-            <a:r>
-              <a:rPr lang="vi-VN" sz="1000" dirty="0" smtClean="0">
-                <a:solidFill>
-                  <a:srgbClr val="0D1B2A"/>
-                </a:solidFill>
-                <a:latin typeface="Calibri (Body)"/>
-              </a:rPr>
-              <a:t>EDoS</a:t>
+              <a:t>tấn công EDoS đã xảy ra, nhanh chóng đẩy quy mô của cluster từ 1 pod lên mức tối đa là 6 pods (maxReplicas) chỉ trong vòng 2 đến 3 phút và duy trì tình trạng này trong suốt 10 phút. Trong quá trình này, mức tiêu thụ CPU của tất cả các pod đều bị đẩy lên ngưỡng rất cao, dao động từ 80% đến 100%.</a:t>
             </a:r>
             <a:r>
               <a:rPr lang="en-US" sz="1000" dirty="0" smtClean="0">
@@ -16719,13 +15767,31 @@
               </a:rPr>
             </a:br>
             <a:r>
-              <a:rPr lang="vi-VN" sz="1000" b="1" i="1" dirty="0">
+              <a:rPr lang="en-US" sz="1000" b="1" i="1" dirty="0" smtClean="0">
                 <a:solidFill>
                   <a:srgbClr val="0D1B2A"/>
                 </a:solidFill>
                 <a:latin typeface="Calibri (Body)"/>
               </a:rPr>
-              <a:t>Biểu đồ HPA Status: </a:t>
+              <a:t>- </a:t>
+            </a:r>
+            <a:r>
+              <a:rPr lang="vi-VN" sz="1000" dirty="0" smtClean="0">
+                <a:solidFill>
+                  <a:srgbClr val="0D1B2A"/>
+                </a:solidFill>
+                <a:latin typeface="Calibri (Body)"/>
+              </a:rPr>
+              <a:t>Phân </a:t>
+            </a:r>
+            <a:r>
+              <a:rPr lang="vi-VN" sz="1000" dirty="0">
+                <a:solidFill>
+                  <a:srgbClr val="0D1B2A"/>
+                </a:solidFill>
+                <a:latin typeface="Calibri (Body)"/>
+              </a:rPr>
+              <a:t>tích trạng thái HPA cho thấy chỉ số requested tăng trước chỉ số Used, phản ánh rõ độ trễ của quá trình mở rộng (scaling), trước khi cả hai chỉ số này cùng chạm ngưỡng tối đa là 6, đồng nghĩa với việc hệ thống đã cạn kiệt hoàn toàn khả năng mở rộng thêm.</a:t>
             </a:r>
             <a:r>
               <a:rPr lang="en-US" sz="1000" dirty="0" smtClean="0">
@@ -16745,176 +15811,6 @@
               </a:rPr>
             </a:br>
             <a:r>
-              <a:rPr lang="vi-VN" sz="1000" dirty="0" smtClean="0">
-                <a:solidFill>
-                  <a:srgbClr val="0D1B2A"/>
-                </a:solidFill>
-                <a:latin typeface="Calibri (Body)"/>
-              </a:rPr>
-              <a:t>Đây </a:t>
-            </a:r>
-            <a:r>
-              <a:rPr lang="vi-VN" sz="1000" dirty="0">
-                <a:solidFill>
-                  <a:srgbClr val="0D1B2A"/>
-                </a:solidFill>
-                <a:latin typeface="Calibri (Body)"/>
-              </a:rPr>
-              <a:t>là biểu đồ quan trọng nhất. Tại 21:27, Desired (vàng) nhảy lên 5 trước, Current (xanh lá) chạy theo sau — đây là độ trễ scaling, khoảng thời gian hệ thống quá tải chưa kịp xử lý. Sau đó cả hai ổn định ở mức </a:t>
-            </a:r>
-            <a:r>
-              <a:rPr lang="vi-VN" sz="1000" dirty="0" smtClean="0">
-                <a:solidFill>
-                  <a:srgbClr val="0D1B2A"/>
-                </a:solidFill>
-                <a:latin typeface="Calibri (Body)"/>
-              </a:rPr>
-              <a:t>6 </a:t>
-            </a:r>
-            <a:r>
-              <a:rPr lang="vi-VN" sz="1000" dirty="0">
-                <a:solidFill>
-                  <a:srgbClr val="0D1B2A"/>
-                </a:solidFill>
-                <a:latin typeface="Calibri (Body)"/>
-              </a:rPr>
-              <a:t>replicas </a:t>
-            </a:r>
-            <a:r>
-              <a:rPr lang="vi-VN" sz="1000" dirty="0" smtClean="0">
-                <a:solidFill>
-                  <a:srgbClr val="0D1B2A"/>
-                </a:solidFill>
-                <a:latin typeface="Calibri (Body)"/>
-              </a:rPr>
-              <a:t>(</a:t>
-            </a:r>
-            <a:r>
-              <a:rPr lang="en-US" sz="1000" dirty="0" smtClean="0">
-                <a:solidFill>
-                  <a:srgbClr val="0D1B2A"/>
-                </a:solidFill>
-                <a:latin typeface="Calibri (Body)"/>
-              </a:rPr>
-              <a:t>Max</a:t>
-            </a:r>
-            <a:r>
-              <a:rPr lang="vi-VN" sz="1000" dirty="0" smtClean="0">
-                <a:solidFill>
-                  <a:srgbClr val="0D1B2A"/>
-                </a:solidFill>
-                <a:latin typeface="Calibri (Body)"/>
-              </a:rPr>
-              <a:t>)</a:t>
-            </a:r>
-            <a:r>
-              <a:rPr lang="en-US" sz="1000" dirty="0" smtClean="0">
-                <a:solidFill>
-                  <a:srgbClr val="0D1B2A"/>
-                </a:solidFill>
-                <a:latin typeface="Calibri (Body)"/>
-              </a:rPr>
-              <a:t> </a:t>
-            </a:r>
-            <a:r>
-              <a:rPr lang="en-US" sz="1000" dirty="0" err="1" smtClean="0">
-                <a:solidFill>
-                  <a:srgbClr val="0D1B2A"/>
-                </a:solidFill>
-                <a:latin typeface="Calibri (Body)"/>
-              </a:rPr>
-              <a:t>chứng</a:t>
-            </a:r>
-            <a:r>
-              <a:rPr lang="en-US" sz="1000" dirty="0" smtClean="0">
-                <a:solidFill>
-                  <a:srgbClr val="0D1B2A"/>
-                </a:solidFill>
-                <a:latin typeface="Calibri (Body)"/>
-              </a:rPr>
-              <a:t> </a:t>
-            </a:r>
-            <a:r>
-              <a:rPr lang="en-US" sz="1000" dirty="0" err="1" smtClean="0">
-                <a:solidFill>
-                  <a:srgbClr val="0D1B2A"/>
-                </a:solidFill>
-                <a:latin typeface="Calibri (Body)"/>
-              </a:rPr>
-              <a:t>tỏ</a:t>
-            </a:r>
-            <a:r>
-              <a:rPr lang="en-US" sz="1000" dirty="0" smtClean="0">
-                <a:solidFill>
-                  <a:srgbClr val="0D1B2A"/>
-                </a:solidFill>
-                <a:latin typeface="Calibri (Body)"/>
-              </a:rPr>
-              <a:t> </a:t>
-            </a:r>
-            <a:r>
-              <a:rPr lang="vi-VN" sz="1000" dirty="0" smtClean="0">
-                <a:solidFill>
-                  <a:srgbClr val="0D1B2A"/>
-                </a:solidFill>
-                <a:latin typeface="Calibri (Body)"/>
-              </a:rPr>
-              <a:t>attacker</a:t>
-            </a:r>
-            <a:r>
-              <a:rPr lang="en-US" sz="1000" dirty="0" smtClean="0">
-                <a:solidFill>
-                  <a:srgbClr val="0D1B2A"/>
-                </a:solidFill>
-                <a:latin typeface="Calibri (Body)"/>
-              </a:rPr>
-              <a:t> </a:t>
-            </a:r>
-            <a:r>
-              <a:rPr lang="en-US" sz="1000" dirty="0" err="1" smtClean="0">
-                <a:solidFill>
-                  <a:srgbClr val="0D1B2A"/>
-                </a:solidFill>
-                <a:latin typeface="Calibri (Body)"/>
-              </a:rPr>
-              <a:t>đã</a:t>
-            </a:r>
-            <a:r>
-              <a:rPr lang="vi-VN" sz="1000" dirty="0" smtClean="0">
-                <a:solidFill>
-                  <a:srgbClr val="0D1B2A"/>
-                </a:solidFill>
-                <a:latin typeface="Calibri (Body)"/>
-              </a:rPr>
-              <a:t> </a:t>
-            </a:r>
-            <a:r>
-              <a:rPr lang="vi-VN" sz="1000" dirty="0">
-                <a:solidFill>
-                  <a:srgbClr val="0D1B2A"/>
-                </a:solidFill>
-                <a:latin typeface="Calibri (Body)"/>
-              </a:rPr>
-              <a:t>duy trì áp lực đủ để giữ replicas ở mức cao</a:t>
-            </a:r>
-            <a:r>
-              <a:rPr lang="vi-VN" sz="1000" dirty="0" smtClean="0">
-                <a:solidFill>
-                  <a:srgbClr val="0D1B2A"/>
-                </a:solidFill>
-                <a:latin typeface="Calibri (Body)"/>
-              </a:rPr>
-              <a:t>.</a:t>
-            </a:r>
-            <a:endParaRPr lang="en-US" sz="1000" dirty="0" smtClean="0">
-              <a:solidFill>
-                <a:srgbClr val="0D1B2A"/>
-              </a:solidFill>
-              <a:latin typeface="Calibri (Body)"/>
-            </a:endParaRPr>
-          </a:p>
-          <a:p>
-            <a:r>
               <a:rPr lang="en-US" sz="1000" dirty="0" smtClean="0">
                 <a:solidFill>
                   <a:srgbClr val="0D1B2A"/>
@@ -16933,74 +15829,33 @@
             </a:br>
             <a:r>
               <a:rPr lang="en-US" sz="1000" dirty="0" smtClean="0">
-                <a:solidFill>
-                  <a:srgbClr val="0D1B2A"/>
-                </a:solidFill>
                 <a:latin typeface="Calibri (Body)"/>
               </a:rPr>
-              <a:t/>
-            </a:r>
-            <a:br>
-              <a:rPr lang="en-US" sz="1000" dirty="0" smtClean="0">
-                <a:solidFill>
-                  <a:srgbClr val="0D1B2A"/>
-                </a:solidFill>
+              <a:t>=&gt; </a:t>
+            </a:r>
+            <a:r>
+              <a:rPr lang="vi-VN" sz="1000" dirty="0" smtClean="0">
                 <a:latin typeface="Calibri (Body)"/>
               </a:rPr>
-            </a:br>
+              <a:t>EDoS </a:t>
+            </a:r>
+            <a:r>
+              <a:rPr lang="vi-VN" sz="1000" dirty="0">
+                <a:latin typeface="Calibri (Body)"/>
+              </a:rPr>
+              <a:t>thành công </a:t>
+            </a:r>
             <a:r>
               <a:rPr lang="en-US" sz="1000" dirty="0" smtClean="0">
                 <a:latin typeface="Calibri (Body)"/>
               </a:rPr>
-              <a:t>=&gt; </a:t>
-            </a:r>
-            <a:r>
-              <a:rPr lang="vi-VN" sz="1000" dirty="0" smtClean="0">
-                <a:latin typeface="Calibri (Body)"/>
-              </a:rPr>
-              <a:t>EDoS </a:t>
+              <a:t>- </a:t>
             </a:r>
             <a:r>
               <a:rPr lang="vi-VN" sz="1000" dirty="0">
                 <a:latin typeface="Calibri (Body)"/>
               </a:rPr>
-              <a:t>thành công — attacker buộc cluster tăng từ 1 lên </a:t>
-            </a:r>
-            <a:r>
-              <a:rPr lang="en-US" sz="1000" dirty="0" smtClean="0">
-                <a:latin typeface="Calibri (Body)"/>
-              </a:rPr>
-              <a:t>6</a:t>
-            </a:r>
-            <a:r>
-              <a:rPr lang="vi-VN" sz="1000" dirty="0" smtClean="0">
-                <a:latin typeface="Calibri (Body)"/>
-              </a:rPr>
-              <a:t> replicas, </a:t>
-            </a:r>
-            <a:r>
-              <a:rPr lang="vi-VN" sz="1000" dirty="0">
-                <a:latin typeface="Calibri (Body)"/>
-              </a:rPr>
-              <a:t>mỗi pod đều chạy gần 100% CPU, tạo ra chi phí vận hành gấp </a:t>
-            </a:r>
-            <a:r>
-              <a:rPr lang="en-US" sz="1000" dirty="0" smtClean="0">
-                <a:latin typeface="Calibri (Body)"/>
-              </a:rPr>
-              <a:t>6</a:t>
-            </a:r>
-            <a:r>
-              <a:rPr lang="vi-VN" sz="1000" dirty="0" smtClean="0">
-                <a:latin typeface="Calibri (Body)"/>
-              </a:rPr>
-              <a:t> </a:t>
-            </a:r>
-            <a:r>
-              <a:rPr lang="vi-VN" sz="1000" dirty="0">
-                <a:latin typeface="Calibri (Body)"/>
-              </a:rPr>
-              <a:t>lần baseline. Đây chính là hiện tượng mà bài báo mô tả.</a:t>
+              <a:t>kẻ tấn công đã đạt được mục đích khi buộc cluster phải vận hành với mức chi phí cao gấp 6 lần so với mức cơ sở (baseline) mà hoàn toàn không làm gián đoạn hay đánh sập dịch vụ</a:t>
             </a:r>
             <a:endParaRPr lang="en-US" sz="1000" dirty="0">
               <a:latin typeface="Calibri (Body)"/>
@@ -17016,8 +15871,8 @@
         </p:nvSpPr>
         <p:spPr>
           <a:xfrm>
-            <a:off x="4754880" y="804672"/>
-            <a:ext cx="4023360" cy="3950208"/>
+            <a:off x="5152444" y="804672"/>
+            <a:ext cx="3625796" cy="3950208"/>
           </a:xfrm>
           <a:prstGeom prst="rect">
             <a:avLst/>
@@ -17048,8 +15903,8 @@
         </p:nvSpPr>
         <p:spPr>
           <a:xfrm>
-            <a:off x="4663992" y="804672"/>
-            <a:ext cx="4114248" cy="3950208"/>
+            <a:off x="5152444" y="804672"/>
+            <a:ext cx="3625796" cy="3950208"/>
           </a:xfrm>
           <a:prstGeom prst="rect">
             <a:avLst/>
@@ -17101,30 +15956,6 @@
           </a:p>
         </p:txBody>
       </p:sp>
-      <p:pic>
-        <p:nvPicPr>
-          <p:cNvPr id="25" name="Picture 24"/>
-          <p:cNvPicPr>
-            <a:picLocks noChangeAspect="1"/>
-          </p:cNvPicPr>
-          <p:nvPr/>
-        </p:nvPicPr>
-        <p:blipFill>
-          <a:blip r:embed="rId3"/>
-          <a:stretch>
-            <a:fillRect/>
-          </a:stretch>
-        </p:blipFill>
-        <p:spPr>
-          <a:xfrm>
-            <a:off x="4663992" y="804672"/>
-            <a:ext cx="4107565" cy="3950208"/>
-          </a:xfrm>
-          <a:prstGeom prst="rect">
-            <a:avLst/>
-          </a:prstGeom>
-        </p:spPr>
-      </p:pic>
       <p:sp>
         <p:nvSpPr>
           <p:cNvPr id="31" name="Shape 1"/>
@@ -17150,6 +15981,30 @@
           </a:ln>
         </p:spPr>
       </p:sp>
+      <p:pic>
+        <p:nvPicPr>
+          <p:cNvPr id="3" name="Picture 2"/>
+          <p:cNvPicPr>
+            <a:picLocks noChangeAspect="1"/>
+          </p:cNvPicPr>
+          <p:nvPr/>
+        </p:nvPicPr>
+        <p:blipFill>
+          <a:blip r:embed="rId3"/>
+          <a:stretch>
+            <a:fillRect/>
+          </a:stretch>
+        </p:blipFill>
+        <p:spPr>
+          <a:xfrm>
+            <a:off x="5152444" y="804672"/>
+            <a:ext cx="3609227" cy="3963819"/>
+          </a:xfrm>
+          <a:prstGeom prst="rect">
+            <a:avLst/>
+          </a:prstGeom>
+        </p:spPr>
+      </p:pic>
     </p:spTree>
     <p:extLst>
       <p:ext uri="{BB962C8B-B14F-4D97-AF65-F5344CB8AC3E}">
@@ -18729,7 +17584,7 @@
                   <a:srgbClr val="FFFFFF"/>
                 </a:solidFill>
               </a:rPr>
-              <a:t> 2 — </a:t>
+              <a:t> 3 — </a:t>
             </a:r>
             <a:r>
               <a:rPr lang="en-US" sz="2200" b="1" dirty="0" err="1">
@@ -18737,7 +17592,7 @@
                   <a:srgbClr val="FFFFFF"/>
                 </a:solidFill>
               </a:rPr>
-              <a:t>Tấn</a:t>
+              <a:t>Phòng</a:t>
             </a:r>
             <a:r>
               <a:rPr lang="en-US" sz="2200" b="1" dirty="0">
@@ -18753,7 +17608,7 @@
                   <a:srgbClr val="FFFFFF"/>
                 </a:solidFill>
               </a:rPr>
-              <a:t>công</a:t>
+              <a:t>thủ</a:t>
             </a:r>
             <a:r>
               <a:rPr lang="en-US" sz="2200" b="1" dirty="0">
@@ -18761,23 +17616,15 @@
                   <a:srgbClr val="FFFFFF"/>
                 </a:solidFill>
               </a:rPr>
-              <a:t> </a:t>
-            </a:r>
-            <a:r>
-              <a:rPr lang="en-US" sz="2200" b="1" dirty="0" err="1">
+              <a:t>: Custom Metrics </a:t>
+            </a:r>
+            <a:r>
+              <a:rPr lang="en-US" sz="2200" b="1" dirty="0" smtClean="0">
                 <a:solidFill>
                   <a:srgbClr val="FFFFFF"/>
                 </a:solidFill>
               </a:rPr>
-              <a:t>EDoS</a:t>
-            </a:r>
-            <a:r>
-              <a:rPr lang="en-US" sz="2200" b="1" dirty="0">
-                <a:solidFill>
-                  <a:srgbClr val="FFFFFF"/>
-                </a:solidFill>
-              </a:rPr>
-              <a:t> State-Aware</a:t>
+              <a:t>Adapter</a:t>
             </a:r>
             <a:endParaRPr lang="en-US" sz="2200" dirty="0"/>
           </a:p>
@@ -18852,8 +17699,8 @@
         </p:nvSpPr>
         <p:spPr>
           <a:xfrm>
-            <a:off x="109728" y="804672"/>
-            <a:ext cx="9034272" cy="3950208"/>
+            <a:off x="274320" y="804672"/>
+            <a:ext cx="8869680" cy="3950208"/>
           </a:xfrm>
           <a:prstGeom prst="rect">
             <a:avLst/>
@@ -18878,14 +17725,102 @@
       </p:sp>
       <p:sp>
         <p:nvSpPr>
-          <p:cNvPr id="29" name="Text 27"/>
-          <p:cNvSpPr/>
-          <p:nvPr/>
-        </p:nvSpPr>
-        <p:spPr>
-          <a:xfrm>
-            <a:off x="4754880" y="4005072"/>
-            <a:ext cx="3886200" cy="228600"/>
+          <p:cNvPr id="8" name="Shape 6"/>
+          <p:cNvSpPr/>
+          <p:nvPr/>
+        </p:nvSpPr>
+        <p:spPr>
+          <a:xfrm>
+            <a:off x="274320" y="804672"/>
+            <a:ext cx="54864" cy="3950208"/>
+          </a:xfrm>
+          <a:prstGeom prst="rect">
+            <a:avLst/>
+          </a:prstGeom>
+          <a:solidFill>
+            <a:srgbClr val="2D9D5A"/>
+          </a:solidFill>
+          <a:ln w="12700">
+            <a:solidFill>
+              <a:srgbClr val="2D9D5A"/>
+            </a:solidFill>
+            <a:prstDash val="solid"/>
+          </a:ln>
+        </p:spPr>
+      </p:sp>
+      <p:sp>
+        <p:nvSpPr>
+          <p:cNvPr id="9" name="Text 7"/>
+          <p:cNvSpPr/>
+          <p:nvPr/>
+        </p:nvSpPr>
+        <p:spPr>
+          <a:xfrm>
+            <a:off x="457200" y="868680"/>
+            <a:ext cx="4754880" cy="320040"/>
+          </a:xfrm>
+          <a:prstGeom prst="rect">
+            <a:avLst/>
+          </a:prstGeom>
+          <a:noFill/>
+          <a:ln/>
+        </p:spPr>
+        <p:txBody>
+          <a:bodyPr wrap="square" lIns="0" tIns="0" rIns="0" bIns="0" rtlCol="0" anchor="ctr"/>
+          <a:lstStyle/>
+          <a:p>
+            <a:pPr marL="0" indent="0">
+              <a:buNone/>
+            </a:pPr>
+            <a:r>
+              <a:rPr lang="en-US" sz="1200" b="1" dirty="0">
+                <a:solidFill>
+                  <a:srgbClr val="0D1B2A"/>
+                </a:solidFill>
+              </a:rPr>
+              <a:t>Cơ chế Randomization HPA [4]</a:t>
+            </a:r>
+            <a:endParaRPr lang="en-US" sz="1200" dirty="0"/>
+          </a:p>
+        </p:txBody>
+      </p:sp>
+      <p:sp>
+        <p:nvSpPr>
+          <p:cNvPr id="10" name="Shape 8"/>
+          <p:cNvSpPr/>
+          <p:nvPr/>
+        </p:nvSpPr>
+        <p:spPr>
+          <a:xfrm>
+            <a:off x="457200" y="1261872"/>
+            <a:ext cx="1389888" cy="621792"/>
+          </a:xfrm>
+          <a:prstGeom prst="rect">
+            <a:avLst/>
+          </a:prstGeom>
+          <a:solidFill>
+            <a:srgbClr val="0096B7">
+              <a:alpha val="80000"/>
+            </a:srgbClr>
+          </a:solidFill>
+          <a:ln w="12700">
+            <a:solidFill>
+              <a:srgbClr val="0096B7"/>
+            </a:solidFill>
+            <a:prstDash val="solid"/>
+          </a:ln>
+        </p:spPr>
+      </p:sp>
+      <p:sp>
+        <p:nvSpPr>
+          <p:cNvPr id="11" name="Text 9"/>
+          <p:cNvSpPr/>
+          <p:nvPr/>
+        </p:nvSpPr>
+        <p:spPr>
+          <a:xfrm>
+            <a:off x="457200" y="1261872"/>
+            <a:ext cx="1389888" cy="621792"/>
           </a:xfrm>
           <a:prstGeom prst="rect">
             <a:avLst/>
@@ -18901,20 +17836,805 @@
               <a:buNone/>
             </a:pPr>
             <a:r>
-              <a:rPr lang="en-US" sz="800" dirty="0">
-                <a:solidFill>
-                  <a:srgbClr val="FFFFFF"/>
-                </a:solidFill>
-              </a:rPr>
-              <a:t>Grafana — Replicas panel (baseline phase)</a:t>
-            </a:r>
-            <a:endParaRPr lang="en-US" sz="800" dirty="0"/>
-          </a:p>
-        </p:txBody>
+              <a:rPr lang="en-US" sz="950" dirty="0">
+                <a:solidFill>
+                  <a:srgbClr val="0D1B2A"/>
+                </a:solidFill>
+              </a:rPr>
+              <a:t>Metric vượt</a:t>
+            </a:r>
+            <a:endParaRPr lang="en-US" sz="950" dirty="0"/>
+          </a:p>
+          <a:p>
+            <a:pPr marL="0" indent="0" algn="ctr">
+              <a:buNone/>
+            </a:pPr>
+            <a:r>
+              <a:rPr lang="en-US" sz="950" dirty="0">
+                <a:solidFill>
+                  <a:srgbClr val="0D1B2A"/>
+                </a:solidFill>
+              </a:rPr>
+              <a:t>ngưỡng HPA</a:t>
+            </a:r>
+            <a:endParaRPr lang="en-US" sz="950" dirty="0"/>
+          </a:p>
+        </p:txBody>
+      </p:sp>
+      <p:sp>
+        <p:nvSpPr>
+          <p:cNvPr id="12" name="Shape 10"/>
+          <p:cNvSpPr/>
+          <p:nvPr/>
+        </p:nvSpPr>
+        <p:spPr>
+          <a:xfrm>
+            <a:off x="1874520" y="1572768"/>
+            <a:ext cx="411480" cy="0"/>
+          </a:xfrm>
+          <a:prstGeom prst="line">
+            <a:avLst/>
+          </a:prstGeom>
+          <a:noFill/>
+          <a:ln w="19050">
+            <a:solidFill>
+              <a:srgbClr val="64748B"/>
+            </a:solidFill>
+            <a:prstDash val="solid"/>
+          </a:ln>
+        </p:spPr>
+      </p:sp>
+      <p:sp>
+        <p:nvSpPr>
+          <p:cNvPr id="13" name="Shape 11"/>
+          <p:cNvSpPr/>
+          <p:nvPr/>
+        </p:nvSpPr>
+        <p:spPr>
+          <a:xfrm>
+            <a:off x="2331720" y="1261872"/>
+            <a:ext cx="777240" cy="621792"/>
+          </a:xfrm>
+          <a:prstGeom prst="ellipse">
+            <a:avLst/>
+          </a:prstGeom>
+          <a:solidFill>
+            <a:srgbClr val="F47B20">
+              <a:alpha val="80000"/>
+            </a:srgbClr>
+          </a:solidFill>
+          <a:ln w="12700">
+            <a:solidFill>
+              <a:srgbClr val="F47B20"/>
+            </a:solidFill>
+            <a:prstDash val="solid"/>
+          </a:ln>
+        </p:spPr>
+      </p:sp>
+      <p:sp>
+        <p:nvSpPr>
+          <p:cNvPr id="14" name="Text 12"/>
+          <p:cNvSpPr/>
+          <p:nvPr/>
+        </p:nvSpPr>
+        <p:spPr>
+          <a:xfrm>
+            <a:off x="2331720" y="1261872"/>
+            <a:ext cx="777240" cy="621792"/>
+          </a:xfrm>
+          <a:prstGeom prst="rect">
+            <a:avLst/>
+          </a:prstGeom>
+          <a:noFill/>
+          <a:ln/>
+        </p:spPr>
+        <p:txBody>
+          <a:bodyPr wrap="square" lIns="0" tIns="0" rIns="0" bIns="0" rtlCol="0" anchor="ctr"/>
+          <a:lstStyle/>
+          <a:p>
+            <a:pPr marL="0" indent="0" algn="ctr">
+              <a:buNone/>
+            </a:pPr>
+            <a:r>
+              <a:rPr lang="en-US" sz="900" dirty="0">
+                <a:solidFill>
+                  <a:srgbClr val="0D1B2A"/>
+                </a:solidFill>
+              </a:rPr>
+              <a:t>RNG</a:t>
+            </a:r>
+            <a:endParaRPr lang="en-US" sz="900" dirty="0"/>
+          </a:p>
+          <a:p>
+            <a:pPr marL="0" indent="0" algn="ctr">
+              <a:buNone/>
+            </a:pPr>
+            <a:r>
+              <a:rPr lang="en-US" sz="900" dirty="0">
+                <a:solidFill>
+                  <a:srgbClr val="0D1B2A"/>
+                </a:solidFill>
+              </a:rPr>
+              <a:t>50/50</a:t>
+            </a:r>
+            <a:endParaRPr lang="en-US" sz="900" dirty="0"/>
+          </a:p>
+        </p:txBody>
+      </p:sp>
+      <p:sp>
+        <p:nvSpPr>
+          <p:cNvPr id="15" name="Shape 13"/>
+          <p:cNvSpPr/>
+          <p:nvPr/>
+        </p:nvSpPr>
+        <p:spPr>
+          <a:xfrm>
+            <a:off x="3108960" y="1572768"/>
+            <a:ext cx="182880" cy="0"/>
+          </a:xfrm>
+          <a:prstGeom prst="line">
+            <a:avLst/>
+          </a:prstGeom>
+          <a:noFill/>
+          <a:ln w="19050">
+            <a:solidFill>
+              <a:srgbClr val="2D9D5A"/>
+            </a:solidFill>
+            <a:prstDash val="solid"/>
+          </a:ln>
+        </p:spPr>
+      </p:sp>
+      <p:sp>
+        <p:nvSpPr>
+          <p:cNvPr id="16" name="Shape 14"/>
+          <p:cNvSpPr/>
+          <p:nvPr/>
+        </p:nvSpPr>
+        <p:spPr>
+          <a:xfrm>
+            <a:off x="3337560" y="1261872"/>
+            <a:ext cx="1371600" cy="621792"/>
+          </a:xfrm>
+          <a:prstGeom prst="rect">
+            <a:avLst/>
+          </a:prstGeom>
+          <a:solidFill>
+            <a:srgbClr val="2D9D5A">
+              <a:alpha val="80000"/>
+            </a:srgbClr>
+          </a:solidFill>
+          <a:ln w="12700">
+            <a:solidFill>
+              <a:srgbClr val="2D9D5A"/>
+            </a:solidFill>
+            <a:prstDash val="solid"/>
+          </a:ln>
+        </p:spPr>
+      </p:sp>
+      <p:sp>
+        <p:nvSpPr>
+          <p:cNvPr id="17" name="Text 15"/>
+          <p:cNvSpPr/>
+          <p:nvPr/>
+        </p:nvSpPr>
+        <p:spPr>
+          <a:xfrm>
+            <a:off x="3337560" y="1261872"/>
+            <a:ext cx="1371600" cy="621792"/>
+          </a:xfrm>
+          <a:prstGeom prst="rect">
+            <a:avLst/>
+          </a:prstGeom>
+          <a:noFill/>
+          <a:ln/>
+        </p:spPr>
+        <p:txBody>
+          <a:bodyPr wrap="square" lIns="0" tIns="0" rIns="0" bIns="0" rtlCol="0" anchor="ctr"/>
+          <a:lstStyle/>
+          <a:p>
+            <a:pPr marL="0" indent="0" algn="ctr">
+              <a:buNone/>
+            </a:pPr>
+            <a:r>
+              <a:rPr lang="en-US" sz="950" dirty="0">
+                <a:solidFill>
+                  <a:srgbClr val="0D1B2A"/>
+                </a:solidFill>
+              </a:rPr>
+              <a:t>Scale Up</a:t>
+            </a:r>
+            <a:endParaRPr lang="en-US" sz="950" dirty="0"/>
+          </a:p>
+          <a:p>
+            <a:pPr marL="0" indent="0" algn="ctr">
+              <a:buNone/>
+            </a:pPr>
+            <a:r>
+              <a:rPr lang="en-US" sz="950" dirty="0">
+                <a:solidFill>
+                  <a:srgbClr val="0D1B2A"/>
+                </a:solidFill>
+              </a:rPr>
+              <a:t>bình thường</a:t>
+            </a:r>
+            <a:endParaRPr lang="en-US" sz="950" dirty="0"/>
+          </a:p>
+        </p:txBody>
+      </p:sp>
+      <p:sp>
+        <p:nvSpPr>
+          <p:cNvPr id="18" name="Shape 16"/>
+          <p:cNvSpPr/>
+          <p:nvPr/>
+        </p:nvSpPr>
+        <p:spPr>
+          <a:xfrm>
+            <a:off x="2724912" y="1883664"/>
+            <a:ext cx="0" cy="365760"/>
+          </a:xfrm>
+          <a:prstGeom prst="line">
+            <a:avLst/>
+          </a:prstGeom>
+          <a:noFill/>
+          <a:ln w="19050">
+            <a:solidFill>
+              <a:srgbClr val="D62828"/>
+            </a:solidFill>
+            <a:prstDash val="solid"/>
+          </a:ln>
+        </p:spPr>
+      </p:sp>
+      <p:sp>
+        <p:nvSpPr>
+          <p:cNvPr id="19" name="Shape 17"/>
+          <p:cNvSpPr/>
+          <p:nvPr/>
+        </p:nvSpPr>
+        <p:spPr>
+          <a:xfrm>
+            <a:off x="2331720" y="2286000"/>
+            <a:ext cx="777240" cy="621792"/>
+          </a:xfrm>
+          <a:prstGeom prst="rect">
+            <a:avLst/>
+          </a:prstGeom>
+          <a:solidFill>
+            <a:srgbClr val="D62828">
+              <a:alpha val="80000"/>
+            </a:srgbClr>
+          </a:solidFill>
+          <a:ln w="12700">
+            <a:solidFill>
+              <a:srgbClr val="D62828"/>
+            </a:solidFill>
+            <a:prstDash val="solid"/>
+          </a:ln>
+        </p:spPr>
+      </p:sp>
+      <p:sp>
+        <p:nvSpPr>
+          <p:cNvPr id="20" name="Text 18"/>
+          <p:cNvSpPr/>
+          <p:nvPr/>
+        </p:nvSpPr>
+        <p:spPr>
+          <a:xfrm>
+            <a:off x="2331720" y="2286000"/>
+            <a:ext cx="777240" cy="621792"/>
+          </a:xfrm>
+          <a:prstGeom prst="rect">
+            <a:avLst/>
+          </a:prstGeom>
+          <a:noFill/>
+          <a:ln/>
+        </p:spPr>
+        <p:txBody>
+          <a:bodyPr wrap="square" lIns="0" tIns="0" rIns="0" bIns="0" rtlCol="0" anchor="ctr"/>
+          <a:lstStyle/>
+          <a:p>
+            <a:pPr marL="0" indent="0" algn="ctr">
+              <a:buNone/>
+            </a:pPr>
+            <a:r>
+              <a:rPr lang="en-US" sz="950" dirty="0">
+                <a:solidFill>
+                  <a:srgbClr val="0D1B2A"/>
+                </a:solidFill>
+              </a:rPr>
+              <a:t>Bỏ qua</a:t>
+            </a:r>
+            <a:endParaRPr lang="en-US" sz="950" dirty="0"/>
+          </a:p>
+          <a:p>
+            <a:pPr marL="0" indent="0" algn="ctr">
+              <a:buNone/>
+            </a:pPr>
+            <a:r>
+              <a:rPr lang="en-US" sz="950" dirty="0">
+                <a:solidFill>
+                  <a:srgbClr val="0D1B2A"/>
+                </a:solidFill>
+              </a:rPr>
+              <a:t>chu kỳ này</a:t>
+            </a:r>
+            <a:endParaRPr lang="en-US" sz="950" dirty="0"/>
+          </a:p>
+        </p:txBody>
+      </p:sp>
+      <p:sp>
+        <p:nvSpPr>
+          <p:cNvPr id="21" name="Text 19"/>
+          <p:cNvSpPr/>
+          <p:nvPr/>
+        </p:nvSpPr>
+        <p:spPr>
+          <a:xfrm>
+            <a:off x="457200" y="2999232"/>
+            <a:ext cx="4251960" cy="1038857"/>
+          </a:xfrm>
+          <a:prstGeom prst="rect">
+            <a:avLst/>
+          </a:prstGeom>
+          <a:noFill/>
+          <a:ln/>
+        </p:spPr>
+        <p:txBody>
+          <a:bodyPr wrap="square" lIns="0" tIns="0" rIns="0" bIns="0" rtlCol="0" anchor="ctr"/>
+          <a:lstStyle/>
+          <a:p>
+            <a:pPr marL="0" indent="0">
+              <a:buNone/>
+            </a:pPr>
+            <a:r>
+              <a:rPr lang="en-US" sz="1100" dirty="0">
+                <a:solidFill>
+                  <a:srgbClr val="0D1B2A"/>
+                </a:solidFill>
+              </a:rPr>
+              <a:t>• Sử dụng custom scaling metrics của HPA</a:t>
+            </a:r>
+            <a:endParaRPr lang="en-US" sz="1100" dirty="0"/>
+          </a:p>
+          <a:p>
+            <a:pPr marL="0" indent="0">
+              <a:buNone/>
+            </a:pPr>
+            <a:r>
+              <a:rPr lang="en-US" sz="1100" dirty="0">
+                <a:solidFill>
+                  <a:srgbClr val="0D1B2A"/>
+                </a:solidFill>
+              </a:rPr>
+              <a:t>• RNG được cân </a:t>
+            </a:r>
+            <a:r>
+              <a:rPr lang="en-US" sz="1100" dirty="0" err="1">
+                <a:solidFill>
+                  <a:srgbClr val="0D1B2A"/>
+                </a:solidFill>
+              </a:rPr>
+              <a:t>bằng</a:t>
+            </a:r>
+            <a:r>
+              <a:rPr lang="en-US" sz="1100" dirty="0">
+                <a:solidFill>
+                  <a:srgbClr val="0D1B2A"/>
+                </a:solidFill>
+              </a:rPr>
+              <a:t> </a:t>
+            </a:r>
+            <a:r>
+              <a:rPr lang="en-US" sz="1100" dirty="0" smtClean="0">
+                <a:solidFill>
+                  <a:srgbClr val="0D1B2A"/>
+                </a:solidFill>
+              </a:rPr>
+              <a:t>50/50 (</a:t>
+            </a:r>
+            <a:r>
+              <a:rPr lang="en-US" sz="1100" dirty="0" err="1" smtClean="0">
+                <a:solidFill>
+                  <a:srgbClr val="0D1B2A"/>
+                </a:solidFill>
+              </a:rPr>
+              <a:t>có</a:t>
+            </a:r>
+            <a:r>
+              <a:rPr lang="en-US" sz="1100" dirty="0" smtClean="0">
+                <a:solidFill>
+                  <a:srgbClr val="0D1B2A"/>
+                </a:solidFill>
+              </a:rPr>
+              <a:t> </a:t>
+            </a:r>
+            <a:r>
+              <a:rPr lang="en-US" sz="1100" dirty="0" err="1" smtClean="0">
+                <a:solidFill>
+                  <a:srgbClr val="0D1B2A"/>
+                </a:solidFill>
+              </a:rPr>
+              <a:t>thể</a:t>
+            </a:r>
+            <a:r>
+              <a:rPr lang="en-US" sz="1100" dirty="0" smtClean="0">
+                <a:solidFill>
+                  <a:srgbClr val="0D1B2A"/>
+                </a:solidFill>
+              </a:rPr>
+              <a:t> </a:t>
+            </a:r>
+            <a:r>
+              <a:rPr lang="en-US" sz="1100" dirty="0" err="1" smtClean="0">
+                <a:solidFill>
+                  <a:srgbClr val="0D1B2A"/>
+                </a:solidFill>
+              </a:rPr>
+              <a:t>điều</a:t>
+            </a:r>
+            <a:r>
+              <a:rPr lang="en-US" sz="1100" dirty="0" smtClean="0">
+                <a:solidFill>
+                  <a:srgbClr val="0D1B2A"/>
+                </a:solidFill>
+              </a:rPr>
+              <a:t> </a:t>
+            </a:r>
+            <a:r>
+              <a:rPr lang="en-US" sz="1100" dirty="0" err="1" smtClean="0">
+                <a:solidFill>
+                  <a:srgbClr val="0D1B2A"/>
+                </a:solidFill>
+              </a:rPr>
+              <a:t>chỉnh</a:t>
+            </a:r>
+            <a:r>
+              <a:rPr lang="en-US" sz="1100" dirty="0" smtClean="0">
+                <a:solidFill>
+                  <a:srgbClr val="0D1B2A"/>
+                </a:solidFill>
+              </a:rPr>
+              <a:t> </a:t>
+            </a:r>
+            <a:r>
+              <a:rPr lang="en-US" sz="1100" dirty="0" err="1" smtClean="0">
+                <a:solidFill>
+                  <a:srgbClr val="0D1B2A"/>
+                </a:solidFill>
+              </a:rPr>
+              <a:t>tùy</a:t>
+            </a:r>
+            <a:r>
+              <a:rPr lang="en-US" sz="1100" dirty="0" smtClean="0">
+                <a:solidFill>
+                  <a:srgbClr val="0D1B2A"/>
+                </a:solidFill>
+              </a:rPr>
+              <a:t> </a:t>
+            </a:r>
+            <a:r>
+              <a:rPr lang="en-US" sz="1100" dirty="0" err="1" smtClean="0">
+                <a:solidFill>
+                  <a:srgbClr val="0D1B2A"/>
+                </a:solidFill>
+              </a:rPr>
+              <a:t>vào</a:t>
+            </a:r>
+            <a:r>
+              <a:rPr lang="en-US" sz="1100" dirty="0" smtClean="0">
+                <a:solidFill>
+                  <a:srgbClr val="0D1B2A"/>
+                </a:solidFill>
+              </a:rPr>
+              <a:t> </a:t>
+            </a:r>
+            <a:r>
+              <a:rPr lang="en-US" sz="1100" dirty="0" err="1" smtClean="0">
+                <a:solidFill>
+                  <a:srgbClr val="0D1B2A"/>
+                </a:solidFill>
+              </a:rPr>
+              <a:t>mục</a:t>
+            </a:r>
+            <a:r>
+              <a:rPr lang="en-US" sz="1100" dirty="0" smtClean="0">
+                <a:solidFill>
+                  <a:srgbClr val="0D1B2A"/>
+                </a:solidFill>
+              </a:rPr>
+              <a:t> </a:t>
+            </a:r>
+            <a:r>
+              <a:rPr lang="en-US" sz="1100" dirty="0" err="1" smtClean="0">
+                <a:solidFill>
+                  <a:srgbClr val="0D1B2A"/>
+                </a:solidFill>
+              </a:rPr>
+              <a:t>đích</a:t>
+            </a:r>
+            <a:r>
+              <a:rPr lang="en-US" sz="1100" dirty="0" smtClean="0">
+                <a:solidFill>
+                  <a:srgbClr val="0D1B2A"/>
+                </a:solidFill>
+              </a:rPr>
+              <a:t> </a:t>
+            </a:r>
+            <a:r>
+              <a:rPr lang="en-US" sz="1100" dirty="0" err="1" smtClean="0">
+                <a:solidFill>
+                  <a:srgbClr val="0D1B2A"/>
+                </a:solidFill>
+              </a:rPr>
+              <a:t>tăng</a:t>
+            </a:r>
+            <a:r>
+              <a:rPr lang="en-US" sz="1100" dirty="0" smtClean="0">
+                <a:solidFill>
+                  <a:srgbClr val="0D1B2A"/>
+                </a:solidFill>
+              </a:rPr>
+              <a:t> </a:t>
+            </a:r>
+            <a:r>
+              <a:rPr lang="en-US" sz="1100" dirty="0" err="1" smtClean="0">
+                <a:solidFill>
+                  <a:srgbClr val="0D1B2A"/>
+                </a:solidFill>
+              </a:rPr>
+              <a:t>khả</a:t>
+            </a:r>
+            <a:r>
+              <a:rPr lang="en-US" sz="1100" dirty="0" smtClean="0">
+                <a:solidFill>
+                  <a:srgbClr val="0D1B2A"/>
+                </a:solidFill>
+              </a:rPr>
+              <a:t> </a:t>
+            </a:r>
+            <a:r>
+              <a:rPr lang="en-US" sz="1100" dirty="0" err="1" smtClean="0">
+                <a:solidFill>
+                  <a:srgbClr val="0D1B2A"/>
+                </a:solidFill>
+              </a:rPr>
+              <a:t>năng</a:t>
+            </a:r>
+            <a:r>
+              <a:rPr lang="en-US" sz="1100" dirty="0" smtClean="0">
+                <a:solidFill>
+                  <a:srgbClr val="0D1B2A"/>
+                </a:solidFill>
+              </a:rPr>
+              <a:t> </a:t>
+            </a:r>
+            <a:r>
+              <a:rPr lang="en-US" sz="1100" dirty="0" err="1" smtClean="0">
+                <a:solidFill>
+                  <a:srgbClr val="0D1B2A"/>
+                </a:solidFill>
+              </a:rPr>
+              <a:t>phòng</a:t>
+            </a:r>
+            <a:r>
+              <a:rPr lang="en-US" sz="1100" dirty="0">
+                <a:solidFill>
+                  <a:srgbClr val="0D1B2A"/>
+                </a:solidFill>
+              </a:rPr>
+              <a:t> </a:t>
+            </a:r>
+            <a:r>
+              <a:rPr lang="en-US" sz="1100" dirty="0" err="1" smtClean="0">
+                <a:solidFill>
+                  <a:srgbClr val="0D1B2A"/>
+                </a:solidFill>
+              </a:rPr>
+              <a:t>thủ</a:t>
+            </a:r>
+            <a:r>
+              <a:rPr lang="en-US" sz="1100" dirty="0" smtClean="0">
+                <a:solidFill>
+                  <a:srgbClr val="0D1B2A"/>
+                </a:solidFill>
+              </a:rPr>
+              <a:t> hay </a:t>
+            </a:r>
+            <a:r>
+              <a:rPr lang="en-US" sz="1100" dirty="0" err="1" smtClean="0">
+                <a:solidFill>
+                  <a:srgbClr val="0D1B2A"/>
+                </a:solidFill>
+              </a:rPr>
+              <a:t>tăng</a:t>
+            </a:r>
+            <a:r>
+              <a:rPr lang="en-US" sz="1100" dirty="0" smtClean="0">
+                <a:solidFill>
+                  <a:srgbClr val="0D1B2A"/>
+                </a:solidFill>
+              </a:rPr>
+              <a:t> </a:t>
+            </a:r>
+            <a:r>
+              <a:rPr lang="en-US" sz="1100" dirty="0" err="1" smtClean="0">
+                <a:solidFill>
+                  <a:srgbClr val="0D1B2A"/>
+                </a:solidFill>
+              </a:rPr>
+              <a:t>trải</a:t>
+            </a:r>
+            <a:r>
+              <a:rPr lang="en-US" sz="1100" dirty="0" smtClean="0">
+                <a:solidFill>
+                  <a:srgbClr val="0D1B2A"/>
+                </a:solidFill>
+              </a:rPr>
+              <a:t> </a:t>
+            </a:r>
+            <a:r>
+              <a:rPr lang="en-US" sz="1100" dirty="0" err="1" smtClean="0">
+                <a:solidFill>
+                  <a:srgbClr val="0D1B2A"/>
+                </a:solidFill>
+              </a:rPr>
+              <a:t>nghiệm</a:t>
+            </a:r>
+            <a:r>
+              <a:rPr lang="en-US" sz="1100" dirty="0" smtClean="0">
+                <a:solidFill>
+                  <a:srgbClr val="0D1B2A"/>
+                </a:solidFill>
+              </a:rPr>
+              <a:t> </a:t>
+            </a:r>
+            <a:r>
+              <a:rPr lang="en-US" sz="1100" dirty="0" err="1" smtClean="0">
+                <a:solidFill>
+                  <a:srgbClr val="0D1B2A"/>
+                </a:solidFill>
+              </a:rPr>
+              <a:t>người</a:t>
+            </a:r>
+            <a:r>
+              <a:rPr lang="en-US" sz="1100" dirty="0" smtClean="0">
+                <a:solidFill>
+                  <a:srgbClr val="0D1B2A"/>
+                </a:solidFill>
+              </a:rPr>
+              <a:t> </a:t>
+            </a:r>
+            <a:r>
+              <a:rPr lang="en-US" sz="1100" dirty="0" err="1" smtClean="0">
+                <a:solidFill>
+                  <a:srgbClr val="0D1B2A"/>
+                </a:solidFill>
+              </a:rPr>
+              <a:t>dùng</a:t>
+            </a:r>
+            <a:r>
+              <a:rPr lang="en-US" sz="1100" dirty="0" smtClean="0">
+                <a:solidFill>
+                  <a:srgbClr val="0D1B2A"/>
+                </a:solidFill>
+              </a:rPr>
+              <a:t> )</a:t>
+            </a:r>
+            <a:endParaRPr lang="en-US" sz="1100" dirty="0"/>
+          </a:p>
+          <a:p>
+            <a:pPr marL="0" indent="0">
+              <a:buNone/>
+            </a:pPr>
+            <a:r>
+              <a:rPr lang="en-US" sz="1100" dirty="0">
+                <a:solidFill>
+                  <a:srgbClr val="0D1B2A"/>
+                </a:solidFill>
+              </a:rPr>
+              <a:t>• </a:t>
+            </a:r>
+            <a:r>
+              <a:rPr lang="en-US" sz="1100" dirty="0" err="1">
+                <a:solidFill>
+                  <a:srgbClr val="0D1B2A"/>
+                </a:solidFill>
+              </a:rPr>
+              <a:t>Kẻ</a:t>
+            </a:r>
+            <a:r>
+              <a:rPr lang="en-US" sz="1100" dirty="0">
+                <a:solidFill>
+                  <a:srgbClr val="0D1B2A"/>
+                </a:solidFill>
+              </a:rPr>
+              <a:t> </a:t>
+            </a:r>
+            <a:r>
+              <a:rPr lang="en-US" sz="1100" dirty="0" err="1" smtClean="0">
+                <a:solidFill>
+                  <a:srgbClr val="0D1B2A"/>
+                </a:solidFill>
+              </a:rPr>
+              <a:t>tấn</a:t>
+            </a:r>
+            <a:r>
+              <a:rPr lang="en-US" sz="1100" dirty="0" smtClean="0">
+                <a:solidFill>
+                  <a:srgbClr val="0D1B2A"/>
+                </a:solidFill>
+              </a:rPr>
+              <a:t> </a:t>
+            </a:r>
+            <a:r>
+              <a:rPr lang="en-US" sz="1100" dirty="0" err="1" smtClean="0">
+                <a:solidFill>
+                  <a:srgbClr val="0D1B2A"/>
+                </a:solidFill>
+              </a:rPr>
+              <a:t>công</a:t>
+            </a:r>
+            <a:r>
+              <a:rPr lang="en-US" sz="1100" dirty="0" smtClean="0">
+                <a:solidFill>
+                  <a:srgbClr val="0D1B2A"/>
+                </a:solidFill>
+              </a:rPr>
+              <a:t> </a:t>
+            </a:r>
+            <a:r>
+              <a:rPr lang="en-US" sz="1100" dirty="0">
+                <a:solidFill>
+                  <a:srgbClr val="0D1B2A"/>
+                </a:solidFill>
+              </a:rPr>
+              <a:t>không dự đoán được quyết định scale</a:t>
+            </a:r>
+            <a:endParaRPr lang="en-US" sz="1100" dirty="0"/>
+          </a:p>
+          <a:p>
+            <a:pPr marL="0" indent="0">
+              <a:buNone/>
+            </a:pPr>
+            <a:r>
+              <a:rPr lang="en-US" sz="1100" dirty="0">
+                <a:solidFill>
+                  <a:srgbClr val="0D1B2A"/>
+                </a:solidFill>
+              </a:rPr>
+              <a:t>• Triển khai không cần sửa đổi Kubernetes core</a:t>
+            </a:r>
+            <a:endParaRPr lang="en-US" sz="1100" dirty="0"/>
+          </a:p>
+        </p:txBody>
+      </p:sp>
+      <p:sp>
+        <p:nvSpPr>
+          <p:cNvPr id="39" name="Shape 1"/>
+          <p:cNvSpPr/>
+          <p:nvPr/>
+        </p:nvSpPr>
+        <p:spPr>
+          <a:xfrm>
+            <a:off x="0" y="0"/>
+            <a:ext cx="109728" cy="658368"/>
+          </a:xfrm>
+          <a:prstGeom prst="rect">
+            <a:avLst/>
+          </a:prstGeom>
+          <a:solidFill>
+            <a:srgbClr val="2D9D5A"/>
+          </a:solidFill>
+          <a:ln w="12700">
+            <a:solidFill>
+              <a:srgbClr val="2D9D5A"/>
+            </a:solidFill>
+            <a:prstDash val="solid"/>
+          </a:ln>
+        </p:spPr>
       </p:sp>
       <p:pic>
         <p:nvPicPr>
-          <p:cNvPr id="26" name="Picture 25"/>
+          <p:cNvPr id="40" name="Picture 39"/>
           <p:cNvPicPr>
             <a:picLocks noChangeAspect="1"/>
           </p:cNvPicPr>
@@ -18928,8 +18648,8 @@
         </p:blipFill>
         <p:spPr>
           <a:xfrm>
-            <a:off x="1157820" y="1252728"/>
-            <a:ext cx="6279720" cy="3321164"/>
+            <a:off x="5212080" y="868680"/>
+            <a:ext cx="3860482" cy="1850543"/>
           </a:xfrm>
           <a:prstGeom prst="rect">
             <a:avLst/>
@@ -18938,285 +18658,131 @@
       </p:pic>
       <p:sp>
         <p:nvSpPr>
-          <p:cNvPr id="28" name="Shape 1"/>
-          <p:cNvSpPr/>
-          <p:nvPr/>
-        </p:nvSpPr>
-        <p:spPr>
-          <a:xfrm>
-            <a:off x="0" y="0"/>
-            <a:ext cx="109728" cy="658368"/>
-          </a:xfrm>
-          <a:prstGeom prst="rect">
-            <a:avLst/>
-          </a:prstGeom>
-          <a:solidFill>
-            <a:srgbClr val="D62828"/>
-          </a:solidFill>
-          <a:ln w="12700">
-            <a:solidFill>
-              <a:srgbClr val="D62828"/>
-            </a:solidFill>
-            <a:prstDash val="solid"/>
-          </a:ln>
-        </p:spPr>
-      </p:sp>
-      <p:sp>
-        <p:nvSpPr>
-          <p:cNvPr id="30" name="Text 7"/>
-          <p:cNvSpPr/>
-          <p:nvPr/>
-        </p:nvSpPr>
-        <p:spPr>
-          <a:xfrm>
-            <a:off x="457200" y="868680"/>
-            <a:ext cx="4599616" cy="320040"/>
-          </a:xfrm>
-          <a:prstGeom prst="rect">
-            <a:avLst/>
-          </a:prstGeom>
-          <a:noFill/>
-          <a:ln/>
-        </p:spPr>
-        <p:txBody>
-          <a:bodyPr wrap="square" lIns="0" tIns="0" rIns="0" bIns="0" rtlCol="0" anchor="ctr"/>
-          <a:lstStyle/>
-          <a:p>
-            <a:pPr marL="0" indent="0">
-              <a:buNone/>
-            </a:pPr>
-            <a:r>
-              <a:rPr lang="en-US" sz="1200" dirty="0" err="1" smtClean="0">
-                <a:solidFill>
-                  <a:srgbClr val="0D1B2A"/>
-                </a:solidFill>
-              </a:rPr>
-              <a:t>Sau</a:t>
-            </a:r>
-            <a:r>
-              <a:rPr lang="en-US" sz="1200" dirty="0" smtClean="0">
-                <a:solidFill>
-                  <a:srgbClr val="0D1B2A"/>
-                </a:solidFill>
-              </a:rPr>
-              <a:t> </a:t>
-            </a:r>
-            <a:r>
-              <a:rPr lang="en-US" sz="1200" dirty="0" err="1" smtClean="0">
-                <a:solidFill>
-                  <a:srgbClr val="0D1B2A"/>
-                </a:solidFill>
-              </a:rPr>
-              <a:t>khi</a:t>
-            </a:r>
-            <a:r>
-              <a:rPr lang="en-US" sz="1200" dirty="0" smtClean="0">
-                <a:solidFill>
-                  <a:srgbClr val="0D1B2A"/>
-                </a:solidFill>
-              </a:rPr>
-              <a:t> </a:t>
-            </a:r>
-            <a:r>
-              <a:rPr lang="en-US" sz="1200" dirty="0" err="1" smtClean="0">
-                <a:solidFill>
-                  <a:srgbClr val="0D1B2A"/>
-                </a:solidFill>
-              </a:rPr>
-              <a:t>ngừng</a:t>
-            </a:r>
-            <a:r>
-              <a:rPr lang="en-US" sz="1200" dirty="0" smtClean="0">
-                <a:solidFill>
-                  <a:srgbClr val="0D1B2A"/>
-                </a:solidFill>
-              </a:rPr>
-              <a:t> </a:t>
-            </a:r>
-            <a:r>
-              <a:rPr lang="en-US" sz="1200" dirty="0" err="1" smtClean="0">
-                <a:solidFill>
-                  <a:srgbClr val="0D1B2A"/>
-                </a:solidFill>
-              </a:rPr>
-              <a:t>tấn</a:t>
-            </a:r>
-            <a:r>
-              <a:rPr lang="en-US" sz="1200" dirty="0" smtClean="0">
-                <a:solidFill>
-                  <a:srgbClr val="0D1B2A"/>
-                </a:solidFill>
-              </a:rPr>
-              <a:t> </a:t>
-            </a:r>
-            <a:r>
-              <a:rPr lang="en-US" sz="1200" dirty="0" err="1" smtClean="0">
-                <a:solidFill>
-                  <a:srgbClr val="0D1B2A"/>
-                </a:solidFill>
-              </a:rPr>
-              <a:t>công</a:t>
-            </a:r>
-            <a:r>
-              <a:rPr lang="en-US" sz="1200" dirty="0" smtClean="0">
-                <a:solidFill>
-                  <a:srgbClr val="0D1B2A"/>
-                </a:solidFill>
-              </a:rPr>
-              <a:t>, </a:t>
-            </a:r>
-            <a:r>
-              <a:rPr lang="en-US" sz="1200" dirty="0" err="1" smtClean="0">
-                <a:solidFill>
-                  <a:srgbClr val="0D1B2A"/>
-                </a:solidFill>
-              </a:rPr>
-              <a:t>hệ</a:t>
-            </a:r>
-            <a:r>
-              <a:rPr lang="en-US" sz="1200" dirty="0" smtClean="0">
-                <a:solidFill>
-                  <a:srgbClr val="0D1B2A"/>
-                </a:solidFill>
-              </a:rPr>
-              <a:t> </a:t>
-            </a:r>
-            <a:r>
-              <a:rPr lang="en-US" sz="1200" dirty="0" err="1" smtClean="0">
-                <a:solidFill>
-                  <a:srgbClr val="0D1B2A"/>
-                </a:solidFill>
-              </a:rPr>
-              <a:t>thống</a:t>
-            </a:r>
-            <a:r>
-              <a:rPr lang="en-US" sz="1200" dirty="0" smtClean="0">
-                <a:solidFill>
-                  <a:srgbClr val="0D1B2A"/>
-                </a:solidFill>
-              </a:rPr>
-              <a:t> </a:t>
-            </a:r>
-            <a:r>
-              <a:rPr lang="en-US" sz="1200" dirty="0" err="1" smtClean="0">
-                <a:solidFill>
-                  <a:srgbClr val="0D1B2A"/>
-                </a:solidFill>
-              </a:rPr>
-              <a:t>dần</a:t>
-            </a:r>
-            <a:r>
-              <a:rPr lang="en-US" sz="1200" dirty="0" smtClean="0">
-                <a:solidFill>
-                  <a:srgbClr val="0D1B2A"/>
-                </a:solidFill>
-              </a:rPr>
-              <a:t> </a:t>
-            </a:r>
-            <a:r>
-              <a:rPr lang="en-US" sz="1200" dirty="0" err="1" smtClean="0">
-                <a:solidFill>
-                  <a:srgbClr val="0D1B2A"/>
-                </a:solidFill>
-              </a:rPr>
-              <a:t>khôi</a:t>
-            </a:r>
-            <a:r>
-              <a:rPr lang="en-US" sz="1200" dirty="0" smtClean="0">
-                <a:solidFill>
-                  <a:srgbClr val="0D1B2A"/>
-                </a:solidFill>
-              </a:rPr>
-              <a:t> </a:t>
-            </a:r>
-            <a:r>
-              <a:rPr lang="en-US" sz="1200" dirty="0" err="1" smtClean="0">
-                <a:solidFill>
-                  <a:srgbClr val="0D1B2A"/>
-                </a:solidFill>
-              </a:rPr>
-              <a:t>phục</a:t>
-            </a:r>
-            <a:r>
-              <a:rPr lang="en-US" sz="1200" dirty="0" smtClean="0">
-                <a:solidFill>
-                  <a:srgbClr val="0D1B2A"/>
-                </a:solidFill>
-              </a:rPr>
-              <a:t> </a:t>
-            </a:r>
-            <a:r>
-              <a:rPr lang="en-US" sz="1200" dirty="0" err="1" smtClean="0">
-                <a:solidFill>
-                  <a:srgbClr val="0D1B2A"/>
-                </a:solidFill>
-              </a:rPr>
-              <a:t>về</a:t>
-            </a:r>
-            <a:r>
-              <a:rPr lang="en-US" sz="1200" dirty="0" smtClean="0">
-                <a:solidFill>
-                  <a:srgbClr val="0D1B2A"/>
-                </a:solidFill>
-              </a:rPr>
-              <a:t> </a:t>
-            </a:r>
-            <a:r>
-              <a:rPr lang="en-US" sz="1200" dirty="0" err="1" smtClean="0">
-                <a:solidFill>
-                  <a:srgbClr val="0D1B2A"/>
-                </a:solidFill>
-              </a:rPr>
-              <a:t>mức</a:t>
-            </a:r>
-            <a:r>
-              <a:rPr lang="en-US" sz="1200" dirty="0" smtClean="0">
-                <a:solidFill>
-                  <a:srgbClr val="0D1B2A"/>
-                </a:solidFill>
-              </a:rPr>
-              <a:t> </a:t>
-            </a:r>
-            <a:r>
-              <a:rPr lang="en-US" sz="1200" dirty="0" err="1" smtClean="0">
-                <a:solidFill>
-                  <a:srgbClr val="0D1B2A"/>
-                </a:solidFill>
-              </a:rPr>
-              <a:t>bình</a:t>
-            </a:r>
-            <a:r>
-              <a:rPr lang="en-US" sz="1200" dirty="0" smtClean="0">
-                <a:solidFill>
-                  <a:srgbClr val="0D1B2A"/>
-                </a:solidFill>
-              </a:rPr>
-              <a:t> </a:t>
-            </a:r>
-            <a:r>
-              <a:rPr lang="en-US" sz="1200" dirty="0" err="1" smtClean="0">
-                <a:solidFill>
-                  <a:srgbClr val="0D1B2A"/>
-                </a:solidFill>
-              </a:rPr>
-              <a:t>thường</a:t>
-            </a:r>
-            <a:r>
-              <a:rPr lang="en-US" sz="1200" dirty="0" smtClean="0">
-                <a:solidFill>
-                  <a:srgbClr val="0D1B2A"/>
-                </a:solidFill>
-              </a:rPr>
-              <a:t>:</a:t>
-            </a:r>
-            <a:endParaRPr lang="en-US" sz="1200" dirty="0"/>
+          <p:cNvPr id="41" name="Text 19"/>
+          <p:cNvSpPr/>
+          <p:nvPr/>
+        </p:nvSpPr>
+        <p:spPr>
+          <a:xfrm>
+            <a:off x="5111496" y="2810663"/>
+            <a:ext cx="3886200" cy="834663"/>
+          </a:xfrm>
+          <a:prstGeom prst="rect">
+            <a:avLst/>
+          </a:prstGeom>
+          <a:noFill/>
+          <a:ln/>
+        </p:spPr>
+        <p:txBody>
+          <a:bodyPr wrap="square" lIns="0" tIns="0" rIns="0" bIns="0" rtlCol="0" anchor="ctr"/>
+          <a:lstStyle/>
+          <a:p>
+            <a:r>
+              <a:rPr lang="en-US" sz="1050" dirty="0" smtClean="0">
+                <a:solidFill>
+                  <a:srgbClr val="0D1B2A"/>
+                </a:solidFill>
+                <a:latin typeface="Calibri (Body)"/>
+              </a:rPr>
+              <a:t>- </a:t>
+            </a:r>
+            <a:r>
+              <a:rPr lang="vi-VN" sz="1000" dirty="0" smtClean="0">
+                <a:solidFill>
+                  <a:srgbClr val="0D1B2A"/>
+                </a:solidFill>
+                <a:latin typeface="Calibri (Body)"/>
+              </a:rPr>
+              <a:t>Log </a:t>
+            </a:r>
+            <a:r>
+              <a:rPr lang="vi-VN" sz="1000" dirty="0">
+                <a:solidFill>
+                  <a:srgbClr val="0D1B2A"/>
+                </a:solidFill>
+                <a:latin typeface="Calibri (Body)"/>
+              </a:rPr>
+              <a:t>cho thấy cơ chế randomized defense đang hoạt động. Dòng [REAL] </a:t>
+            </a:r>
+            <a:r>
+              <a:rPr lang="vi-VN" sz="1000" dirty="0" smtClean="0">
+                <a:solidFill>
+                  <a:srgbClr val="0D1B2A"/>
+                </a:solidFill>
+                <a:latin typeface="Calibri (Body)"/>
+              </a:rPr>
+              <a:t>lúc 15:57:47 trả </a:t>
+            </a:r>
+            <a:r>
+              <a:rPr lang="vi-VN" sz="1000" dirty="0">
+                <a:solidFill>
+                  <a:srgbClr val="0D1B2A"/>
+                </a:solidFill>
+                <a:latin typeface="Calibri (Body)"/>
+              </a:rPr>
+              <a:t>về CPU thật (1%) cho </a:t>
+            </a:r>
+            <a:r>
+              <a:rPr lang="vi-VN" sz="1000" dirty="0" smtClean="0">
+                <a:solidFill>
+                  <a:srgbClr val="0D1B2A"/>
+                </a:solidFill>
+                <a:latin typeface="Calibri (Body)"/>
+              </a:rPr>
+              <a:t>HPA</a:t>
+            </a:r>
+            <a:r>
+              <a:rPr lang="en-US" sz="1000" dirty="0" smtClean="0">
+                <a:solidFill>
+                  <a:srgbClr val="0D1B2A"/>
+                </a:solidFill>
+                <a:latin typeface="Calibri (Body)"/>
+              </a:rPr>
+              <a:t>. </a:t>
+            </a:r>
+            <a:r>
+              <a:rPr lang="vi-VN" sz="1000" dirty="0" smtClean="0">
+                <a:solidFill>
+                  <a:srgbClr val="0D1B2A"/>
+                </a:solidFill>
+                <a:latin typeface="Calibri (Body)"/>
+              </a:rPr>
+              <a:t>Tiếp </a:t>
+            </a:r>
+            <a:r>
+              <a:rPr lang="vi-VN" sz="1000" dirty="0">
+                <a:solidFill>
+                  <a:srgbClr val="0D1B2A"/>
+                </a:solidFill>
+                <a:latin typeface="Calibri (Body)"/>
+              </a:rPr>
+              <a:t>theo dòng [FAKE] lúc 15:58:02 trả về 10% giả dù CPU thực tế là 1</a:t>
+            </a:r>
+            <a:r>
+              <a:rPr lang="vi-VN" sz="1000" dirty="0" smtClean="0">
+                <a:solidFill>
+                  <a:srgbClr val="0D1B2A"/>
+                </a:solidFill>
+                <a:latin typeface="Calibri (Body)"/>
+              </a:rPr>
+              <a:t>%</a:t>
+            </a:r>
+            <a:r>
+              <a:rPr lang="en-US" sz="1000" dirty="0" smtClean="0">
+                <a:solidFill>
+                  <a:srgbClr val="0D1B2A"/>
+                </a:solidFill>
+                <a:latin typeface="Calibri (Body)"/>
+              </a:rPr>
+              <a:t>...</a:t>
+            </a:r>
           </a:p>
         </p:txBody>
       </p:sp>
     </p:spTree>
     <p:extLst>
       <p:ext uri="{BB962C8B-B14F-4D97-AF65-F5344CB8AC3E}">
-        <p14:creationId xmlns:p14="http://schemas.microsoft.com/office/powerpoint/2010/main" val="3598142783"/>
+        <p14:creationId xmlns:p14="http://schemas.microsoft.com/office/powerpoint/2010/main" val="3272244732"/>
       </p:ext>
     </p:extLst>
   </p:cSld>
@@ -19514,854 +19080,220 @@
         </p:nvSpPr>
         <p:spPr>
           <a:xfrm>
-            <a:off x="457200" y="868680"/>
-            <a:ext cx="4754880" cy="320040"/>
-          </a:xfrm>
-          <a:prstGeom prst="rect">
-            <a:avLst/>
-          </a:prstGeom>
-          <a:noFill/>
-          <a:ln/>
-        </p:spPr>
-        <p:txBody>
-          <a:bodyPr wrap="square" lIns="0" tIns="0" rIns="0" bIns="0" rtlCol="0" anchor="ctr"/>
-          <a:lstStyle/>
-          <a:p>
-            <a:pPr marL="0" indent="0">
-              <a:buNone/>
-            </a:pPr>
+            <a:off x="457199" y="868680"/>
+            <a:ext cx="5194897" cy="320040"/>
+          </a:xfrm>
+          <a:prstGeom prst="rect">
+            <a:avLst/>
+          </a:prstGeom>
+          <a:noFill/>
+          <a:ln/>
+        </p:spPr>
+        <p:txBody>
+          <a:bodyPr wrap="square" lIns="0" tIns="0" rIns="0" bIns="0" rtlCol="0" anchor="ctr"/>
+          <a:lstStyle/>
+          <a:p>
+            <a:r>
+              <a:rPr lang="en-US" sz="1200" b="1" dirty="0" err="1" smtClean="0">
+                <a:solidFill>
+                  <a:srgbClr val="0D1B2A"/>
+                </a:solidFill>
+              </a:rPr>
+              <a:t>Thực</a:t>
+            </a:r>
+            <a:r>
+              <a:rPr lang="en-US" sz="1200" b="1" dirty="0" smtClean="0">
+                <a:solidFill>
+                  <a:srgbClr val="0D1B2A"/>
+                </a:solidFill>
+              </a:rPr>
+              <a:t> </a:t>
+            </a:r>
+            <a:r>
+              <a:rPr lang="en-US" sz="1200" b="1" dirty="0" err="1" smtClean="0">
+                <a:solidFill>
+                  <a:srgbClr val="0D1B2A"/>
+                </a:solidFill>
+              </a:rPr>
+              <a:t>hiện</a:t>
+            </a:r>
+            <a:r>
+              <a:rPr lang="en-US" sz="1200" b="1" dirty="0" smtClean="0">
+                <a:solidFill>
+                  <a:srgbClr val="0D1B2A"/>
+                </a:solidFill>
+              </a:rPr>
+              <a:t> </a:t>
+            </a:r>
+            <a:r>
+              <a:rPr lang="en-US" sz="1200" b="1" dirty="0" err="1" smtClean="0">
+                <a:solidFill>
+                  <a:srgbClr val="0D1B2A"/>
+                </a:solidFill>
+              </a:rPr>
+              <a:t>tấn</a:t>
+            </a:r>
+            <a:r>
+              <a:rPr lang="en-US" sz="1200" b="1" dirty="0" smtClean="0">
+                <a:solidFill>
+                  <a:srgbClr val="0D1B2A"/>
+                </a:solidFill>
+              </a:rPr>
+              <a:t> </a:t>
+            </a:r>
+            <a:r>
+              <a:rPr lang="en-US" sz="1200" b="1" dirty="0" err="1" smtClean="0">
+                <a:solidFill>
+                  <a:srgbClr val="0D1B2A"/>
+                </a:solidFill>
+              </a:rPr>
+              <a:t>công</a:t>
+            </a:r>
+            <a:r>
+              <a:rPr lang="en-US" sz="1200" b="1" dirty="0" smtClean="0">
+                <a:solidFill>
+                  <a:srgbClr val="0D1B2A"/>
+                </a:solidFill>
+              </a:rPr>
+              <a:t> </a:t>
+            </a:r>
+            <a:r>
+              <a:rPr lang="en-US" sz="1200" b="1" dirty="0" err="1" smtClean="0">
+                <a:solidFill>
+                  <a:srgbClr val="0D1B2A"/>
+                </a:solidFill>
+              </a:rPr>
+              <a:t>bơm</a:t>
+            </a:r>
+            <a:r>
+              <a:rPr lang="en-US" sz="1200" b="1" dirty="0" smtClean="0">
+                <a:solidFill>
+                  <a:srgbClr val="0D1B2A"/>
+                </a:solidFill>
+              </a:rPr>
+              <a:t> </a:t>
+            </a:r>
+            <a:r>
+              <a:rPr lang="en-US" sz="1200" b="1" dirty="0" err="1" smtClean="0">
+                <a:solidFill>
+                  <a:srgbClr val="0D1B2A"/>
+                </a:solidFill>
+              </a:rPr>
+              <a:t>lưu</a:t>
+            </a:r>
+            <a:r>
+              <a:rPr lang="en-US" sz="1200" b="1" dirty="0" smtClean="0">
+                <a:solidFill>
+                  <a:srgbClr val="0D1B2A"/>
+                </a:solidFill>
+              </a:rPr>
+              <a:t> </a:t>
+            </a:r>
+            <a:r>
+              <a:rPr lang="en-US" sz="1200" b="1" dirty="0" err="1" smtClean="0">
+                <a:solidFill>
+                  <a:srgbClr val="0D1B2A"/>
+                </a:solidFill>
+              </a:rPr>
+              <a:t>lượng</a:t>
+            </a:r>
+            <a:r>
+              <a:rPr lang="en-US" sz="1200" b="1" dirty="0" smtClean="0">
+                <a:solidFill>
+                  <a:srgbClr val="0D1B2A"/>
+                </a:solidFill>
+              </a:rPr>
+              <a:t> </a:t>
+            </a:r>
+            <a:r>
+              <a:rPr lang="en-US" sz="1200" b="1" dirty="0" err="1" smtClean="0">
+                <a:solidFill>
+                  <a:srgbClr val="0D1B2A"/>
+                </a:solidFill>
+              </a:rPr>
+              <a:t>sau</a:t>
+            </a:r>
+            <a:r>
+              <a:rPr lang="en-US" sz="1200" b="1" dirty="0" smtClean="0">
+                <a:solidFill>
+                  <a:srgbClr val="0D1B2A"/>
+                </a:solidFill>
+              </a:rPr>
+              <a:t> </a:t>
+            </a:r>
+            <a:r>
+              <a:rPr lang="en-US" sz="1200" b="1" dirty="0" err="1" smtClean="0">
+                <a:solidFill>
+                  <a:srgbClr val="0D1B2A"/>
+                </a:solidFill>
+              </a:rPr>
+              <a:t>khi</a:t>
+            </a:r>
+            <a:r>
+              <a:rPr lang="en-US" sz="1200" b="1" dirty="0" smtClean="0">
+                <a:solidFill>
+                  <a:srgbClr val="0D1B2A"/>
+                </a:solidFill>
+              </a:rPr>
+              <a:t> </a:t>
+            </a:r>
+            <a:r>
+              <a:rPr lang="en-US" sz="1200" b="1" dirty="0" err="1" smtClean="0">
+                <a:solidFill>
+                  <a:srgbClr val="0D1B2A"/>
+                </a:solidFill>
+              </a:rPr>
+              <a:t>đã</a:t>
+            </a:r>
+            <a:r>
+              <a:rPr lang="en-US" sz="1200" b="1" dirty="0" smtClean="0">
+                <a:solidFill>
+                  <a:srgbClr val="0D1B2A"/>
+                </a:solidFill>
+              </a:rPr>
+              <a:t> setup </a:t>
+            </a:r>
+            <a:r>
+              <a:rPr lang="en-US" sz="1200" b="1" dirty="0" err="1" smtClean="0">
+                <a:solidFill>
+                  <a:srgbClr val="0D1B2A"/>
+                </a:solidFill>
+              </a:rPr>
+              <a:t>cơ</a:t>
+            </a:r>
+            <a:r>
+              <a:rPr lang="en-US" sz="1200" b="1" dirty="0" smtClean="0">
+                <a:solidFill>
+                  <a:srgbClr val="0D1B2A"/>
+                </a:solidFill>
+              </a:rPr>
+              <a:t> </a:t>
+            </a:r>
+            <a:r>
+              <a:rPr lang="en-US" sz="1200" b="1" dirty="0" err="1">
+                <a:solidFill>
+                  <a:srgbClr val="0D1B2A"/>
+                </a:solidFill>
+              </a:rPr>
+              <a:t>chế</a:t>
+            </a:r>
             <a:r>
               <a:rPr lang="en-US" sz="1200" b="1" dirty="0">
                 <a:solidFill>
                   <a:srgbClr val="0D1B2A"/>
                 </a:solidFill>
               </a:rPr>
-              <a:t>Cơ chế Randomization HPA [4]</a:t>
+              <a:t> Randomization HPA</a:t>
+            </a:r>
+            <a:r>
+              <a:rPr lang="en-US" sz="1200" b="1" dirty="0" smtClean="0">
+                <a:solidFill>
+                  <a:srgbClr val="0D1B2A"/>
+                </a:solidFill>
+              </a:rPr>
+              <a:t> </a:t>
             </a:r>
             <a:endParaRPr lang="en-US" sz="1200" dirty="0"/>
-          </a:p>
-        </p:txBody>
-      </p:sp>
-      <p:sp>
-        <p:nvSpPr>
-          <p:cNvPr id="10" name="Shape 8"/>
-          <p:cNvSpPr/>
-          <p:nvPr/>
-        </p:nvSpPr>
-        <p:spPr>
-          <a:xfrm>
-            <a:off x="457200" y="1261872"/>
-            <a:ext cx="1389888" cy="621792"/>
-          </a:xfrm>
-          <a:prstGeom prst="rect">
-            <a:avLst/>
-          </a:prstGeom>
-          <a:solidFill>
-            <a:srgbClr val="0096B7">
-              <a:alpha val="80000"/>
-            </a:srgbClr>
-          </a:solidFill>
-          <a:ln w="12700">
-            <a:solidFill>
-              <a:srgbClr val="0096B7"/>
-            </a:solidFill>
-            <a:prstDash val="solid"/>
-          </a:ln>
-        </p:spPr>
-      </p:sp>
-      <p:sp>
-        <p:nvSpPr>
-          <p:cNvPr id="11" name="Text 9"/>
-          <p:cNvSpPr/>
-          <p:nvPr/>
-        </p:nvSpPr>
-        <p:spPr>
-          <a:xfrm>
-            <a:off x="457200" y="1261872"/>
-            <a:ext cx="1389888" cy="621792"/>
-          </a:xfrm>
-          <a:prstGeom prst="rect">
-            <a:avLst/>
-          </a:prstGeom>
-          <a:noFill/>
-          <a:ln/>
-        </p:spPr>
-        <p:txBody>
-          <a:bodyPr wrap="square" lIns="0" tIns="0" rIns="0" bIns="0" rtlCol="0" anchor="ctr"/>
-          <a:lstStyle/>
-          <a:p>
-            <a:pPr marL="0" indent="0" algn="ctr">
-              <a:buNone/>
-            </a:pPr>
-            <a:r>
-              <a:rPr lang="en-US" sz="950" dirty="0">
-                <a:solidFill>
-                  <a:srgbClr val="0D1B2A"/>
-                </a:solidFill>
-              </a:rPr>
-              <a:t>Metric vượt</a:t>
-            </a:r>
-            <a:endParaRPr lang="en-US" sz="950" dirty="0"/>
-          </a:p>
-          <a:p>
-            <a:pPr marL="0" indent="0" algn="ctr">
-              <a:buNone/>
-            </a:pPr>
-            <a:r>
-              <a:rPr lang="en-US" sz="950" dirty="0">
-                <a:solidFill>
-                  <a:srgbClr val="0D1B2A"/>
-                </a:solidFill>
-              </a:rPr>
-              <a:t>ngưỡng HPA</a:t>
-            </a:r>
-            <a:endParaRPr lang="en-US" sz="950" dirty="0"/>
-          </a:p>
-        </p:txBody>
-      </p:sp>
-      <p:sp>
-        <p:nvSpPr>
-          <p:cNvPr id="12" name="Shape 10"/>
-          <p:cNvSpPr/>
-          <p:nvPr/>
-        </p:nvSpPr>
-        <p:spPr>
-          <a:xfrm>
-            <a:off x="1874520" y="1572768"/>
-            <a:ext cx="411480" cy="0"/>
-          </a:xfrm>
-          <a:prstGeom prst="line">
-            <a:avLst/>
-          </a:prstGeom>
-          <a:noFill/>
-          <a:ln w="19050">
-            <a:solidFill>
-              <a:srgbClr val="64748B"/>
-            </a:solidFill>
-            <a:prstDash val="solid"/>
-          </a:ln>
-        </p:spPr>
-      </p:sp>
-      <p:sp>
-        <p:nvSpPr>
-          <p:cNvPr id="13" name="Shape 11"/>
-          <p:cNvSpPr/>
-          <p:nvPr/>
-        </p:nvSpPr>
-        <p:spPr>
-          <a:xfrm>
-            <a:off x="2331720" y="1261872"/>
-            <a:ext cx="777240" cy="621792"/>
-          </a:xfrm>
-          <a:prstGeom prst="ellipse">
-            <a:avLst/>
-          </a:prstGeom>
-          <a:solidFill>
-            <a:srgbClr val="F47B20">
-              <a:alpha val="80000"/>
-            </a:srgbClr>
-          </a:solidFill>
-          <a:ln w="12700">
-            <a:solidFill>
-              <a:srgbClr val="F47B20"/>
-            </a:solidFill>
-            <a:prstDash val="solid"/>
-          </a:ln>
-        </p:spPr>
-      </p:sp>
-      <p:sp>
-        <p:nvSpPr>
-          <p:cNvPr id="14" name="Text 12"/>
-          <p:cNvSpPr/>
-          <p:nvPr/>
-        </p:nvSpPr>
-        <p:spPr>
-          <a:xfrm>
-            <a:off x="2331720" y="1261872"/>
-            <a:ext cx="777240" cy="621792"/>
-          </a:xfrm>
-          <a:prstGeom prst="rect">
-            <a:avLst/>
-          </a:prstGeom>
-          <a:noFill/>
-          <a:ln/>
-        </p:spPr>
-        <p:txBody>
-          <a:bodyPr wrap="square" lIns="0" tIns="0" rIns="0" bIns="0" rtlCol="0" anchor="ctr"/>
-          <a:lstStyle/>
-          <a:p>
-            <a:pPr marL="0" indent="0" algn="ctr">
-              <a:buNone/>
-            </a:pPr>
-            <a:r>
-              <a:rPr lang="en-US" sz="900" dirty="0">
-                <a:solidFill>
-                  <a:srgbClr val="0D1B2A"/>
-                </a:solidFill>
-              </a:rPr>
-              <a:t>RNG</a:t>
-            </a:r>
-            <a:endParaRPr lang="en-US" sz="900" dirty="0"/>
-          </a:p>
-          <a:p>
-            <a:pPr marL="0" indent="0" algn="ctr">
-              <a:buNone/>
-            </a:pPr>
-            <a:r>
-              <a:rPr lang="en-US" sz="900" dirty="0">
-                <a:solidFill>
-                  <a:srgbClr val="0D1B2A"/>
-                </a:solidFill>
-              </a:rPr>
-              <a:t>50/50</a:t>
-            </a:r>
-            <a:endParaRPr lang="en-US" sz="900" dirty="0"/>
-          </a:p>
-        </p:txBody>
-      </p:sp>
-      <p:sp>
-        <p:nvSpPr>
-          <p:cNvPr id="15" name="Shape 13"/>
-          <p:cNvSpPr/>
-          <p:nvPr/>
-        </p:nvSpPr>
-        <p:spPr>
-          <a:xfrm>
-            <a:off x="3108960" y="1572768"/>
-            <a:ext cx="182880" cy="0"/>
-          </a:xfrm>
-          <a:prstGeom prst="line">
-            <a:avLst/>
-          </a:prstGeom>
-          <a:noFill/>
-          <a:ln w="19050">
-            <a:solidFill>
-              <a:srgbClr val="2D9D5A"/>
-            </a:solidFill>
-            <a:prstDash val="solid"/>
-          </a:ln>
-        </p:spPr>
-      </p:sp>
-      <p:sp>
-        <p:nvSpPr>
-          <p:cNvPr id="16" name="Shape 14"/>
-          <p:cNvSpPr/>
-          <p:nvPr/>
-        </p:nvSpPr>
-        <p:spPr>
-          <a:xfrm>
-            <a:off x="3337560" y="1261872"/>
-            <a:ext cx="1371600" cy="621792"/>
-          </a:xfrm>
-          <a:prstGeom prst="rect">
-            <a:avLst/>
-          </a:prstGeom>
-          <a:solidFill>
-            <a:srgbClr val="2D9D5A">
-              <a:alpha val="80000"/>
-            </a:srgbClr>
-          </a:solidFill>
-          <a:ln w="12700">
-            <a:solidFill>
-              <a:srgbClr val="2D9D5A"/>
-            </a:solidFill>
-            <a:prstDash val="solid"/>
-          </a:ln>
-        </p:spPr>
-      </p:sp>
-      <p:sp>
-        <p:nvSpPr>
-          <p:cNvPr id="17" name="Text 15"/>
-          <p:cNvSpPr/>
-          <p:nvPr/>
-        </p:nvSpPr>
-        <p:spPr>
-          <a:xfrm>
-            <a:off x="3337560" y="1261872"/>
-            <a:ext cx="1371600" cy="621792"/>
-          </a:xfrm>
-          <a:prstGeom prst="rect">
-            <a:avLst/>
-          </a:prstGeom>
-          <a:noFill/>
-          <a:ln/>
-        </p:spPr>
-        <p:txBody>
-          <a:bodyPr wrap="square" lIns="0" tIns="0" rIns="0" bIns="0" rtlCol="0" anchor="ctr"/>
-          <a:lstStyle/>
-          <a:p>
-            <a:pPr marL="0" indent="0" algn="ctr">
-              <a:buNone/>
-            </a:pPr>
-            <a:r>
-              <a:rPr lang="en-US" sz="950" dirty="0">
-                <a:solidFill>
-                  <a:srgbClr val="0D1B2A"/>
-                </a:solidFill>
-              </a:rPr>
-              <a:t>Scale Up</a:t>
-            </a:r>
-            <a:endParaRPr lang="en-US" sz="950" dirty="0"/>
-          </a:p>
-          <a:p>
-            <a:pPr marL="0" indent="0" algn="ctr">
-              <a:buNone/>
-            </a:pPr>
-            <a:r>
-              <a:rPr lang="en-US" sz="950" dirty="0">
-                <a:solidFill>
-                  <a:srgbClr val="0D1B2A"/>
-                </a:solidFill>
-              </a:rPr>
-              <a:t>bình thường</a:t>
-            </a:r>
-            <a:endParaRPr lang="en-US" sz="950" dirty="0"/>
-          </a:p>
-        </p:txBody>
-      </p:sp>
-      <p:sp>
-        <p:nvSpPr>
-          <p:cNvPr id="18" name="Shape 16"/>
-          <p:cNvSpPr/>
-          <p:nvPr/>
-        </p:nvSpPr>
-        <p:spPr>
-          <a:xfrm>
-            <a:off x="2724912" y="1883664"/>
-            <a:ext cx="0" cy="365760"/>
-          </a:xfrm>
-          <a:prstGeom prst="line">
-            <a:avLst/>
-          </a:prstGeom>
-          <a:noFill/>
-          <a:ln w="19050">
-            <a:solidFill>
-              <a:srgbClr val="D62828"/>
-            </a:solidFill>
-            <a:prstDash val="solid"/>
-          </a:ln>
-        </p:spPr>
-      </p:sp>
-      <p:sp>
-        <p:nvSpPr>
-          <p:cNvPr id="19" name="Shape 17"/>
-          <p:cNvSpPr/>
-          <p:nvPr/>
-        </p:nvSpPr>
-        <p:spPr>
-          <a:xfrm>
-            <a:off x="2331720" y="2286000"/>
-            <a:ext cx="777240" cy="621792"/>
-          </a:xfrm>
-          <a:prstGeom prst="rect">
-            <a:avLst/>
-          </a:prstGeom>
-          <a:solidFill>
-            <a:srgbClr val="D62828">
-              <a:alpha val="80000"/>
-            </a:srgbClr>
-          </a:solidFill>
-          <a:ln w="12700">
-            <a:solidFill>
-              <a:srgbClr val="D62828"/>
-            </a:solidFill>
-            <a:prstDash val="solid"/>
-          </a:ln>
-        </p:spPr>
-      </p:sp>
-      <p:sp>
-        <p:nvSpPr>
-          <p:cNvPr id="20" name="Text 18"/>
-          <p:cNvSpPr/>
-          <p:nvPr/>
-        </p:nvSpPr>
-        <p:spPr>
-          <a:xfrm>
-            <a:off x="2331720" y="2286000"/>
-            <a:ext cx="777240" cy="621792"/>
-          </a:xfrm>
-          <a:prstGeom prst="rect">
-            <a:avLst/>
-          </a:prstGeom>
-          <a:noFill/>
-          <a:ln/>
-        </p:spPr>
-        <p:txBody>
-          <a:bodyPr wrap="square" lIns="0" tIns="0" rIns="0" bIns="0" rtlCol="0" anchor="ctr"/>
-          <a:lstStyle/>
-          <a:p>
-            <a:pPr marL="0" indent="0" algn="ctr">
-              <a:buNone/>
-            </a:pPr>
-            <a:r>
-              <a:rPr lang="en-US" sz="950" dirty="0">
-                <a:solidFill>
-                  <a:srgbClr val="0D1B2A"/>
-                </a:solidFill>
-              </a:rPr>
-              <a:t>Bỏ qua</a:t>
-            </a:r>
-            <a:endParaRPr lang="en-US" sz="950" dirty="0"/>
-          </a:p>
-          <a:p>
-            <a:pPr marL="0" indent="0" algn="ctr">
-              <a:buNone/>
-            </a:pPr>
-            <a:r>
-              <a:rPr lang="en-US" sz="950" dirty="0">
-                <a:solidFill>
-                  <a:srgbClr val="0D1B2A"/>
-                </a:solidFill>
-              </a:rPr>
-              <a:t>chu kỳ này</a:t>
-            </a:r>
-            <a:endParaRPr lang="en-US" sz="950" dirty="0"/>
-          </a:p>
-        </p:txBody>
-      </p:sp>
-      <p:sp>
-        <p:nvSpPr>
-          <p:cNvPr id="21" name="Text 19"/>
-          <p:cNvSpPr/>
-          <p:nvPr/>
-        </p:nvSpPr>
-        <p:spPr>
-          <a:xfrm>
-            <a:off x="457200" y="2999232"/>
-            <a:ext cx="4251960" cy="1038857"/>
-          </a:xfrm>
-          <a:prstGeom prst="rect">
-            <a:avLst/>
-          </a:prstGeom>
-          <a:noFill/>
-          <a:ln/>
-        </p:spPr>
-        <p:txBody>
-          <a:bodyPr wrap="square" lIns="0" tIns="0" rIns="0" bIns="0" rtlCol="0" anchor="ctr"/>
-          <a:lstStyle/>
-          <a:p>
-            <a:pPr marL="0" indent="0">
-              <a:buNone/>
-            </a:pPr>
-            <a:r>
-              <a:rPr lang="en-US" sz="1100" dirty="0">
-                <a:solidFill>
-                  <a:srgbClr val="0D1B2A"/>
-                </a:solidFill>
-              </a:rPr>
-              <a:t>• Sử dụng custom scaling metrics của HPA</a:t>
-            </a:r>
-            <a:endParaRPr lang="en-US" sz="1100" dirty="0"/>
-          </a:p>
-          <a:p>
-            <a:pPr marL="0" indent="0">
-              <a:buNone/>
-            </a:pPr>
-            <a:r>
-              <a:rPr lang="en-US" sz="1100" dirty="0">
-                <a:solidFill>
-                  <a:srgbClr val="0D1B2A"/>
-                </a:solidFill>
-              </a:rPr>
-              <a:t>• RNG được cân </a:t>
-            </a:r>
-            <a:r>
-              <a:rPr lang="en-US" sz="1100" dirty="0" err="1">
-                <a:solidFill>
-                  <a:srgbClr val="0D1B2A"/>
-                </a:solidFill>
-              </a:rPr>
-              <a:t>bằng</a:t>
-            </a:r>
-            <a:r>
-              <a:rPr lang="en-US" sz="1100" dirty="0">
-                <a:solidFill>
-                  <a:srgbClr val="0D1B2A"/>
-                </a:solidFill>
-              </a:rPr>
-              <a:t> </a:t>
-            </a:r>
-            <a:r>
-              <a:rPr lang="en-US" sz="1100" dirty="0" smtClean="0">
-                <a:solidFill>
-                  <a:srgbClr val="0D1B2A"/>
-                </a:solidFill>
-              </a:rPr>
-              <a:t>50/50 (</a:t>
-            </a:r>
-            <a:r>
-              <a:rPr lang="en-US" sz="1100" dirty="0" err="1" smtClean="0">
-                <a:solidFill>
-                  <a:srgbClr val="0D1B2A"/>
-                </a:solidFill>
-              </a:rPr>
-              <a:t>có</a:t>
-            </a:r>
-            <a:r>
-              <a:rPr lang="en-US" sz="1100" dirty="0" smtClean="0">
-                <a:solidFill>
-                  <a:srgbClr val="0D1B2A"/>
-                </a:solidFill>
-              </a:rPr>
-              <a:t> </a:t>
-            </a:r>
-            <a:r>
-              <a:rPr lang="en-US" sz="1100" dirty="0" err="1" smtClean="0">
-                <a:solidFill>
-                  <a:srgbClr val="0D1B2A"/>
-                </a:solidFill>
-              </a:rPr>
-              <a:t>thể</a:t>
-            </a:r>
-            <a:r>
-              <a:rPr lang="en-US" sz="1100" dirty="0" smtClean="0">
-                <a:solidFill>
-                  <a:srgbClr val="0D1B2A"/>
-                </a:solidFill>
-              </a:rPr>
-              <a:t> </a:t>
-            </a:r>
-            <a:r>
-              <a:rPr lang="en-US" sz="1100" dirty="0" err="1" smtClean="0">
-                <a:solidFill>
-                  <a:srgbClr val="0D1B2A"/>
-                </a:solidFill>
-              </a:rPr>
-              <a:t>điều</a:t>
-            </a:r>
-            <a:r>
-              <a:rPr lang="en-US" sz="1100" dirty="0" smtClean="0">
-                <a:solidFill>
-                  <a:srgbClr val="0D1B2A"/>
-                </a:solidFill>
-              </a:rPr>
-              <a:t> </a:t>
-            </a:r>
-            <a:r>
-              <a:rPr lang="en-US" sz="1100" dirty="0" err="1" smtClean="0">
-                <a:solidFill>
-                  <a:srgbClr val="0D1B2A"/>
-                </a:solidFill>
-              </a:rPr>
-              <a:t>chỉnh</a:t>
-            </a:r>
-            <a:r>
-              <a:rPr lang="en-US" sz="1100" dirty="0" smtClean="0">
-                <a:solidFill>
-                  <a:srgbClr val="0D1B2A"/>
-                </a:solidFill>
-              </a:rPr>
-              <a:t> </a:t>
-            </a:r>
-            <a:r>
-              <a:rPr lang="en-US" sz="1100" dirty="0" err="1" smtClean="0">
-                <a:solidFill>
-                  <a:srgbClr val="0D1B2A"/>
-                </a:solidFill>
-              </a:rPr>
-              <a:t>tùy</a:t>
-            </a:r>
-            <a:r>
-              <a:rPr lang="en-US" sz="1100" dirty="0" smtClean="0">
-                <a:solidFill>
-                  <a:srgbClr val="0D1B2A"/>
-                </a:solidFill>
-              </a:rPr>
-              <a:t> </a:t>
-            </a:r>
-            <a:r>
-              <a:rPr lang="en-US" sz="1100" dirty="0" err="1" smtClean="0">
-                <a:solidFill>
-                  <a:srgbClr val="0D1B2A"/>
-                </a:solidFill>
-              </a:rPr>
-              <a:t>vào</a:t>
-            </a:r>
-            <a:r>
-              <a:rPr lang="en-US" sz="1100" dirty="0" smtClean="0">
-                <a:solidFill>
-                  <a:srgbClr val="0D1B2A"/>
-                </a:solidFill>
-              </a:rPr>
-              <a:t> </a:t>
-            </a:r>
-            <a:r>
-              <a:rPr lang="en-US" sz="1100" dirty="0" err="1" smtClean="0">
-                <a:solidFill>
-                  <a:srgbClr val="0D1B2A"/>
-                </a:solidFill>
-              </a:rPr>
-              <a:t>mục</a:t>
-            </a:r>
-            <a:r>
-              <a:rPr lang="en-US" sz="1100" dirty="0" smtClean="0">
-                <a:solidFill>
-                  <a:srgbClr val="0D1B2A"/>
-                </a:solidFill>
-              </a:rPr>
-              <a:t> </a:t>
-            </a:r>
-            <a:r>
-              <a:rPr lang="en-US" sz="1100" dirty="0" err="1" smtClean="0">
-                <a:solidFill>
-                  <a:srgbClr val="0D1B2A"/>
-                </a:solidFill>
-              </a:rPr>
-              <a:t>đích</a:t>
-            </a:r>
-            <a:r>
-              <a:rPr lang="en-US" sz="1100" dirty="0" smtClean="0">
-                <a:solidFill>
-                  <a:srgbClr val="0D1B2A"/>
-                </a:solidFill>
-              </a:rPr>
-              <a:t> </a:t>
-            </a:r>
-            <a:r>
-              <a:rPr lang="en-US" sz="1100" dirty="0" err="1" smtClean="0">
-                <a:solidFill>
-                  <a:srgbClr val="0D1B2A"/>
-                </a:solidFill>
-              </a:rPr>
-              <a:t>tăng</a:t>
-            </a:r>
-            <a:r>
-              <a:rPr lang="en-US" sz="1100" dirty="0" smtClean="0">
-                <a:solidFill>
-                  <a:srgbClr val="0D1B2A"/>
-                </a:solidFill>
-              </a:rPr>
-              <a:t> </a:t>
-            </a:r>
-            <a:r>
-              <a:rPr lang="en-US" sz="1100" dirty="0" err="1" smtClean="0">
-                <a:solidFill>
-                  <a:srgbClr val="0D1B2A"/>
-                </a:solidFill>
-              </a:rPr>
-              <a:t>khả</a:t>
-            </a:r>
-            <a:r>
-              <a:rPr lang="en-US" sz="1100" dirty="0" smtClean="0">
-                <a:solidFill>
-                  <a:srgbClr val="0D1B2A"/>
-                </a:solidFill>
-              </a:rPr>
-              <a:t> </a:t>
-            </a:r>
-            <a:r>
-              <a:rPr lang="en-US" sz="1100" dirty="0" err="1" smtClean="0">
-                <a:solidFill>
-                  <a:srgbClr val="0D1B2A"/>
-                </a:solidFill>
-              </a:rPr>
-              <a:t>năng</a:t>
-            </a:r>
-            <a:r>
-              <a:rPr lang="en-US" sz="1100" dirty="0" smtClean="0">
-                <a:solidFill>
-                  <a:srgbClr val="0D1B2A"/>
-                </a:solidFill>
-              </a:rPr>
-              <a:t> </a:t>
-            </a:r>
-            <a:r>
-              <a:rPr lang="en-US" sz="1100" dirty="0" err="1" smtClean="0">
-                <a:solidFill>
-                  <a:srgbClr val="0D1B2A"/>
-                </a:solidFill>
-              </a:rPr>
-              <a:t>phòng</a:t>
-            </a:r>
-            <a:r>
-              <a:rPr lang="en-US" sz="1100" dirty="0">
-                <a:solidFill>
-                  <a:srgbClr val="0D1B2A"/>
-                </a:solidFill>
-              </a:rPr>
-              <a:t> </a:t>
-            </a:r>
-            <a:r>
-              <a:rPr lang="en-US" sz="1100" dirty="0" err="1" smtClean="0">
-                <a:solidFill>
-                  <a:srgbClr val="0D1B2A"/>
-                </a:solidFill>
-              </a:rPr>
-              <a:t>thủ</a:t>
-            </a:r>
-            <a:r>
-              <a:rPr lang="en-US" sz="1100" dirty="0" smtClean="0">
-                <a:solidFill>
-                  <a:srgbClr val="0D1B2A"/>
-                </a:solidFill>
-              </a:rPr>
-              <a:t> hay </a:t>
-            </a:r>
-            <a:r>
-              <a:rPr lang="en-US" sz="1100" dirty="0" err="1" smtClean="0">
-                <a:solidFill>
-                  <a:srgbClr val="0D1B2A"/>
-                </a:solidFill>
-              </a:rPr>
-              <a:t>tăng</a:t>
-            </a:r>
-            <a:r>
-              <a:rPr lang="en-US" sz="1100" dirty="0" smtClean="0">
-                <a:solidFill>
-                  <a:srgbClr val="0D1B2A"/>
-                </a:solidFill>
-              </a:rPr>
-              <a:t> </a:t>
-            </a:r>
-            <a:r>
-              <a:rPr lang="en-US" sz="1100" dirty="0" err="1" smtClean="0">
-                <a:solidFill>
-                  <a:srgbClr val="0D1B2A"/>
-                </a:solidFill>
-              </a:rPr>
-              <a:t>trải</a:t>
-            </a:r>
-            <a:r>
-              <a:rPr lang="en-US" sz="1100" dirty="0" smtClean="0">
-                <a:solidFill>
-                  <a:srgbClr val="0D1B2A"/>
-                </a:solidFill>
-              </a:rPr>
-              <a:t> </a:t>
-            </a:r>
-            <a:r>
-              <a:rPr lang="en-US" sz="1100" dirty="0" err="1" smtClean="0">
-                <a:solidFill>
-                  <a:srgbClr val="0D1B2A"/>
-                </a:solidFill>
-              </a:rPr>
-              <a:t>nghiệm</a:t>
-            </a:r>
-            <a:r>
-              <a:rPr lang="en-US" sz="1100" dirty="0" smtClean="0">
-                <a:solidFill>
-                  <a:srgbClr val="0D1B2A"/>
-                </a:solidFill>
-              </a:rPr>
-              <a:t> </a:t>
-            </a:r>
-            <a:r>
-              <a:rPr lang="en-US" sz="1100" dirty="0" err="1" smtClean="0">
-                <a:solidFill>
-                  <a:srgbClr val="0D1B2A"/>
-                </a:solidFill>
-              </a:rPr>
-              <a:t>người</a:t>
-            </a:r>
-            <a:r>
-              <a:rPr lang="en-US" sz="1100" dirty="0" smtClean="0">
-                <a:solidFill>
-                  <a:srgbClr val="0D1B2A"/>
-                </a:solidFill>
-              </a:rPr>
-              <a:t> </a:t>
-            </a:r>
-            <a:r>
-              <a:rPr lang="en-US" sz="1100" dirty="0" err="1" smtClean="0">
-                <a:solidFill>
-                  <a:srgbClr val="0D1B2A"/>
-                </a:solidFill>
-              </a:rPr>
-              <a:t>dùng</a:t>
-            </a:r>
-            <a:r>
-              <a:rPr lang="en-US" sz="1100" dirty="0" smtClean="0">
-                <a:solidFill>
-                  <a:srgbClr val="0D1B2A"/>
-                </a:solidFill>
-              </a:rPr>
-              <a:t> )</a:t>
-            </a:r>
-            <a:endParaRPr lang="en-US" sz="1100" dirty="0"/>
-          </a:p>
-          <a:p>
-            <a:pPr marL="0" indent="0">
-              <a:buNone/>
-            </a:pPr>
-            <a:r>
-              <a:rPr lang="en-US" sz="1100" dirty="0">
-                <a:solidFill>
-                  <a:srgbClr val="0D1B2A"/>
-                </a:solidFill>
-              </a:rPr>
-              <a:t>• </a:t>
-            </a:r>
-            <a:r>
-              <a:rPr lang="en-US" sz="1100" dirty="0" err="1">
-                <a:solidFill>
-                  <a:srgbClr val="0D1B2A"/>
-                </a:solidFill>
-              </a:rPr>
-              <a:t>Kẻ</a:t>
-            </a:r>
-            <a:r>
-              <a:rPr lang="en-US" sz="1100" dirty="0">
-                <a:solidFill>
-                  <a:srgbClr val="0D1B2A"/>
-                </a:solidFill>
-              </a:rPr>
-              <a:t> </a:t>
-            </a:r>
-            <a:r>
-              <a:rPr lang="en-US" sz="1100" dirty="0" err="1" smtClean="0">
-                <a:solidFill>
-                  <a:srgbClr val="0D1B2A"/>
-                </a:solidFill>
-              </a:rPr>
-              <a:t>tấn</a:t>
-            </a:r>
-            <a:r>
-              <a:rPr lang="en-US" sz="1100" dirty="0" smtClean="0">
-                <a:solidFill>
-                  <a:srgbClr val="0D1B2A"/>
-                </a:solidFill>
-              </a:rPr>
-              <a:t> </a:t>
-            </a:r>
-            <a:r>
-              <a:rPr lang="en-US" sz="1100" dirty="0" err="1" smtClean="0">
-                <a:solidFill>
-                  <a:srgbClr val="0D1B2A"/>
-                </a:solidFill>
-              </a:rPr>
-              <a:t>công</a:t>
-            </a:r>
-            <a:r>
-              <a:rPr lang="en-US" sz="1100" dirty="0" smtClean="0">
-                <a:solidFill>
-                  <a:srgbClr val="0D1B2A"/>
-                </a:solidFill>
-              </a:rPr>
-              <a:t> </a:t>
-            </a:r>
-            <a:r>
-              <a:rPr lang="en-US" sz="1100" dirty="0">
-                <a:solidFill>
-                  <a:srgbClr val="0D1B2A"/>
-                </a:solidFill>
-              </a:rPr>
-              <a:t>không dự đoán được quyết định scale</a:t>
-            </a:r>
-            <a:endParaRPr lang="en-US" sz="1100" dirty="0"/>
-          </a:p>
-          <a:p>
-            <a:pPr marL="0" indent="0">
-              <a:buNone/>
-            </a:pPr>
-            <a:r>
-              <a:rPr lang="en-US" sz="1100" dirty="0">
-                <a:solidFill>
-                  <a:srgbClr val="0D1B2A"/>
-                </a:solidFill>
-              </a:rPr>
-              <a:t>• Triển khai không cần sửa đổi Kubernetes core</a:t>
-            </a:r>
-            <a:endParaRPr lang="en-US" sz="1100" dirty="0"/>
           </a:p>
         </p:txBody>
       </p:sp>
@@ -20392,728 +19324,38 @@
       </p:sp>
       <p:pic>
         <p:nvPicPr>
-          <p:cNvPr id="40" name="Picture 39"/>
-          <p:cNvPicPr>
-            <a:picLocks noChangeAspect="1"/>
-          </p:cNvPicPr>
+          <p:cNvPr id="13" name="image10.png"/>
+          <p:cNvPicPr/>
           <p:nvPr/>
         </p:nvPicPr>
         <p:blipFill>
           <a:blip r:embed="rId3"/>
+          <a:srcRect/>
           <a:stretch>
             <a:fillRect/>
           </a:stretch>
         </p:blipFill>
         <p:spPr>
           <a:xfrm>
-            <a:off x="5212080" y="868680"/>
-            <a:ext cx="3860482" cy="1850543"/>
-          </a:xfrm>
-          <a:prstGeom prst="rect">
-            <a:avLst/>
-          </a:prstGeom>
+            <a:off x="457199" y="1248553"/>
+            <a:ext cx="5864088" cy="3446493"/>
+          </a:xfrm>
+          <a:prstGeom prst="rect">
+            <a:avLst/>
+          </a:prstGeom>
+          <a:ln/>
         </p:spPr>
       </p:pic>
       <p:sp>
         <p:nvSpPr>
-          <p:cNvPr id="41" name="Text 19"/>
-          <p:cNvSpPr/>
-          <p:nvPr/>
-        </p:nvSpPr>
-        <p:spPr>
-          <a:xfrm>
-            <a:off x="5111496" y="2810663"/>
-            <a:ext cx="3886200" cy="834663"/>
-          </a:xfrm>
-          <a:prstGeom prst="rect">
-            <a:avLst/>
-          </a:prstGeom>
-          <a:noFill/>
-          <a:ln/>
-        </p:spPr>
-        <p:txBody>
-          <a:bodyPr wrap="square" lIns="0" tIns="0" rIns="0" bIns="0" rtlCol="0" anchor="ctr"/>
-          <a:lstStyle/>
-          <a:p>
-            <a:r>
-              <a:rPr lang="en-US" sz="1050" dirty="0" smtClean="0">
-                <a:solidFill>
-                  <a:srgbClr val="0D1B2A"/>
-                </a:solidFill>
-                <a:latin typeface="Calibri (Body)"/>
-              </a:rPr>
-              <a:t>- </a:t>
-            </a:r>
-            <a:r>
-              <a:rPr lang="vi-VN" sz="1000" dirty="0" smtClean="0">
-                <a:solidFill>
-                  <a:srgbClr val="0D1B2A"/>
-                </a:solidFill>
-                <a:latin typeface="Calibri (Body)"/>
-              </a:rPr>
-              <a:t>Log </a:t>
-            </a:r>
-            <a:r>
-              <a:rPr lang="vi-VN" sz="1000" dirty="0">
-                <a:solidFill>
-                  <a:srgbClr val="0D1B2A"/>
-                </a:solidFill>
-                <a:latin typeface="Calibri (Body)"/>
-              </a:rPr>
-              <a:t>cho thấy cơ chế randomized defense đang hoạt động. Dòng [REAL] </a:t>
-            </a:r>
-            <a:r>
-              <a:rPr lang="vi-VN" sz="1000" dirty="0" smtClean="0">
-                <a:solidFill>
-                  <a:srgbClr val="0D1B2A"/>
-                </a:solidFill>
-                <a:latin typeface="Calibri (Body)"/>
-              </a:rPr>
-              <a:t>lúc 15:57:47 trả </a:t>
-            </a:r>
-            <a:r>
-              <a:rPr lang="vi-VN" sz="1000" dirty="0">
-                <a:solidFill>
-                  <a:srgbClr val="0D1B2A"/>
-                </a:solidFill>
-                <a:latin typeface="Calibri (Body)"/>
-              </a:rPr>
-              <a:t>về CPU thật (1%) cho </a:t>
-            </a:r>
-            <a:r>
-              <a:rPr lang="vi-VN" sz="1000" dirty="0" smtClean="0">
-                <a:solidFill>
-                  <a:srgbClr val="0D1B2A"/>
-                </a:solidFill>
-                <a:latin typeface="Calibri (Body)"/>
-              </a:rPr>
-              <a:t>HPA</a:t>
-            </a:r>
-            <a:r>
-              <a:rPr lang="en-US" sz="1000" dirty="0" smtClean="0">
-                <a:solidFill>
-                  <a:srgbClr val="0D1B2A"/>
-                </a:solidFill>
-                <a:latin typeface="Calibri (Body)"/>
-              </a:rPr>
-              <a:t>. </a:t>
-            </a:r>
-            <a:r>
-              <a:rPr lang="vi-VN" sz="1000" dirty="0" smtClean="0">
-                <a:solidFill>
-                  <a:srgbClr val="0D1B2A"/>
-                </a:solidFill>
-                <a:latin typeface="Calibri (Body)"/>
-              </a:rPr>
-              <a:t>Tiếp </a:t>
-            </a:r>
-            <a:r>
-              <a:rPr lang="vi-VN" sz="1000" dirty="0">
-                <a:solidFill>
-                  <a:srgbClr val="0D1B2A"/>
-                </a:solidFill>
-                <a:latin typeface="Calibri (Body)"/>
-              </a:rPr>
-              <a:t>theo dòng [FAKE] lúc 15:58:02 trả về 10% giả dù CPU thực tế là 1</a:t>
-            </a:r>
-            <a:r>
-              <a:rPr lang="vi-VN" sz="1000" dirty="0" smtClean="0">
-                <a:solidFill>
-                  <a:srgbClr val="0D1B2A"/>
-                </a:solidFill>
-                <a:latin typeface="Calibri (Body)"/>
-              </a:rPr>
-              <a:t>%</a:t>
-            </a:r>
-            <a:r>
-              <a:rPr lang="en-US" sz="1000" dirty="0" smtClean="0">
-                <a:solidFill>
-                  <a:srgbClr val="0D1B2A"/>
-                </a:solidFill>
-                <a:latin typeface="Calibri (Body)"/>
-              </a:rPr>
-              <a:t>...</a:t>
-            </a:r>
-          </a:p>
-        </p:txBody>
-      </p:sp>
-    </p:spTree>
-    <p:extLst>
-      <p:ext uri="{BB962C8B-B14F-4D97-AF65-F5344CB8AC3E}">
-        <p14:creationId xmlns:p14="http://schemas.microsoft.com/office/powerpoint/2010/main" val="3272244732"/>
-      </p:ext>
-    </p:extLst>
-  </p:cSld>
-  <p:clrMapOvr>
-    <a:masterClrMapping/>
-  </p:clrMapOvr>
-  <p:timing>
-    <p:tnLst>
-      <p:par>
-        <p:cTn id="1" dur="indefinite" restart="never" nodeType="tmRoot"/>
-      </p:par>
-    </p:tnLst>
-  </p:timing>
-</p:sld>
-</file>
-
-<file path=ppt/slides/slide22.xml><?xml version="1.0" encoding="utf-8"?>
-<p:sld xmlns:a="http://schemas.openxmlformats.org/drawingml/2006/main" xmlns:r="http://schemas.openxmlformats.org/officeDocument/2006/relationships" xmlns:p="http://schemas.openxmlformats.org/presentationml/2006/main">
-  <p:cSld>
-    <p:bg>
-      <p:bgPr>
-        <a:solidFill>
-          <a:srgbClr val="F4F7FB"/>
-        </a:solidFill>
-        <a:effectLst/>
-      </p:bgPr>
-    </p:bg>
-    <p:spTree>
-      <p:nvGrpSpPr>
-        <p:cNvPr id="1" name=""/>
-        <p:cNvGrpSpPr/>
-        <p:nvPr/>
-      </p:nvGrpSpPr>
-      <p:grpSpPr>
-        <a:xfrm>
-          <a:off x="0" y="0"/>
-          <a:ext cx="0" cy="0"/>
-          <a:chOff x="0" y="0"/>
-          <a:chExt cx="0" cy="0"/>
-        </a:xfrm>
-      </p:grpSpPr>
-      <p:sp>
-        <p:nvSpPr>
-          <p:cNvPr id="2" name="Shape 0"/>
-          <p:cNvSpPr/>
-          <p:nvPr/>
-        </p:nvSpPr>
-        <p:spPr>
-          <a:xfrm>
-            <a:off x="0" y="0"/>
-            <a:ext cx="9144000" cy="658368"/>
-          </a:xfrm>
-          <a:prstGeom prst="rect">
-            <a:avLst/>
-          </a:prstGeom>
-          <a:solidFill>
-            <a:srgbClr val="0D1B2A"/>
-          </a:solidFill>
-          <a:ln w="12700">
-            <a:solidFill>
-              <a:srgbClr val="0D1B2A"/>
-            </a:solidFill>
-            <a:prstDash val="solid"/>
-          </a:ln>
-        </p:spPr>
-      </p:sp>
-      <p:sp>
-        <p:nvSpPr>
-          <p:cNvPr id="4" name="Text 2"/>
-          <p:cNvSpPr/>
-          <p:nvPr/>
-        </p:nvSpPr>
-        <p:spPr>
-          <a:xfrm>
-            <a:off x="228600" y="0"/>
-            <a:ext cx="8686800" cy="658368"/>
-          </a:xfrm>
-          <a:prstGeom prst="rect">
-            <a:avLst/>
-          </a:prstGeom>
-          <a:noFill/>
-          <a:ln/>
-        </p:spPr>
-        <p:txBody>
-          <a:bodyPr wrap="square" lIns="0" tIns="0" rIns="0" bIns="0" rtlCol="0" anchor="ctr"/>
-          <a:lstStyle/>
-          <a:p>
-            <a:r>
-              <a:rPr lang="en-US" sz="2200" b="1" dirty="0">
-                <a:solidFill>
-                  <a:srgbClr val="FFFFFF"/>
-                </a:solidFill>
-              </a:rPr>
-              <a:t>DEMO · </a:t>
-            </a:r>
-            <a:r>
-              <a:rPr lang="en-US" sz="2200" b="1" dirty="0" err="1">
-                <a:solidFill>
-                  <a:srgbClr val="FFFFFF"/>
-                </a:solidFill>
-              </a:rPr>
-              <a:t>Giai</a:t>
-            </a:r>
-            <a:r>
-              <a:rPr lang="en-US" sz="2200" b="1" dirty="0">
-                <a:solidFill>
-                  <a:srgbClr val="FFFFFF"/>
-                </a:solidFill>
-              </a:rPr>
-              <a:t> </a:t>
-            </a:r>
-            <a:r>
-              <a:rPr lang="en-US" sz="2200" b="1" dirty="0" err="1">
-                <a:solidFill>
-                  <a:srgbClr val="FFFFFF"/>
-                </a:solidFill>
-              </a:rPr>
-              <a:t>đoạn</a:t>
-            </a:r>
-            <a:r>
-              <a:rPr lang="en-US" sz="2200" b="1" dirty="0">
-                <a:solidFill>
-                  <a:srgbClr val="FFFFFF"/>
-                </a:solidFill>
-              </a:rPr>
-              <a:t> 3 — </a:t>
-            </a:r>
-            <a:r>
-              <a:rPr lang="en-US" sz="2200" b="1" dirty="0" err="1">
-                <a:solidFill>
-                  <a:srgbClr val="FFFFFF"/>
-                </a:solidFill>
-              </a:rPr>
-              <a:t>Phòng</a:t>
-            </a:r>
-            <a:r>
-              <a:rPr lang="en-US" sz="2200" b="1" dirty="0">
-                <a:solidFill>
-                  <a:srgbClr val="FFFFFF"/>
-                </a:solidFill>
-              </a:rPr>
-              <a:t> </a:t>
-            </a:r>
-            <a:r>
-              <a:rPr lang="en-US" sz="2200" b="1" dirty="0" err="1">
-                <a:solidFill>
-                  <a:srgbClr val="FFFFFF"/>
-                </a:solidFill>
-              </a:rPr>
-              <a:t>thủ</a:t>
-            </a:r>
-            <a:r>
-              <a:rPr lang="en-US" sz="2200" b="1" dirty="0">
-                <a:solidFill>
-                  <a:srgbClr val="FFFFFF"/>
-                </a:solidFill>
-              </a:rPr>
-              <a:t>: Custom Metrics </a:t>
-            </a:r>
-            <a:r>
-              <a:rPr lang="en-US" sz="2200" b="1" dirty="0" smtClean="0">
-                <a:solidFill>
-                  <a:srgbClr val="FFFFFF"/>
-                </a:solidFill>
-              </a:rPr>
-              <a:t>Adapter</a:t>
-            </a:r>
-            <a:endParaRPr lang="en-US" sz="2200" dirty="0"/>
-          </a:p>
-        </p:txBody>
-      </p:sp>
-      <p:sp>
-        <p:nvSpPr>
-          <p:cNvPr id="5" name="Shape 3"/>
-          <p:cNvSpPr/>
-          <p:nvPr/>
-        </p:nvSpPr>
-        <p:spPr>
-          <a:xfrm>
-            <a:off x="0" y="4846320"/>
-            <a:ext cx="9144000" cy="297180"/>
-          </a:xfrm>
-          <a:prstGeom prst="rect">
-            <a:avLst/>
-          </a:prstGeom>
-          <a:solidFill>
-            <a:srgbClr val="111827"/>
-          </a:solidFill>
-          <a:ln w="12700">
-            <a:solidFill>
-              <a:srgbClr val="111827"/>
-            </a:solidFill>
-            <a:prstDash val="solid"/>
-          </a:ln>
-        </p:spPr>
-      </p:sp>
-      <p:sp>
-        <p:nvSpPr>
-          <p:cNvPr id="6" name="Text 4"/>
-          <p:cNvSpPr/>
-          <p:nvPr/>
-        </p:nvSpPr>
-        <p:spPr>
-          <a:xfrm>
-            <a:off x="274320" y="4846320"/>
-            <a:ext cx="8595360" cy="297180"/>
-          </a:xfrm>
-          <a:prstGeom prst="rect">
-            <a:avLst/>
-          </a:prstGeom>
-          <a:noFill/>
-          <a:ln/>
-        </p:spPr>
-        <p:txBody>
-          <a:bodyPr wrap="square" lIns="0" tIns="0" rIns="0" bIns="0" rtlCol="0" anchor="ctr"/>
-          <a:lstStyle/>
-          <a:p>
-            <a:pPr marL="0" indent="0">
-              <a:buNone/>
-            </a:pPr>
-            <a:r>
-              <a:rPr lang="en-US" sz="900" dirty="0">
-                <a:solidFill>
-                  <a:srgbClr val="8BA0B4"/>
-                </a:solidFill>
-              </a:rPr>
-              <a:t>Nguyen Tien Lam | HUST | 2026</a:t>
-            </a:r>
-            <a:endParaRPr lang="en-US" sz="900" dirty="0"/>
-          </a:p>
-        </p:txBody>
-      </p:sp>
-      <p:sp>
-        <p:nvSpPr>
-          <p:cNvPr id="7" name="Shape 5"/>
-          <p:cNvSpPr/>
-          <p:nvPr/>
-        </p:nvSpPr>
-        <p:spPr>
-          <a:xfrm>
-            <a:off x="274320" y="804672"/>
-            <a:ext cx="8869680" cy="3950208"/>
-          </a:xfrm>
-          <a:prstGeom prst="rect">
-            <a:avLst/>
-          </a:prstGeom>
-          <a:solidFill>
-            <a:srgbClr val="FFFFFF"/>
-          </a:solidFill>
-          <a:ln w="9525">
-            <a:solidFill>
-              <a:srgbClr val="D4E3EE"/>
-            </a:solidFill>
-            <a:prstDash val="solid"/>
-          </a:ln>
-          <a:effectLst>
-            <a:outerShdw blurRad="63500" dist="25400" dir="8100000" algn="bl" rotWithShape="0">
-              <a:srgbClr val="000000">
-                <a:alpha val="7000"/>
-              </a:srgbClr>
-            </a:outerShdw>
-          </a:effectLst>
-        </p:spPr>
-      </p:sp>
-      <p:sp>
-        <p:nvSpPr>
-          <p:cNvPr id="8" name="Shape 6"/>
-          <p:cNvSpPr/>
-          <p:nvPr/>
-        </p:nvSpPr>
-        <p:spPr>
-          <a:xfrm>
-            <a:off x="274320" y="804672"/>
-            <a:ext cx="54864" cy="3950208"/>
-          </a:xfrm>
-          <a:prstGeom prst="rect">
-            <a:avLst/>
-          </a:prstGeom>
-          <a:solidFill>
-            <a:srgbClr val="2D9D5A"/>
-          </a:solidFill>
-          <a:ln w="12700">
-            <a:solidFill>
-              <a:srgbClr val="2D9D5A"/>
-            </a:solidFill>
-            <a:prstDash val="solid"/>
-          </a:ln>
-        </p:spPr>
-      </p:sp>
-      <p:sp>
-        <p:nvSpPr>
-          <p:cNvPr id="9" name="Text 7"/>
-          <p:cNvSpPr/>
-          <p:nvPr/>
-        </p:nvSpPr>
-        <p:spPr>
-          <a:xfrm>
-            <a:off x="457199" y="868680"/>
-            <a:ext cx="5194897" cy="320040"/>
-          </a:xfrm>
-          <a:prstGeom prst="rect">
-            <a:avLst/>
-          </a:prstGeom>
-          <a:noFill/>
-          <a:ln/>
-        </p:spPr>
-        <p:txBody>
-          <a:bodyPr wrap="square" lIns="0" tIns="0" rIns="0" bIns="0" rtlCol="0" anchor="ctr"/>
-          <a:lstStyle/>
-          <a:p>
-            <a:r>
-              <a:rPr lang="en-US" sz="1200" b="1" dirty="0" err="1" smtClean="0">
-                <a:solidFill>
-                  <a:srgbClr val="0D1B2A"/>
-                </a:solidFill>
-              </a:rPr>
-              <a:t>Thực</a:t>
-            </a:r>
-            <a:r>
-              <a:rPr lang="en-US" sz="1200" b="1" dirty="0" smtClean="0">
-                <a:solidFill>
-                  <a:srgbClr val="0D1B2A"/>
-                </a:solidFill>
-              </a:rPr>
-              <a:t> </a:t>
-            </a:r>
-            <a:r>
-              <a:rPr lang="en-US" sz="1200" b="1" dirty="0" err="1" smtClean="0">
-                <a:solidFill>
-                  <a:srgbClr val="0D1B2A"/>
-                </a:solidFill>
-              </a:rPr>
-              <a:t>hiện</a:t>
-            </a:r>
-            <a:r>
-              <a:rPr lang="en-US" sz="1200" b="1" dirty="0" smtClean="0">
-                <a:solidFill>
-                  <a:srgbClr val="0D1B2A"/>
-                </a:solidFill>
-              </a:rPr>
-              <a:t> </a:t>
-            </a:r>
-            <a:r>
-              <a:rPr lang="en-US" sz="1200" b="1" dirty="0" err="1" smtClean="0">
-                <a:solidFill>
-                  <a:srgbClr val="0D1B2A"/>
-                </a:solidFill>
-              </a:rPr>
-              <a:t>tấn</a:t>
-            </a:r>
-            <a:r>
-              <a:rPr lang="en-US" sz="1200" b="1" dirty="0" smtClean="0">
-                <a:solidFill>
-                  <a:srgbClr val="0D1B2A"/>
-                </a:solidFill>
-              </a:rPr>
-              <a:t> </a:t>
-            </a:r>
-            <a:r>
-              <a:rPr lang="en-US" sz="1200" b="1" dirty="0" err="1" smtClean="0">
-                <a:solidFill>
-                  <a:srgbClr val="0D1B2A"/>
-                </a:solidFill>
-              </a:rPr>
-              <a:t>công</a:t>
-            </a:r>
-            <a:r>
-              <a:rPr lang="en-US" sz="1200" b="1" dirty="0" smtClean="0">
-                <a:solidFill>
-                  <a:srgbClr val="0D1B2A"/>
-                </a:solidFill>
-              </a:rPr>
-              <a:t> </a:t>
-            </a:r>
-            <a:r>
-              <a:rPr lang="en-US" sz="1200" b="1" dirty="0" err="1" smtClean="0">
-                <a:solidFill>
-                  <a:srgbClr val="0D1B2A"/>
-                </a:solidFill>
-              </a:rPr>
-              <a:t>bơm</a:t>
-            </a:r>
-            <a:r>
-              <a:rPr lang="en-US" sz="1200" b="1" dirty="0" smtClean="0">
-                <a:solidFill>
-                  <a:srgbClr val="0D1B2A"/>
-                </a:solidFill>
-              </a:rPr>
-              <a:t> </a:t>
-            </a:r>
-            <a:r>
-              <a:rPr lang="en-US" sz="1200" b="1" dirty="0" err="1" smtClean="0">
-                <a:solidFill>
-                  <a:srgbClr val="0D1B2A"/>
-                </a:solidFill>
-              </a:rPr>
-              <a:t>lưu</a:t>
-            </a:r>
-            <a:r>
-              <a:rPr lang="en-US" sz="1200" b="1" dirty="0" smtClean="0">
-                <a:solidFill>
-                  <a:srgbClr val="0D1B2A"/>
-                </a:solidFill>
-              </a:rPr>
-              <a:t> </a:t>
-            </a:r>
-            <a:r>
-              <a:rPr lang="en-US" sz="1200" b="1" dirty="0" err="1" smtClean="0">
-                <a:solidFill>
-                  <a:srgbClr val="0D1B2A"/>
-                </a:solidFill>
-              </a:rPr>
-              <a:t>lượng</a:t>
-            </a:r>
-            <a:r>
-              <a:rPr lang="en-US" sz="1200" b="1" dirty="0" smtClean="0">
-                <a:solidFill>
-                  <a:srgbClr val="0D1B2A"/>
-                </a:solidFill>
-              </a:rPr>
-              <a:t> </a:t>
-            </a:r>
-            <a:r>
-              <a:rPr lang="en-US" sz="1200" b="1" dirty="0" err="1" smtClean="0">
-                <a:solidFill>
-                  <a:srgbClr val="0D1B2A"/>
-                </a:solidFill>
-              </a:rPr>
-              <a:t>sau</a:t>
-            </a:r>
-            <a:r>
-              <a:rPr lang="en-US" sz="1200" b="1" dirty="0" smtClean="0">
-                <a:solidFill>
-                  <a:srgbClr val="0D1B2A"/>
-                </a:solidFill>
-              </a:rPr>
-              <a:t> </a:t>
-            </a:r>
-            <a:r>
-              <a:rPr lang="en-US" sz="1200" b="1" dirty="0" err="1" smtClean="0">
-                <a:solidFill>
-                  <a:srgbClr val="0D1B2A"/>
-                </a:solidFill>
-              </a:rPr>
-              <a:t>khi</a:t>
-            </a:r>
-            <a:r>
-              <a:rPr lang="en-US" sz="1200" b="1" dirty="0" smtClean="0">
-                <a:solidFill>
-                  <a:srgbClr val="0D1B2A"/>
-                </a:solidFill>
-              </a:rPr>
-              <a:t> </a:t>
-            </a:r>
-            <a:r>
-              <a:rPr lang="en-US" sz="1200" b="1" dirty="0" err="1" smtClean="0">
-                <a:solidFill>
-                  <a:srgbClr val="0D1B2A"/>
-                </a:solidFill>
-              </a:rPr>
-              <a:t>đã</a:t>
-            </a:r>
-            <a:r>
-              <a:rPr lang="en-US" sz="1200" b="1" dirty="0" smtClean="0">
-                <a:solidFill>
-                  <a:srgbClr val="0D1B2A"/>
-                </a:solidFill>
-              </a:rPr>
-              <a:t> setup </a:t>
-            </a:r>
-            <a:r>
-              <a:rPr lang="en-US" sz="1200" b="1" dirty="0" err="1" smtClean="0">
-                <a:solidFill>
-                  <a:srgbClr val="0D1B2A"/>
-                </a:solidFill>
-              </a:rPr>
-              <a:t>cơ</a:t>
-            </a:r>
-            <a:r>
-              <a:rPr lang="en-US" sz="1200" b="1" dirty="0" smtClean="0">
-                <a:solidFill>
-                  <a:srgbClr val="0D1B2A"/>
-                </a:solidFill>
-              </a:rPr>
-              <a:t> </a:t>
-            </a:r>
-            <a:r>
-              <a:rPr lang="en-US" sz="1200" b="1" dirty="0" err="1">
-                <a:solidFill>
-                  <a:srgbClr val="0D1B2A"/>
-                </a:solidFill>
-              </a:rPr>
-              <a:t>chế</a:t>
-            </a:r>
-            <a:r>
-              <a:rPr lang="en-US" sz="1200" b="1" dirty="0">
-                <a:solidFill>
-                  <a:srgbClr val="0D1B2A"/>
-                </a:solidFill>
-              </a:rPr>
-              <a:t> Randomization HPA</a:t>
-            </a:r>
-            <a:r>
-              <a:rPr lang="en-US" sz="1200" b="1" dirty="0" smtClean="0">
-                <a:solidFill>
-                  <a:srgbClr val="0D1B2A"/>
-                </a:solidFill>
-              </a:rPr>
-              <a:t> </a:t>
-            </a:r>
-            <a:endParaRPr lang="en-US" sz="1200" dirty="0"/>
-          </a:p>
-        </p:txBody>
-      </p:sp>
-      <p:sp>
-        <p:nvSpPr>
-          <p:cNvPr id="39" name="Shape 1"/>
-          <p:cNvSpPr/>
-          <p:nvPr/>
-        </p:nvSpPr>
-        <p:spPr>
-          <a:xfrm>
-            <a:off x="0" y="0"/>
-            <a:ext cx="109728" cy="658368"/>
-          </a:xfrm>
-          <a:prstGeom prst="rect">
-            <a:avLst/>
-          </a:prstGeom>
-          <a:solidFill>
-            <a:srgbClr val="2D9D5A"/>
-          </a:solidFill>
-          <a:ln w="12700">
-            <a:solidFill>
-              <a:srgbClr val="2D9D5A"/>
-            </a:solidFill>
-            <a:prstDash val="solid"/>
-          </a:ln>
-        </p:spPr>
-      </p:sp>
-      <p:pic>
-        <p:nvPicPr>
-          <p:cNvPr id="3" name="Picture 2"/>
-          <p:cNvPicPr>
-            <a:picLocks noChangeAspect="1"/>
-          </p:cNvPicPr>
-          <p:nvPr/>
-        </p:nvPicPr>
-        <p:blipFill>
-          <a:blip r:embed="rId3"/>
-          <a:stretch>
-            <a:fillRect/>
-          </a:stretch>
-        </p:blipFill>
-        <p:spPr>
-          <a:xfrm>
-            <a:off x="457199" y="1141465"/>
-            <a:ext cx="3732203" cy="3565674"/>
-          </a:xfrm>
-          <a:prstGeom prst="rect">
-            <a:avLst/>
-          </a:prstGeom>
-        </p:spPr>
-      </p:pic>
-      <p:sp>
-        <p:nvSpPr>
-          <p:cNvPr id="22" name="TextBox 21"/>
+          <p:cNvPr id="10" name="TextBox 9"/>
           <p:cNvSpPr txBox="1"/>
           <p:nvPr/>
         </p:nvSpPr>
         <p:spPr>
           <a:xfrm>
-            <a:off x="4351071" y="1294889"/>
-            <a:ext cx="4252881" cy="1384995"/>
+            <a:off x="6449302" y="1248553"/>
+            <a:ext cx="2623135" cy="3093154"/>
           </a:xfrm>
           <a:prstGeom prst="rect">
             <a:avLst/>
@@ -21126,408 +19368,34 @@
           </a:bodyPr>
           <a:lstStyle/>
           <a:p>
-            <a:pPr marL="171450" indent="-171450">
-              <a:buFontTx/>
-              <a:buChar char="-"/>
-            </a:pPr>
-            <a:r>
-              <a:rPr lang="en-US" sz="1200" dirty="0" err="1" smtClean="0"/>
-              <a:t>Với</a:t>
-            </a:r>
-            <a:r>
-              <a:rPr lang="en-US" sz="1200" dirty="0" smtClean="0"/>
-              <a:t> </a:t>
-            </a:r>
-            <a:r>
-              <a:rPr lang="en-US" sz="1200" dirty="0" err="1" smtClean="0"/>
-              <a:t>hệ</a:t>
-            </a:r>
-            <a:r>
-              <a:rPr lang="en-US" sz="1200" dirty="0" smtClean="0"/>
-              <a:t> </a:t>
-            </a:r>
-            <a:r>
-              <a:rPr lang="en-US" sz="1200" dirty="0" err="1" smtClean="0"/>
-              <a:t>số</a:t>
-            </a:r>
-            <a:r>
-              <a:rPr lang="en-US" sz="1200" dirty="0" smtClean="0"/>
-              <a:t> RNG = 0.5 (50% </a:t>
-            </a:r>
-            <a:r>
-              <a:rPr lang="en-US" sz="1200" dirty="0" err="1" smtClean="0"/>
-              <a:t>trả</a:t>
-            </a:r>
-            <a:r>
-              <a:rPr lang="en-US" sz="1200" dirty="0" smtClean="0"/>
-              <a:t> </a:t>
-            </a:r>
-            <a:r>
-              <a:rPr lang="en-US" sz="1200" dirty="0" err="1" smtClean="0"/>
-              <a:t>về</a:t>
-            </a:r>
-            <a:r>
-              <a:rPr lang="en-US" sz="1200" dirty="0" smtClean="0"/>
-              <a:t> REAL, 50 % </a:t>
-            </a:r>
-            <a:r>
-              <a:rPr lang="en-US" sz="1200" dirty="0" err="1" smtClean="0"/>
-              <a:t>trả</a:t>
-            </a:r>
-            <a:r>
-              <a:rPr lang="en-US" sz="1200" dirty="0" smtClean="0"/>
-              <a:t> </a:t>
-            </a:r>
-            <a:r>
-              <a:rPr lang="en-US" sz="1200" dirty="0" err="1" smtClean="0"/>
-              <a:t>về</a:t>
-            </a:r>
-            <a:r>
-              <a:rPr lang="en-US" sz="1200" dirty="0" smtClean="0"/>
-              <a:t> FAKE) ta </a:t>
-            </a:r>
-            <a:r>
-              <a:rPr lang="en-US" sz="1200" dirty="0" err="1" smtClean="0"/>
-              <a:t>có</a:t>
-            </a:r>
-            <a:r>
-              <a:rPr lang="en-US" sz="1200" dirty="0" smtClean="0"/>
-              <a:t> </a:t>
-            </a:r>
-            <a:r>
-              <a:rPr lang="en-US" sz="1200" dirty="0" err="1" smtClean="0"/>
-              <a:t>thể</a:t>
-            </a:r>
-            <a:r>
-              <a:rPr lang="en-US" sz="1200" dirty="0" smtClean="0"/>
-              <a:t> </a:t>
-            </a:r>
-            <a:r>
-              <a:rPr lang="en-US" sz="1200" dirty="0" err="1" smtClean="0"/>
-              <a:t>thấy</a:t>
-            </a:r>
-            <a:r>
-              <a:rPr lang="en-US" sz="1200" dirty="0" smtClean="0"/>
-              <a:t> </a:t>
-            </a:r>
-            <a:r>
-              <a:rPr lang="en-US" sz="1200" dirty="0" err="1" smtClean="0"/>
-              <a:t>hệ</a:t>
-            </a:r>
-            <a:r>
-              <a:rPr lang="en-US" sz="1200" dirty="0" smtClean="0"/>
-              <a:t> </a:t>
-            </a:r>
-            <a:r>
-              <a:rPr lang="en-US" sz="1200" dirty="0" err="1" smtClean="0"/>
-              <a:t>thống</a:t>
-            </a:r>
-            <a:r>
-              <a:rPr lang="en-US" sz="1200" dirty="0" smtClean="0"/>
-              <a:t> </a:t>
-            </a:r>
-            <a:r>
-              <a:rPr lang="en-US" sz="1200" dirty="0" err="1" smtClean="0"/>
-              <a:t>khá</a:t>
-            </a:r>
-            <a:r>
-              <a:rPr lang="en-US" sz="1200" dirty="0" smtClean="0"/>
-              <a:t> </a:t>
-            </a:r>
-            <a:r>
-              <a:rPr lang="en-US" sz="1200" dirty="0" err="1" smtClean="0"/>
-              <a:t>ổn</a:t>
-            </a:r>
-            <a:r>
-              <a:rPr lang="en-US" sz="1200" dirty="0" smtClean="0"/>
-              <a:t> </a:t>
-            </a:r>
-            <a:r>
-              <a:rPr lang="en-US" sz="1200" dirty="0" err="1" smtClean="0"/>
-              <a:t>định</a:t>
-            </a:r>
-            <a:r>
-              <a:rPr lang="en-US" sz="1200" dirty="0" smtClean="0"/>
-              <a:t>, </a:t>
-            </a:r>
-            <a:r>
-              <a:rPr lang="en-US" sz="1200" dirty="0" err="1" smtClean="0"/>
-              <a:t>mặc</a:t>
-            </a:r>
-            <a:r>
-              <a:rPr lang="en-US" sz="1200" dirty="0" smtClean="0"/>
-              <a:t> </a:t>
-            </a:r>
-            <a:r>
-              <a:rPr lang="en-US" sz="1200" dirty="0" err="1" smtClean="0"/>
-              <a:t>dù</a:t>
-            </a:r>
-            <a:r>
-              <a:rPr lang="en-US" sz="1200" dirty="0" smtClean="0"/>
-              <a:t> CPU </a:t>
-            </a:r>
-            <a:r>
-              <a:rPr lang="en-US" sz="1200" dirty="0" err="1" smtClean="0"/>
-              <a:t>của</a:t>
-            </a:r>
-            <a:r>
-              <a:rPr lang="en-US" sz="1200" dirty="0" smtClean="0"/>
-              <a:t> pod </a:t>
-            </a:r>
-            <a:r>
-              <a:rPr lang="en-US" sz="1200" dirty="0" err="1" smtClean="0"/>
-              <a:t>bị</a:t>
-            </a:r>
-            <a:r>
-              <a:rPr lang="en-US" sz="1200" dirty="0" smtClean="0"/>
-              <a:t> </a:t>
-            </a:r>
-            <a:r>
-              <a:rPr lang="en-US" sz="1200" dirty="0" err="1" smtClean="0"/>
-              <a:t>đẩy</a:t>
-            </a:r>
-            <a:r>
-              <a:rPr lang="en-US" sz="1200" dirty="0" smtClean="0"/>
-              <a:t> </a:t>
-            </a:r>
-            <a:r>
-              <a:rPr lang="en-US" sz="1200" dirty="0" err="1" smtClean="0"/>
-              <a:t>lên</a:t>
-            </a:r>
-            <a:r>
-              <a:rPr lang="en-US" sz="1200" dirty="0" smtClean="0"/>
-              <a:t> </a:t>
-            </a:r>
-            <a:r>
-              <a:rPr lang="en-US" sz="1200" dirty="0" err="1" smtClean="0"/>
-              <a:t>khá</a:t>
-            </a:r>
-            <a:r>
-              <a:rPr lang="en-US" sz="1200" dirty="0" smtClean="0"/>
-              <a:t> </a:t>
-            </a:r>
-            <a:r>
-              <a:rPr lang="en-US" sz="1200" dirty="0" err="1" smtClean="0"/>
-              <a:t>cao</a:t>
-            </a:r>
-            <a:r>
-              <a:rPr lang="en-US" sz="1200" dirty="0" smtClean="0"/>
-              <a:t> so </a:t>
-            </a:r>
-            <a:r>
-              <a:rPr lang="en-US" sz="1200" dirty="0" err="1" smtClean="0"/>
-              <a:t>với</a:t>
-            </a:r>
-            <a:r>
-              <a:rPr lang="en-US" sz="1200" dirty="0" smtClean="0"/>
-              <a:t> </a:t>
-            </a:r>
-            <a:r>
-              <a:rPr lang="en-US" sz="1200" dirty="0" err="1" smtClean="0"/>
-              <a:t>ngưỡng</a:t>
-            </a:r>
-            <a:r>
-              <a:rPr lang="en-US" sz="1200" dirty="0" smtClean="0"/>
-              <a:t> </a:t>
-            </a:r>
-            <a:r>
-              <a:rPr lang="en-US" sz="1200" dirty="0" err="1" smtClean="0"/>
-              <a:t>thiết</a:t>
-            </a:r>
-            <a:r>
-              <a:rPr lang="en-US" sz="1200" dirty="0" smtClean="0"/>
-              <a:t> </a:t>
-            </a:r>
-            <a:r>
-              <a:rPr lang="en-US" sz="1200" dirty="0" err="1" smtClean="0"/>
-              <a:t>lập</a:t>
-            </a:r>
-            <a:r>
-              <a:rPr lang="en-US" sz="1200" dirty="0" smtClean="0"/>
-              <a:t> </a:t>
-            </a:r>
-            <a:r>
-              <a:rPr lang="en-US" sz="1200" dirty="0" err="1" smtClean="0"/>
-              <a:t>nhưng</a:t>
-            </a:r>
-            <a:r>
-              <a:rPr lang="en-US" sz="1200" dirty="0" smtClean="0"/>
-              <a:t> </a:t>
-            </a:r>
-            <a:r>
-              <a:rPr lang="en-US" sz="1200" dirty="0" err="1" smtClean="0"/>
-              <a:t>số</a:t>
-            </a:r>
-            <a:r>
-              <a:rPr lang="en-US" sz="1200" dirty="0" smtClean="0"/>
-              <a:t> Replica (pod) </a:t>
-            </a:r>
-            <a:r>
-              <a:rPr lang="en-US" sz="1200" dirty="0" err="1" smtClean="0"/>
-              <a:t>gần</a:t>
-            </a:r>
-            <a:r>
-              <a:rPr lang="en-US" sz="1200" dirty="0" smtClean="0"/>
-              <a:t> </a:t>
-            </a:r>
-            <a:r>
-              <a:rPr lang="en-US" sz="1200" dirty="0" err="1" smtClean="0"/>
-              <a:t>như</a:t>
-            </a:r>
-            <a:r>
-              <a:rPr lang="en-US" sz="1200" dirty="0" smtClean="0"/>
-              <a:t> </a:t>
-            </a:r>
-            <a:r>
-              <a:rPr lang="en-US" sz="1200" dirty="0" err="1" smtClean="0"/>
-              <a:t>ổn</a:t>
-            </a:r>
-            <a:r>
-              <a:rPr lang="en-US" sz="1200" dirty="0" smtClean="0"/>
-              <a:t> </a:t>
-            </a:r>
-            <a:r>
-              <a:rPr lang="en-US" sz="1200" dirty="0" err="1" smtClean="0"/>
-              <a:t>định</a:t>
-            </a:r>
-            <a:r>
-              <a:rPr lang="en-US" sz="1200" dirty="0" smtClean="0"/>
-              <a:t>, </a:t>
-            </a:r>
-            <a:r>
-              <a:rPr lang="en-US" sz="1200" dirty="0" err="1" smtClean="0"/>
-              <a:t>không</a:t>
-            </a:r>
-            <a:r>
-              <a:rPr lang="en-US" sz="1200" dirty="0" smtClean="0"/>
-              <a:t> </a:t>
-            </a:r>
-            <a:r>
-              <a:rPr lang="en-US" sz="1200" dirty="0" err="1" smtClean="0"/>
-              <a:t>bị</a:t>
-            </a:r>
-            <a:r>
-              <a:rPr lang="en-US" sz="1200" dirty="0" smtClean="0"/>
-              <a:t> scale </a:t>
-            </a:r>
-            <a:r>
-              <a:rPr lang="en-US" sz="1200" dirty="0" err="1" smtClean="0"/>
-              <a:t>lên</a:t>
-            </a:r>
-            <a:r>
-              <a:rPr lang="en-US" sz="1200" dirty="0"/>
-              <a:t>, </a:t>
-            </a:r>
-            <a:r>
-              <a:rPr lang="en-US" sz="1200" dirty="0" err="1"/>
-              <a:t>trong</a:t>
-            </a:r>
-            <a:r>
-              <a:rPr lang="en-US" sz="1200" dirty="0"/>
-              <a:t> </a:t>
-            </a:r>
-            <a:r>
-              <a:rPr lang="en-US" sz="1200" dirty="0" err="1"/>
-              <a:t>khi</a:t>
-            </a:r>
-            <a:r>
-              <a:rPr lang="en-US" sz="1200" dirty="0"/>
-              <a:t> requests </a:t>
-            </a:r>
-            <a:r>
-              <a:rPr lang="en-US" sz="1200" dirty="0" err="1"/>
-              <a:t>bị</a:t>
-            </a:r>
-            <a:r>
-              <a:rPr lang="en-US" sz="1200" dirty="0"/>
-              <a:t> drop ở </a:t>
-            </a:r>
-            <a:r>
-              <a:rPr lang="en-US" sz="1200" dirty="0" err="1"/>
-              <a:t>mức</a:t>
-            </a:r>
-            <a:r>
-              <a:rPr lang="en-US" sz="1200" dirty="0"/>
-              <a:t> </a:t>
-            </a:r>
-            <a:r>
-              <a:rPr lang="en-US" sz="1200" dirty="0" err="1"/>
-              <a:t>không</a:t>
-            </a:r>
-            <a:r>
-              <a:rPr lang="en-US" sz="1200" dirty="0"/>
-              <a:t> </a:t>
-            </a:r>
-            <a:r>
-              <a:rPr lang="en-US" sz="1200" dirty="0" err="1"/>
-              <a:t>đáng</a:t>
-            </a:r>
-            <a:r>
-              <a:rPr lang="en-US" sz="1200" dirty="0"/>
-              <a:t> </a:t>
-            </a:r>
-            <a:r>
-              <a:rPr lang="en-US" sz="1200" dirty="0" err="1"/>
-              <a:t>kể</a:t>
-            </a:r>
-            <a:endParaRPr lang="en-US" sz="1200" dirty="0" smtClean="0"/>
-          </a:p>
-          <a:p>
-            <a:pPr marL="171450" indent="-171450">
-              <a:buFontTx/>
-              <a:buChar char="-"/>
-            </a:pPr>
-            <a:endParaRPr lang="en-US" sz="1200" dirty="0"/>
-          </a:p>
-          <a:p>
-            <a:pPr marL="171450" indent="-171450">
-              <a:buFontTx/>
-              <a:buChar char="-"/>
-            </a:pPr>
-            <a:r>
-              <a:rPr lang="en-US" sz="1200" dirty="0" err="1" smtClean="0"/>
-              <a:t>Kiểm</a:t>
-            </a:r>
-            <a:r>
-              <a:rPr lang="en-US" sz="1200" dirty="0" smtClean="0"/>
-              <a:t> </a:t>
-            </a:r>
-            <a:r>
-              <a:rPr lang="en-US" sz="1200" dirty="0" err="1" smtClean="0"/>
-              <a:t>tra</a:t>
-            </a:r>
-            <a:r>
-              <a:rPr lang="en-US" sz="1200" dirty="0" smtClean="0"/>
-              <a:t> log:</a:t>
-            </a:r>
-            <a:endParaRPr lang="en-US" sz="1200" dirty="0"/>
-          </a:p>
-        </p:txBody>
-      </p:sp>
-      <p:pic>
-        <p:nvPicPr>
-          <p:cNvPr id="23" name="Picture 22"/>
-          <p:cNvPicPr>
-            <a:picLocks noChangeAspect="1"/>
-          </p:cNvPicPr>
-          <p:nvPr/>
-        </p:nvPicPr>
-        <p:blipFill>
-          <a:blip r:embed="rId4"/>
-          <a:stretch>
-            <a:fillRect/>
-          </a:stretch>
-        </p:blipFill>
-        <p:spPr>
-          <a:xfrm>
-            <a:off x="4351071" y="2726220"/>
-            <a:ext cx="4604957" cy="991162"/>
-          </a:xfrm>
-          <a:prstGeom prst="rect">
-            <a:avLst/>
-          </a:prstGeom>
-        </p:spPr>
-      </p:pic>
+            <a:r>
+              <a:rPr lang="en-US" sz="1300" dirty="0" smtClean="0"/>
+              <a:t>=&gt; </a:t>
+            </a:r>
+            <a:r>
+              <a:rPr lang="en-US" sz="1300" dirty="0"/>
+              <a:t>K</a:t>
+            </a:r>
+            <a:r>
+              <a:rPr lang="vi-VN" sz="1300" dirty="0" smtClean="0"/>
+              <a:t>ết </a:t>
+            </a:r>
+            <a:r>
+              <a:rPr lang="vi-VN" sz="1300" dirty="0"/>
+              <a:t>quả quan sát được trên hệ thống giám sát cho thấy hiệu quả rõ rệt trong việc vô hiệu hóa chiến lược tấn công EDoS dạng state-aware. </a:t>
+            </a:r>
+            <a:r>
+              <a:rPr lang="vi-VN" sz="1300" dirty="0" smtClean="0"/>
+              <a:t>Mặc </a:t>
+            </a:r>
+            <a:r>
+              <a:rPr lang="vi-VN" sz="1300" dirty="0"/>
+              <a:t>dù mức sử dụng CPU thực tế của ứng dụng dao động mạnh trong suốt quá trình tấn công, đạt đỉnh 211% và duy trì trung bình khoảng 85% so với tài nguyên yêu cầu, số lượng replicas của dịch vụ chỉ tăng từ một lên 3 pod tại thời điểm khởi phát và sau đó được giữ ổn định trong toàn bộ khoảng thời gian còn lại</a:t>
+            </a:r>
+            <a:endParaRPr lang="en-US" sz="1300" dirty="0"/>
+          </a:p>
+        </p:txBody>
+      </p:sp>
     </p:spTree>
     <p:extLst>
       <p:ext uri="{BB962C8B-B14F-4D97-AF65-F5344CB8AC3E}">
@@ -21548,7 +19416,7 @@
 </p:sld>
 </file>
 
-<file path=ppt/slides/slide23.xml><?xml version="1.0" encoding="utf-8"?>
+<file path=ppt/slides/slide22.xml><?xml version="1.0" encoding="utf-8"?>
 <p:sld xmlns:a="http://schemas.openxmlformats.org/drawingml/2006/main" xmlns:r="http://schemas.openxmlformats.org/officeDocument/2006/relationships" xmlns:p="http://schemas.openxmlformats.org/presentationml/2006/main">
   <p:cSld name="Slide 12">
     <p:bg>
